--- a/docs/ark_theme_presentation_slide.pptx
+++ b/docs/ark_theme_presentation_slide.pptx
@@ -1,31 +1,32 @@
 
 <file path=ppt/presentation.xml><?xml version="1.0" encoding="utf-8"?>
-<p:presentation xmlns:a="http://schemas.openxmlformats.org/drawingml/2006/main" xmlns:r="http://schemas.openxmlformats.org/officeDocument/2006/relationships" xmlns:p="http://schemas.openxmlformats.org/presentationml/2006/main" saveSubsetFonts="1" autoCompressPictures="0">
+<p:presentation xmlns:a="http://schemas.openxmlformats.org/drawingml/2006/main" xmlns:r="http://schemas.openxmlformats.org/officeDocument/2006/relationships" xmlns:p="http://schemas.openxmlformats.org/presentationml/2006/main" showSpecialPlsOnTitleSld="0" saveSubsetFonts="1" autoCompressPictures="0">
   <p:sldMasterIdLst>
     <p:sldMasterId id="2147483648" r:id="rId1"/>
   </p:sldMasterIdLst>
   <p:notesMasterIdLst>
-    <p:notesMasterId r:id="rId20"/>
+    <p:notesMasterId r:id="rId21"/>
   </p:notesMasterIdLst>
   <p:sldIdLst>
     <p:sldId id="256" r:id="rId2"/>
     <p:sldId id="263" r:id="rId3"/>
-    <p:sldId id="264" r:id="rId4"/>
-    <p:sldId id="328" r:id="rId5"/>
+    <p:sldId id="289" r:id="rId4"/>
+    <p:sldId id="264" r:id="rId5"/>
     <p:sldId id="326" r:id="rId6"/>
-    <p:sldId id="330" r:id="rId7"/>
-    <p:sldId id="332" r:id="rId8"/>
-    <p:sldId id="391" r:id="rId9"/>
-    <p:sldId id="413" r:id="rId10"/>
-    <p:sldId id="398" r:id="rId11"/>
-    <p:sldId id="295" r:id="rId12"/>
-    <p:sldId id="257" r:id="rId13"/>
-    <p:sldId id="331" r:id="rId14"/>
-    <p:sldId id="265" r:id="rId15"/>
-    <p:sldId id="267" r:id="rId16"/>
-    <p:sldId id="269" r:id="rId17"/>
-    <p:sldId id="392" r:id="rId18"/>
-    <p:sldId id="393" r:id="rId19"/>
+    <p:sldId id="328" r:id="rId7"/>
+    <p:sldId id="330" r:id="rId8"/>
+    <p:sldId id="332" r:id="rId9"/>
+    <p:sldId id="391" r:id="rId10"/>
+    <p:sldId id="413" r:id="rId11"/>
+    <p:sldId id="398" r:id="rId12"/>
+    <p:sldId id="295" r:id="rId13"/>
+    <p:sldId id="257" r:id="rId14"/>
+    <p:sldId id="331" r:id="rId15"/>
+    <p:sldId id="265" r:id="rId16"/>
+    <p:sldId id="267" r:id="rId17"/>
+    <p:sldId id="269" r:id="rId18"/>
+    <p:sldId id="392" r:id="rId19"/>
+    <p:sldId id="393" r:id="rId20"/>
   </p:sldIdLst>
   <p:sldSz cx="12192000" cy="6858000"/>
   <p:notesSz cx="6858000" cy="9144000"/>
@@ -214,7 +215,7 @@
           <a:p>
             <a:fld id="{1A127E3B-03AF-1F42-98F8-1A42E6319B7D}" type="datetimeFigureOut">
               <a:rPr kumimoji="1" lang="ja-JP" altLang="en-US" smtClean="0"/>
-              <a:t>2025/12/12</a:t>
+              <a:t>2025/12/22</a:t>
             </a:fld>
             <a:endParaRPr kumimoji="1" lang="ja-JP" altLang="en-US"/>
           </a:p>
@@ -557,6 +558,29 @@
           <a:bodyPr/>
           <a:lstStyle/>
           <a:p>
+            <a:pPr marL="0" marR="0" lvl="0" indent="0" algn="l" defTabSz="914400" rtl="0" eaLnBrk="1" fontAlgn="auto" latinLnBrk="0" hangingPunct="1">
+              <a:lnSpc>
+                <a:spcPct val="100000"/>
+              </a:lnSpc>
+              <a:spcBef>
+                <a:spcPts val="0"/>
+              </a:spcBef>
+              <a:spcAft>
+                <a:spcPts val="0"/>
+              </a:spcAft>
+              <a:buClrTx/>
+              <a:buSzTx/>
+              <a:buFontTx/>
+              <a:buNone/>
+              <a:tabLst/>
+              <a:defRPr/>
+            </a:pPr>
+            <a:r>
+              <a:rPr kumimoji="1" lang="ja-JP" altLang="en-US" sz="1200" baseline="0"/>
+              <a:t>次世代コンピューティング研究室の三石海人です。表題のとおり発表いたします。</a:t>
+            </a:r>
+          </a:p>
+          <a:p>
             <a:endParaRPr kumimoji="1" lang="ja-JP" altLang="en-US"/>
           </a:p>
         </p:txBody>
@@ -576,9 +600,9 @@
           <a:bodyPr/>
           <a:lstStyle/>
           <a:p>
-            <a:fld id="{3F4FCCAA-E98D-924E-8192-CCFDFD99EBAA}" type="slidenum">
+            <a:fld id="{8F6FC832-1C17-2B46-9D92-3AA382C5F850}" type="slidenum">
               <a:rPr kumimoji="1" lang="ja-JP" altLang="en-US" smtClean="0"/>
-              <a:t>2</a:t>
+              <a:t>1</a:t>
             </a:fld>
             <a:endParaRPr kumimoji="1" lang="ja-JP" altLang="en-US"/>
           </a:p>
@@ -587,7 +611,7 @@
     </p:spTree>
     <p:extLst>
       <p:ext uri="{BB962C8B-B14F-4D97-AF65-F5344CB8AC3E}">
-        <p14:creationId xmlns:p14="http://schemas.microsoft.com/office/powerpoint/2010/main" val="777686909"/>
+        <p14:creationId xmlns:p14="http://schemas.microsoft.com/office/powerpoint/2010/main" val="3346246532"/>
       </p:ext>
     </p:extLst>
   </p:cSld>
@@ -597,7 +621,267 @@
 </p:notes>
 </file>
 
-<file path=ppt/notesSlides/notesSlide2.xml><?xml version="1.0" encoding="utf-8"?>
+<file path=ppt/notesSlides/notesSlide10.xml><?xml version="1.0" encoding="utf-8"?>
+<p:notes xmlns:a="http://schemas.openxmlformats.org/drawingml/2006/main" xmlns:r="http://schemas.openxmlformats.org/officeDocument/2006/relationships" xmlns:p="http://schemas.openxmlformats.org/presentationml/2006/main">
+  <p:cSld>
+    <p:spTree>
+      <p:nvGrpSpPr>
+        <p:cNvPr id="1" name=""/>
+        <p:cNvGrpSpPr/>
+        <p:nvPr/>
+      </p:nvGrpSpPr>
+      <p:grpSpPr>
+        <a:xfrm>
+          <a:off x="0" y="0"/>
+          <a:ext cx="0" cy="0"/>
+          <a:chOff x="0" y="0"/>
+          <a:chExt cx="0" cy="0"/>
+        </a:xfrm>
+      </p:grpSpPr>
+      <p:sp>
+        <p:nvSpPr>
+          <p:cNvPr id="2" name="スライド イメージ プレースホルダー 1"/>
+          <p:cNvSpPr>
+            <a:spLocks noGrp="1" noRot="1" noChangeAspect="1"/>
+          </p:cNvSpPr>
+          <p:nvPr>
+            <p:ph type="sldImg"/>
+          </p:nvPr>
+        </p:nvSpPr>
+        <p:spPr/>
+      </p:sp>
+      <p:sp>
+        <p:nvSpPr>
+          <p:cNvPr id="3" name="ノート プレースホルダー 2"/>
+          <p:cNvSpPr>
+            <a:spLocks noGrp="1"/>
+          </p:cNvSpPr>
+          <p:nvPr>
+            <p:ph type="body" idx="1"/>
+          </p:nvPr>
+        </p:nvSpPr>
+        <p:spPr/>
+        <p:txBody>
+          <a:bodyPr/>
+          <a:lstStyle/>
+          <a:p>
+            <a:r>
+              <a:rPr kumimoji="1" lang="ja-JP" altLang="en-US"/>
+              <a:t>最後に、既存手法と今回提案する手法の両者でのシミュレーションの違いを回路図で説明いたします。</a:t>
+            </a:r>
+            <a:endParaRPr kumimoji="1" lang="en-US" altLang="ja-JP" dirty="0"/>
+          </a:p>
+          <a:p>
+            <a:r>
+              <a:rPr kumimoji="1" lang="ja-JP" altLang="en-US"/>
+              <a:t>上段の回路が既存手法になっており、下段の回路が提案手法になります。</a:t>
+            </a:r>
+            <a:endParaRPr kumimoji="1" lang="en-US" altLang="ja-JP" dirty="0"/>
+          </a:p>
+          <a:p>
+            <a:endParaRPr kumimoji="1" lang="en-US" altLang="ja-JP" dirty="0"/>
+          </a:p>
+          <a:p>
+            <a:r>
+              <a:rPr kumimoji="1" lang="ja-JP" altLang="en-US"/>
+              <a:t>特に大きく違う部分を紫色の四角で表現しています。</a:t>
+            </a:r>
+            <a:endParaRPr kumimoji="1" lang="en-US" altLang="ja-JP" dirty="0"/>
+          </a:p>
+          <a:p>
+            <a:r>
+              <a:rPr kumimoji="1" lang="ja-JP" altLang="en-US"/>
+              <a:t>また、下段の提案手法の回路では赤枠の部分が非ゼロの要素のみで構成されているゲートによって生じたデッドスペースになっており、この領域にはゲートを配置せず、回路の深さも既存手法に比べるとやや増加しています。</a:t>
+            </a:r>
+          </a:p>
+        </p:txBody>
+      </p:sp>
+      <p:sp>
+        <p:nvSpPr>
+          <p:cNvPr id="4" name="スライド番号プレースホルダー 3"/>
+          <p:cNvSpPr>
+            <a:spLocks noGrp="1"/>
+          </p:cNvSpPr>
+          <p:nvPr>
+            <p:ph type="sldNum" sz="quarter" idx="5"/>
+          </p:nvPr>
+        </p:nvSpPr>
+        <p:spPr/>
+        <p:txBody>
+          <a:bodyPr/>
+          <a:lstStyle/>
+          <a:p>
+            <a:fld id="{8F6FC832-1C17-2B46-9D92-3AA382C5F850}" type="slidenum">
+              <a:rPr kumimoji="1" lang="ja-JP" altLang="en-US" smtClean="0"/>
+              <a:t>10</a:t>
+            </a:fld>
+            <a:endParaRPr kumimoji="1" lang="ja-JP" altLang="en-US"/>
+          </a:p>
+        </p:txBody>
+      </p:sp>
+    </p:spTree>
+    <p:extLst>
+      <p:ext uri="{BB962C8B-B14F-4D97-AF65-F5344CB8AC3E}">
+        <p14:creationId xmlns:p14="http://schemas.microsoft.com/office/powerpoint/2010/main" val="327462593"/>
+      </p:ext>
+    </p:extLst>
+  </p:cSld>
+  <p:clrMapOvr>
+    <a:masterClrMapping/>
+  </p:clrMapOvr>
+</p:notes>
+</file>
+
+<file path=ppt/notesSlides/notesSlide11.xml><?xml version="1.0" encoding="utf-8"?>
+<p:notes xmlns:a="http://schemas.openxmlformats.org/drawingml/2006/main" xmlns:r="http://schemas.openxmlformats.org/officeDocument/2006/relationships" xmlns:p="http://schemas.openxmlformats.org/presentationml/2006/main">
+  <p:cSld>
+    <p:spTree>
+      <p:nvGrpSpPr>
+        <p:cNvPr id="1" name=""/>
+        <p:cNvGrpSpPr/>
+        <p:nvPr/>
+      </p:nvGrpSpPr>
+      <p:grpSpPr>
+        <a:xfrm>
+          <a:off x="0" y="0"/>
+          <a:ext cx="0" cy="0"/>
+          <a:chOff x="0" y="0"/>
+          <a:chExt cx="0" cy="0"/>
+        </a:xfrm>
+      </p:grpSpPr>
+      <p:sp>
+        <p:nvSpPr>
+          <p:cNvPr id="2" name="スライド イメージ プレースホルダー 1"/>
+          <p:cNvSpPr>
+            <a:spLocks noGrp="1" noRot="1" noChangeAspect="1"/>
+          </p:cNvSpPr>
+          <p:nvPr>
+            <p:ph type="sldImg"/>
+          </p:nvPr>
+        </p:nvSpPr>
+        <p:spPr/>
+      </p:sp>
+      <p:sp>
+        <p:nvSpPr>
+          <p:cNvPr id="3" name="ノート プレースホルダー 2"/>
+          <p:cNvSpPr>
+            <a:spLocks noGrp="1"/>
+          </p:cNvSpPr>
+          <p:nvPr>
+            <p:ph type="body" idx="1"/>
+          </p:nvPr>
+        </p:nvSpPr>
+        <p:spPr/>
+        <p:txBody>
+          <a:bodyPr/>
+          <a:lstStyle/>
+          <a:p>
+            <a:r>
+              <a:rPr kumimoji="1" lang="ja-JP" altLang="en-US"/>
+              <a:t>最後に、まとめと今後の課題になります。</a:t>
+            </a:r>
+            <a:endParaRPr kumimoji="1" lang="en-US" altLang="ja-JP" dirty="0"/>
+          </a:p>
+          <a:p>
+            <a:endParaRPr kumimoji="1" lang="en-US" altLang="ja-JP" dirty="0"/>
+          </a:p>
+          <a:p>
+            <a:r>
+              <a:rPr kumimoji="1" lang="ja-JP" altLang="en-US"/>
+              <a:t>既存手法の問題点であるシミュレート時の再帰数の指数関数的増大を抑制するために量子ゲートの</a:t>
+            </a:r>
+            <a:r>
+              <a:rPr kumimoji="1" lang="en-US" altLang="ja-JP" dirty="0"/>
+              <a:t>QMDD</a:t>
+            </a:r>
+            <a:r>
+              <a:rPr kumimoji="1" lang="ja-JP" altLang="en-US"/>
+              <a:t>の形状に注目したシミュレーション手法について提案いたしました。</a:t>
+            </a:r>
+            <a:endParaRPr kumimoji="1" lang="en-US" altLang="ja-JP" dirty="0"/>
+          </a:p>
+          <a:p>
+            <a:r>
+              <a:rPr kumimoji="1" lang="ja-JP" altLang="en-US"/>
+              <a:t>具体的には単一量子ゲートであれば</a:t>
+            </a:r>
+            <a:r>
+              <a:rPr kumimoji="1" lang="en-US" altLang="ja-JP" dirty="0"/>
+              <a:t>0</a:t>
+            </a:r>
+            <a:r>
+              <a:rPr kumimoji="1" lang="ja-JP" altLang="en-US"/>
+              <a:t>の要素の有無、多量子ゲートであれば零行列の有無で分類し、再帰数を増大させるようなゲートは終端ノードに接続されるような設計を行う。</a:t>
+            </a:r>
+            <a:endParaRPr kumimoji="1" lang="en-US" altLang="ja-JP" dirty="0"/>
+          </a:p>
+          <a:p>
+            <a:endParaRPr kumimoji="1" lang="en-US" altLang="ja-JP" dirty="0"/>
+          </a:p>
+          <a:p>
+            <a:r>
+              <a:rPr kumimoji="1" lang="ja-JP" altLang="en-US"/>
+              <a:t>今後の課題では、提案手法の拡張案として、</a:t>
+            </a:r>
+            <a:r>
+              <a:rPr kumimoji="1" lang="en-US" altLang="ja-JP" dirty="0"/>
+              <a:t>QMDD</a:t>
+            </a:r>
+            <a:r>
+              <a:rPr kumimoji="1" lang="ja-JP" altLang="en-US"/>
+              <a:t>の変数順序の入れ替えでのデッドスペース削減や、多量子ゲートの制御ビットとターゲットビットの大小関係を考慮した最適化を行っていきたいと考えています。</a:t>
+            </a:r>
+            <a:endParaRPr kumimoji="1" lang="en-US" altLang="ja-JP" dirty="0"/>
+          </a:p>
+          <a:p>
+            <a:endParaRPr kumimoji="1" lang="en-US" altLang="ja-JP" dirty="0"/>
+          </a:p>
+          <a:p>
+            <a:r>
+              <a:rPr kumimoji="1" lang="ja-JP" altLang="en-US"/>
+              <a:t>以上になります。</a:t>
+            </a:r>
+            <a:endParaRPr kumimoji="1" lang="en-US" altLang="ja-JP" dirty="0"/>
+          </a:p>
+        </p:txBody>
+      </p:sp>
+      <p:sp>
+        <p:nvSpPr>
+          <p:cNvPr id="4" name="スライド番号プレースホルダー 3"/>
+          <p:cNvSpPr>
+            <a:spLocks noGrp="1"/>
+          </p:cNvSpPr>
+          <p:nvPr>
+            <p:ph type="sldNum" sz="quarter" idx="5"/>
+          </p:nvPr>
+        </p:nvSpPr>
+        <p:spPr/>
+        <p:txBody>
+          <a:bodyPr/>
+          <a:lstStyle/>
+          <a:p>
+            <a:fld id="{8F6FC832-1C17-2B46-9D92-3AA382C5F850}" type="slidenum">
+              <a:rPr kumimoji="1" lang="ja-JP" altLang="en-US" smtClean="0"/>
+              <a:t>11</a:t>
+            </a:fld>
+            <a:endParaRPr kumimoji="1" lang="ja-JP" altLang="en-US"/>
+          </a:p>
+        </p:txBody>
+      </p:sp>
+    </p:spTree>
+    <p:extLst>
+      <p:ext uri="{BB962C8B-B14F-4D97-AF65-F5344CB8AC3E}">
+        <p14:creationId xmlns:p14="http://schemas.microsoft.com/office/powerpoint/2010/main" val="351510755"/>
+      </p:ext>
+    </p:extLst>
+  </p:cSld>
+  <p:clrMapOvr>
+    <a:masterClrMapping/>
+  </p:clrMapOvr>
+</p:notes>
+</file>
+
+<file path=ppt/notesSlides/notesSlide12.xml><?xml version="1.0" encoding="utf-8"?>
 <p:notes xmlns:a="http://schemas.openxmlformats.org/drawingml/2006/main" xmlns:r="http://schemas.openxmlformats.org/officeDocument/2006/relationships" xmlns:p="http://schemas.openxmlformats.org/presentationml/2006/main">
   <p:cSld>
     <p:spTree>
@@ -662,7 +946,7 @@
           <a:p>
             <a:fld id="{3F4FCCAA-E98D-924E-8192-CCFDFD99EBAA}" type="slidenum">
               <a:rPr kumimoji="1" lang="ja-JP" altLang="en-US" smtClean="0"/>
-              <a:t>13</a:t>
+              <a:t>14</a:t>
             </a:fld>
             <a:endParaRPr kumimoji="1" lang="ja-JP" altLang="en-US"/>
           </a:p>
@@ -672,6 +956,1511 @@
     <p:extLst>
       <p:ext uri="{BB962C8B-B14F-4D97-AF65-F5344CB8AC3E}">
         <p14:creationId xmlns:p14="http://schemas.microsoft.com/office/powerpoint/2010/main" val="3917056710"/>
+      </p:ext>
+    </p:extLst>
+  </p:cSld>
+  <p:clrMapOvr>
+    <a:masterClrMapping/>
+  </p:clrMapOvr>
+</p:notes>
+</file>
+
+<file path=ppt/notesSlides/notesSlide2.xml><?xml version="1.0" encoding="utf-8"?>
+<p:notes xmlns:a="http://schemas.openxmlformats.org/drawingml/2006/main" xmlns:r="http://schemas.openxmlformats.org/officeDocument/2006/relationships" xmlns:p="http://schemas.openxmlformats.org/presentationml/2006/main">
+  <p:cSld>
+    <p:spTree>
+      <p:nvGrpSpPr>
+        <p:cNvPr id="1" name=""/>
+        <p:cNvGrpSpPr/>
+        <p:nvPr/>
+      </p:nvGrpSpPr>
+      <p:grpSpPr>
+        <a:xfrm>
+          <a:off x="0" y="0"/>
+          <a:ext cx="0" cy="0"/>
+          <a:chOff x="0" y="0"/>
+          <a:chExt cx="0" cy="0"/>
+        </a:xfrm>
+      </p:grpSpPr>
+      <p:sp>
+        <p:nvSpPr>
+          <p:cNvPr id="2" name="スライド イメージ プレースホルダー 1"/>
+          <p:cNvSpPr>
+            <a:spLocks noGrp="1" noRot="1" noChangeAspect="1"/>
+          </p:cNvSpPr>
+          <p:nvPr>
+            <p:ph type="sldImg"/>
+          </p:nvPr>
+        </p:nvSpPr>
+        <p:spPr/>
+      </p:sp>
+      <p:sp>
+        <p:nvSpPr>
+          <p:cNvPr id="3" name="ノート プレースホルダー 2"/>
+          <p:cNvSpPr>
+            <a:spLocks noGrp="1"/>
+          </p:cNvSpPr>
+          <p:nvPr>
+            <p:ph type="body" idx="1"/>
+          </p:nvPr>
+        </p:nvSpPr>
+        <p:spPr/>
+        <p:txBody>
+          <a:bodyPr/>
+          <a:lstStyle/>
+          <a:p>
+            <a:r>
+              <a:rPr lang="ja-JP" altLang="en-US" sz="1200">
+                <a:effectLst/>
+                <a:latin typeface="游明朝" panose="02020400000000000000" pitchFamily="18" charset="-128"/>
+                <a:cs typeface="Times New Roman" panose="02020603050405020304" pitchFamily="18" charset="0"/>
+              </a:rPr>
+              <a:t>まずはじめに研究テーマの根幹となる</a:t>
+            </a:r>
+            <a:r>
+              <a:rPr lang="en-US" altLang="ja-JP" sz="1200" dirty="0">
+                <a:effectLst/>
+                <a:latin typeface="游明朝" panose="02020400000000000000" pitchFamily="18" charset="-128"/>
+                <a:cs typeface="Times New Roman" panose="02020603050405020304" pitchFamily="18" charset="0"/>
+              </a:rPr>
+              <a:t>QMDD</a:t>
+            </a:r>
+            <a:r>
+              <a:rPr lang="ja-JP" altLang="en-US" sz="1200">
+                <a:effectLst/>
+                <a:latin typeface="游明朝" panose="02020400000000000000" pitchFamily="18" charset="-128"/>
+                <a:cs typeface="Times New Roman" panose="02020603050405020304" pitchFamily="18" charset="0"/>
+              </a:rPr>
+              <a:t>についてお話しします。</a:t>
+            </a:r>
+            <a:endParaRPr lang="en-US" altLang="ja-JP" sz="1200" dirty="0">
+              <a:effectLst/>
+              <a:latin typeface="游明朝" panose="02020400000000000000" pitchFamily="18" charset="-128"/>
+              <a:cs typeface="Times New Roman" panose="02020603050405020304" pitchFamily="18" charset="0"/>
+            </a:endParaRPr>
+          </a:p>
+          <a:p>
+            <a:r>
+              <a:rPr lang="en-US" altLang="ja-JP" sz="1200" dirty="0">
+                <a:effectLst/>
+                <a:latin typeface="游明朝" panose="02020400000000000000" pitchFamily="18" charset="-128"/>
+                <a:cs typeface="Times New Roman" panose="02020603050405020304" pitchFamily="18" charset="0"/>
+              </a:rPr>
+              <a:t>QMDD</a:t>
+            </a:r>
+            <a:r>
+              <a:rPr lang="ja-JP" altLang="ja-JP" sz="1200">
+                <a:effectLst/>
+                <a:ea typeface="游明朝" panose="02020400000000000000" pitchFamily="18" charset="-128"/>
+                <a:cs typeface="Times New Roman" panose="02020603050405020304" pitchFamily="18" charset="0"/>
+              </a:rPr>
+              <a:t>とは量子回路を表現・操作するためのデータ構造です。</a:t>
+            </a:r>
+            <a:endParaRPr lang="en-US" altLang="ja-JP" sz="1200" dirty="0">
+              <a:effectLst/>
+              <a:ea typeface="游明朝" panose="02020400000000000000" pitchFamily="18" charset="-128"/>
+              <a:cs typeface="Times New Roman" panose="02020603050405020304" pitchFamily="18" charset="0"/>
+            </a:endParaRPr>
+          </a:p>
+          <a:p>
+            <a:endParaRPr lang="en-US" altLang="ja-JP" sz="1200" dirty="0">
+              <a:effectLst/>
+              <a:ea typeface="游明朝" panose="02020400000000000000" pitchFamily="18" charset="-128"/>
+              <a:cs typeface="Times New Roman" panose="02020603050405020304" pitchFamily="18" charset="0"/>
+            </a:endParaRPr>
+          </a:p>
+          <a:p>
+            <a:r>
+              <a:rPr lang="ja-JP" altLang="ja-JP" sz="1200">
+                <a:effectLst/>
+                <a:ea typeface="游明朝" panose="02020400000000000000" pitchFamily="18" charset="-128"/>
+                <a:cs typeface="Times New Roman" panose="02020603050405020304" pitchFamily="18" charset="0"/>
+              </a:rPr>
+              <a:t>量子回路の部品である量子状態や量子ゲートは、行列で表現が可能ですが、</a:t>
+            </a:r>
+            <a:r>
+              <a:rPr lang="en-US" altLang="ja-JP" sz="1200" dirty="0">
+                <a:effectLst/>
+                <a:ea typeface="游明朝" panose="02020400000000000000" pitchFamily="18" charset="-128"/>
+                <a:cs typeface="Times New Roman" panose="02020603050405020304" pitchFamily="18" charset="0"/>
+              </a:rPr>
+              <a:t>QMDD</a:t>
+            </a:r>
+            <a:r>
+              <a:rPr lang="ja-JP" altLang="ja-JP" sz="1200">
+                <a:effectLst/>
+                <a:ea typeface="游明朝" panose="02020400000000000000" pitchFamily="18" charset="-128"/>
+                <a:cs typeface="Times New Roman" panose="02020603050405020304" pitchFamily="18" charset="0"/>
+              </a:rPr>
+              <a:t>はこの行列に零行列や共通する部分行列が多く含まれていることを利用して圧縮したデータ構造になっています。</a:t>
+            </a:r>
+            <a:endParaRPr lang="en-US" altLang="ja-JP" sz="1200" dirty="0">
+              <a:effectLst/>
+              <a:ea typeface="游明朝" panose="02020400000000000000" pitchFamily="18" charset="-128"/>
+              <a:cs typeface="Times New Roman" panose="02020603050405020304" pitchFamily="18" charset="0"/>
+            </a:endParaRPr>
+          </a:p>
+          <a:p>
+            <a:r>
+              <a:rPr lang="en-US" altLang="ja-JP" sz="1200" dirty="0">
+                <a:effectLst/>
+                <a:ea typeface="游明朝" panose="02020400000000000000" pitchFamily="18" charset="-128"/>
+                <a:cs typeface="Times New Roman" panose="02020603050405020304" pitchFamily="18" charset="0"/>
+              </a:rPr>
+              <a:t>QMDD</a:t>
+            </a:r>
+            <a:r>
+              <a:rPr lang="ja-JP" altLang="ja-JP" sz="1200">
+                <a:effectLst/>
+                <a:ea typeface="游明朝" panose="02020400000000000000" pitchFamily="18" charset="-128"/>
+                <a:cs typeface="Times New Roman" panose="02020603050405020304" pitchFamily="18" charset="0"/>
+              </a:rPr>
+              <a:t>では行列を</a:t>
+            </a:r>
+            <a:r>
+              <a:rPr lang="ja-JP" altLang="en-US" sz="1200">
+                <a:effectLst/>
+                <a:ea typeface="游明朝" panose="02020400000000000000" pitchFamily="18" charset="-128"/>
+                <a:cs typeface="Times New Roman" panose="02020603050405020304" pitchFamily="18" charset="0"/>
+              </a:rPr>
+              <a:t>スカラになるまで分割</a:t>
+            </a:r>
+            <a:r>
+              <a:rPr lang="ja-JP" altLang="ja-JP" sz="1200">
+                <a:effectLst/>
+                <a:ea typeface="游明朝" panose="02020400000000000000" pitchFamily="18" charset="-128"/>
+                <a:cs typeface="Times New Roman" panose="02020603050405020304" pitchFamily="18" charset="0"/>
+              </a:rPr>
+              <a:t>し、その部分行列をエッジとノードで表現します。</a:t>
+            </a:r>
+            <a:endParaRPr lang="en-US" altLang="ja-JP" sz="1200" dirty="0">
+              <a:effectLst/>
+              <a:ea typeface="游明朝" panose="02020400000000000000" pitchFamily="18" charset="-128"/>
+              <a:cs typeface="Times New Roman" panose="02020603050405020304" pitchFamily="18" charset="0"/>
+            </a:endParaRPr>
+          </a:p>
+          <a:p>
+            <a:r>
+              <a:rPr lang="ja-JP" altLang="ja-JP" sz="1200">
+                <a:effectLst/>
+                <a:ea typeface="游明朝" panose="02020400000000000000" pitchFamily="18" charset="-128"/>
+                <a:cs typeface="Times New Roman" panose="02020603050405020304" pitchFamily="18" charset="0"/>
+              </a:rPr>
+              <a:t>エッジは、複素数の重みとノードへのポインタをもち、ノードからは最大</a:t>
+            </a:r>
+            <a:r>
+              <a:rPr lang="en-US" altLang="ja-JP" sz="1200" dirty="0">
+                <a:effectLst/>
+                <a:ea typeface="游明朝" panose="02020400000000000000" pitchFamily="18" charset="-128"/>
+                <a:cs typeface="Times New Roman" panose="02020603050405020304" pitchFamily="18" charset="0"/>
+              </a:rPr>
+              <a:t>4</a:t>
+            </a:r>
+            <a:r>
+              <a:rPr lang="ja-JP" altLang="ja-JP" sz="1200">
+                <a:effectLst/>
+                <a:ea typeface="游明朝" panose="02020400000000000000" pitchFamily="18" charset="-128"/>
+                <a:cs typeface="Times New Roman" panose="02020603050405020304" pitchFamily="18" charset="0"/>
+              </a:rPr>
+              <a:t>つのエッジが伸びます。</a:t>
+            </a:r>
+            <a:br>
+              <a:rPr lang="en-US" altLang="ja-JP" sz="1200" dirty="0">
+                <a:effectLst/>
+                <a:ea typeface="游明朝" panose="02020400000000000000" pitchFamily="18" charset="-128"/>
+                <a:cs typeface="Times New Roman" panose="02020603050405020304" pitchFamily="18" charset="0"/>
+              </a:rPr>
+            </a:br>
+            <a:br>
+              <a:rPr lang="en-US" altLang="ja-JP" sz="1200" dirty="0">
+                <a:effectLst/>
+                <a:ea typeface="游明朝" panose="02020400000000000000" pitchFamily="18" charset="-128"/>
+                <a:cs typeface="Times New Roman" panose="02020603050405020304" pitchFamily="18" charset="0"/>
+              </a:rPr>
+            </a:br>
+            <a:r>
+              <a:rPr lang="ja-JP" altLang="ja-JP" sz="1200">
+                <a:effectLst/>
+                <a:ea typeface="游明朝" panose="02020400000000000000" pitchFamily="18" charset="-128"/>
+                <a:cs typeface="Times New Roman" panose="02020603050405020304" pitchFamily="18" charset="0"/>
+              </a:rPr>
+              <a:t>ノードから伸びるエッジは、左から順に、行列上の左上の要素、右上の要素、左下の要素、右下の要素としてそれぞれを表現します。</a:t>
+            </a:r>
+            <a:endParaRPr kumimoji="1" lang="ja-JP" altLang="en-US"/>
+          </a:p>
+        </p:txBody>
+      </p:sp>
+      <p:sp>
+        <p:nvSpPr>
+          <p:cNvPr id="4" name="スライド番号プレースホルダー 3"/>
+          <p:cNvSpPr>
+            <a:spLocks noGrp="1"/>
+          </p:cNvSpPr>
+          <p:nvPr>
+            <p:ph type="sldNum" sz="quarter" idx="5"/>
+          </p:nvPr>
+        </p:nvSpPr>
+        <p:spPr/>
+        <p:txBody>
+          <a:bodyPr/>
+          <a:lstStyle/>
+          <a:p>
+            <a:fld id="{3F4FCCAA-E98D-924E-8192-CCFDFD99EBAA}" type="slidenum">
+              <a:rPr kumimoji="1" lang="ja-JP" altLang="en-US" smtClean="0"/>
+              <a:t>2</a:t>
+            </a:fld>
+            <a:endParaRPr kumimoji="1" lang="ja-JP" altLang="en-US"/>
+          </a:p>
+        </p:txBody>
+      </p:sp>
+    </p:spTree>
+    <p:extLst>
+      <p:ext uri="{BB962C8B-B14F-4D97-AF65-F5344CB8AC3E}">
+        <p14:creationId xmlns:p14="http://schemas.microsoft.com/office/powerpoint/2010/main" val="777686909"/>
+      </p:ext>
+    </p:extLst>
+  </p:cSld>
+  <p:clrMapOvr>
+    <a:masterClrMapping/>
+  </p:clrMapOvr>
+</p:notes>
+</file>
+
+<file path=ppt/notesSlides/notesSlide3.xml><?xml version="1.0" encoding="utf-8"?>
+<p:notes xmlns:a="http://schemas.openxmlformats.org/drawingml/2006/main" xmlns:r="http://schemas.openxmlformats.org/officeDocument/2006/relationships" xmlns:p="http://schemas.openxmlformats.org/presentationml/2006/main">
+  <p:cSld>
+    <p:spTree>
+      <p:nvGrpSpPr>
+        <p:cNvPr id="1" name=""/>
+        <p:cNvGrpSpPr/>
+        <p:nvPr/>
+      </p:nvGrpSpPr>
+      <p:grpSpPr>
+        <a:xfrm>
+          <a:off x="0" y="0"/>
+          <a:ext cx="0" cy="0"/>
+          <a:chOff x="0" y="0"/>
+          <a:chExt cx="0" cy="0"/>
+        </a:xfrm>
+      </p:grpSpPr>
+      <p:sp>
+        <p:nvSpPr>
+          <p:cNvPr id="2" name="スライド イメージ プレースホルダー 1"/>
+          <p:cNvSpPr>
+            <a:spLocks noGrp="1" noRot="1" noChangeAspect="1"/>
+          </p:cNvSpPr>
+          <p:nvPr>
+            <p:ph type="sldImg"/>
+          </p:nvPr>
+        </p:nvSpPr>
+        <p:spPr/>
+      </p:sp>
+      <p:sp>
+        <p:nvSpPr>
+          <p:cNvPr id="3" name="ノート プレースホルダー 2"/>
+          <p:cNvSpPr>
+            <a:spLocks noGrp="1"/>
+          </p:cNvSpPr>
+          <p:nvPr>
+            <p:ph type="body" idx="1"/>
+          </p:nvPr>
+        </p:nvSpPr>
+        <p:spPr/>
+        <p:txBody>
+          <a:bodyPr/>
+          <a:lstStyle/>
+          <a:p>
+            <a:pPr marL="0" marR="0" lvl="0" indent="0" algn="l" defTabSz="914400" rtl="0" eaLnBrk="1" fontAlgn="auto" latinLnBrk="0" hangingPunct="1">
+              <a:lnSpc>
+                <a:spcPct val="100000"/>
+              </a:lnSpc>
+              <a:spcBef>
+                <a:spcPts val="0"/>
+              </a:spcBef>
+              <a:spcAft>
+                <a:spcPts val="0"/>
+              </a:spcAft>
+              <a:buClrTx/>
+              <a:buSzTx/>
+              <a:buFontTx/>
+              <a:buNone/>
+              <a:tabLst/>
+              <a:defRPr/>
+            </a:pPr>
+            <a:r>
+              <a:rPr lang="en-US" altLang="ja-JP" sz="1800" kern="100" dirty="0">
+                <a:effectLst/>
+                <a:latin typeface="游明朝" panose="02020400000000000000" pitchFamily="18" charset="-128"/>
+                <a:ea typeface="游明朝" panose="02020400000000000000" pitchFamily="18" charset="-128"/>
+                <a:cs typeface="Times New Roman" panose="02020603050405020304" pitchFamily="18" charset="0"/>
+              </a:rPr>
+              <a:t>CV</a:t>
+            </a:r>
+            <a:r>
+              <a:rPr lang="ja-JP" altLang="en-US" sz="1800" kern="100">
+                <a:effectLst/>
+                <a:latin typeface="游明朝" panose="02020400000000000000" pitchFamily="18" charset="-128"/>
+                <a:ea typeface="游明朝" panose="02020400000000000000" pitchFamily="18" charset="-128"/>
+                <a:cs typeface="Times New Roman" panose="02020603050405020304" pitchFamily="18" charset="0"/>
+              </a:rPr>
+              <a:t>ゲートを例に用いて</a:t>
+            </a:r>
+            <a:r>
+              <a:rPr lang="en-US" altLang="ja-JP" sz="1800" kern="100" dirty="0">
+                <a:effectLst/>
+                <a:latin typeface="游明朝" panose="02020400000000000000" pitchFamily="18" charset="-128"/>
+                <a:ea typeface="游明朝" panose="02020400000000000000" pitchFamily="18" charset="-128"/>
+                <a:cs typeface="Times New Roman" panose="02020603050405020304" pitchFamily="18" charset="0"/>
+              </a:rPr>
+              <a:t>QMDD</a:t>
+            </a:r>
+            <a:r>
+              <a:rPr lang="ja-JP" altLang="ja-JP" sz="1800" kern="100">
+                <a:effectLst/>
+                <a:latin typeface="游明朝" panose="02020400000000000000" pitchFamily="18" charset="-128"/>
+                <a:ea typeface="游明朝" panose="02020400000000000000" pitchFamily="18" charset="-128"/>
+                <a:cs typeface="Times New Roman" panose="02020603050405020304" pitchFamily="18" charset="0"/>
+              </a:rPr>
+              <a:t>のメモリの効率性について説明します。</a:t>
+            </a:r>
+            <a:endParaRPr lang="en-US" altLang="ja-JP" sz="1800" kern="100" dirty="0">
+              <a:effectLst/>
+              <a:latin typeface="游明朝" panose="02020400000000000000" pitchFamily="18" charset="-128"/>
+              <a:ea typeface="游明朝" panose="02020400000000000000" pitchFamily="18" charset="-128"/>
+              <a:cs typeface="Times New Roman" panose="02020603050405020304" pitchFamily="18" charset="0"/>
+            </a:endParaRPr>
+          </a:p>
+          <a:p>
+            <a:pPr marL="0" marR="0" lvl="0" indent="0" algn="l" defTabSz="914400" rtl="0" eaLnBrk="1" fontAlgn="auto" latinLnBrk="0" hangingPunct="1">
+              <a:lnSpc>
+                <a:spcPct val="100000"/>
+              </a:lnSpc>
+              <a:spcBef>
+                <a:spcPts val="0"/>
+              </a:spcBef>
+              <a:spcAft>
+                <a:spcPts val="0"/>
+              </a:spcAft>
+              <a:buClrTx/>
+              <a:buSzTx/>
+              <a:buFontTx/>
+              <a:buNone/>
+              <a:tabLst/>
+              <a:defRPr/>
+            </a:pPr>
+            <a:r>
+              <a:rPr lang="en-US" altLang="ja-JP" sz="1800" kern="100" dirty="0">
+                <a:effectLst/>
+                <a:latin typeface="游明朝" panose="02020400000000000000" pitchFamily="18" charset="-128"/>
+                <a:ea typeface="游明朝" panose="02020400000000000000" pitchFamily="18" charset="-128"/>
+                <a:cs typeface="Times New Roman" panose="02020603050405020304" pitchFamily="18" charset="0"/>
+              </a:rPr>
+              <a:t>QMDD</a:t>
+            </a:r>
+            <a:r>
+              <a:rPr lang="ja-JP" altLang="ja-JP" sz="1800" kern="100">
+                <a:effectLst/>
+                <a:latin typeface="游明朝" panose="02020400000000000000" pitchFamily="18" charset="-128"/>
+                <a:ea typeface="游明朝" panose="02020400000000000000" pitchFamily="18" charset="-128"/>
+                <a:cs typeface="Times New Roman" panose="02020603050405020304" pitchFamily="18" charset="0"/>
+              </a:rPr>
+              <a:t>では任意の大きさの零行列をエッジ一つで表現したり図のような共通する部分行列やそのスカラ倍の行列を同じノードで表現</a:t>
+            </a:r>
+            <a:r>
+              <a:rPr lang="ja-JP" altLang="en-US" sz="1800" kern="100">
+                <a:effectLst/>
+                <a:latin typeface="游明朝" panose="02020400000000000000" pitchFamily="18" charset="-128"/>
+                <a:ea typeface="游明朝" panose="02020400000000000000" pitchFamily="18" charset="-128"/>
+                <a:cs typeface="Times New Roman" panose="02020603050405020304" pitchFamily="18" charset="0"/>
+              </a:rPr>
+              <a:t>して圧縮を行なっています。</a:t>
+            </a:r>
+            <a:endParaRPr kumimoji="1" lang="ja-JP" altLang="en-US"/>
+          </a:p>
+        </p:txBody>
+      </p:sp>
+      <p:sp>
+        <p:nvSpPr>
+          <p:cNvPr id="4" name="スライド番号プレースホルダー 3"/>
+          <p:cNvSpPr>
+            <a:spLocks noGrp="1"/>
+          </p:cNvSpPr>
+          <p:nvPr>
+            <p:ph type="sldNum" sz="quarter" idx="5"/>
+          </p:nvPr>
+        </p:nvSpPr>
+        <p:spPr/>
+        <p:txBody>
+          <a:bodyPr/>
+          <a:lstStyle/>
+          <a:p>
+            <a:fld id="{3F4FCCAA-E98D-924E-8192-CCFDFD99EBAA}" type="slidenum">
+              <a:rPr kumimoji="1" lang="ja-JP" altLang="en-US" smtClean="0"/>
+              <a:t>3</a:t>
+            </a:fld>
+            <a:endParaRPr kumimoji="1" lang="ja-JP" altLang="en-US"/>
+          </a:p>
+        </p:txBody>
+      </p:sp>
+    </p:spTree>
+    <p:extLst>
+      <p:ext uri="{BB962C8B-B14F-4D97-AF65-F5344CB8AC3E}">
+        <p14:creationId xmlns:p14="http://schemas.microsoft.com/office/powerpoint/2010/main" val="2531426618"/>
+      </p:ext>
+    </p:extLst>
+  </p:cSld>
+  <p:clrMapOvr>
+    <a:masterClrMapping/>
+  </p:clrMapOvr>
+</p:notes>
+</file>
+
+<file path=ppt/notesSlides/notesSlide4.xml><?xml version="1.0" encoding="utf-8"?>
+<p:notes xmlns:a="http://schemas.openxmlformats.org/drawingml/2006/main" xmlns:r="http://schemas.openxmlformats.org/officeDocument/2006/relationships" xmlns:p="http://schemas.openxmlformats.org/presentationml/2006/main">
+  <p:cSld>
+    <p:spTree>
+      <p:nvGrpSpPr>
+        <p:cNvPr id="1" name=""/>
+        <p:cNvGrpSpPr/>
+        <p:nvPr/>
+      </p:nvGrpSpPr>
+      <p:grpSpPr>
+        <a:xfrm>
+          <a:off x="0" y="0"/>
+          <a:ext cx="0" cy="0"/>
+          <a:chOff x="0" y="0"/>
+          <a:chExt cx="0" cy="0"/>
+        </a:xfrm>
+      </p:grpSpPr>
+      <p:sp>
+        <p:nvSpPr>
+          <p:cNvPr id="2" name="スライド イメージ プレースホルダー 1"/>
+          <p:cNvSpPr>
+            <a:spLocks noGrp="1" noRot="1" noChangeAspect="1"/>
+          </p:cNvSpPr>
+          <p:nvPr>
+            <p:ph type="sldImg"/>
+          </p:nvPr>
+        </p:nvSpPr>
+        <p:spPr/>
+      </p:sp>
+      <p:sp>
+        <p:nvSpPr>
+          <p:cNvPr id="3" name="ノート プレースホルダー 2"/>
+          <p:cNvSpPr>
+            <a:spLocks noGrp="1"/>
+          </p:cNvSpPr>
+          <p:nvPr>
+            <p:ph type="body" idx="1"/>
+          </p:nvPr>
+        </p:nvSpPr>
+        <p:spPr/>
+        <p:txBody>
+          <a:bodyPr/>
+          <a:lstStyle/>
+          <a:p>
+            <a:r>
+              <a:rPr kumimoji="1" lang="ja-JP" altLang="en-US"/>
+              <a:t>続いて、従来のシミュレーション手法について紹介いたします。</a:t>
+            </a:r>
+            <a:br>
+              <a:rPr kumimoji="1" lang="en-US" altLang="ja-JP" dirty="0"/>
+            </a:br>
+            <a:r>
+              <a:rPr kumimoji="1" lang="ja-JP" altLang="en-US"/>
+              <a:t>従来のシミュレーション手法では、量子回路の深さを最小化するような実行モデルになっています。</a:t>
+            </a:r>
+            <a:endParaRPr kumimoji="1" lang="en-US" altLang="ja-JP" dirty="0"/>
+          </a:p>
+          <a:p>
+            <a:endParaRPr kumimoji="1" lang="en-US" altLang="ja-JP" dirty="0"/>
+          </a:p>
+          <a:p>
+            <a:r>
+              <a:rPr kumimoji="1" lang="ja-JP" altLang="en-US"/>
+              <a:t>具体的な処理フローとしては、並列実行可能なゲートを同一レイヤ上に配置し、それらのゲートまとめて、一つの</a:t>
+            </a:r>
+            <a:r>
+              <a:rPr kumimoji="1" lang="en-US" altLang="ja-JP" dirty="0"/>
+              <a:t>QMDD</a:t>
+            </a:r>
+            <a:r>
+              <a:rPr kumimoji="1" lang="ja-JP" altLang="en-US"/>
+              <a:t>を生成します。</a:t>
+            </a:r>
+            <a:endParaRPr kumimoji="1" lang="en-US" altLang="ja-JP" dirty="0"/>
+          </a:p>
+          <a:p>
+            <a:r>
+              <a:rPr kumimoji="1" lang="ja-JP" altLang="en-US"/>
+              <a:t>ここでこの操作をゲート連結と呼び、詳細な実装は次のスライドで紹介いたします。</a:t>
+            </a:r>
+            <a:endParaRPr kumimoji="1" lang="en-US" altLang="ja-JP" dirty="0"/>
+          </a:p>
+          <a:p>
+            <a:r>
+              <a:rPr kumimoji="1" lang="ja-JP" altLang="en-US"/>
+              <a:t>連結後、量子状態との積を取ることで、</a:t>
+            </a:r>
+            <a:r>
+              <a:rPr kumimoji="1" lang="en-US" altLang="ja-JP" dirty="0"/>
+              <a:t>1</a:t>
+            </a:r>
+            <a:r>
+              <a:rPr kumimoji="1" lang="ja-JP" altLang="en-US"/>
+              <a:t>ステップで複数のゲートを適用することができます。</a:t>
+            </a:r>
+            <a:endParaRPr kumimoji="1" lang="en-US" altLang="ja-JP" dirty="0"/>
+          </a:p>
+          <a:p>
+            <a:endParaRPr kumimoji="1" lang="en-US" altLang="ja-JP" dirty="0"/>
+          </a:p>
+          <a:p>
+            <a:r>
+              <a:rPr kumimoji="1" lang="ja-JP" altLang="en-US"/>
+              <a:t>シミュレート時の時間ステップ数が最小になる一方で、</a:t>
+            </a:r>
+            <a:r>
+              <a:rPr kumimoji="1" lang="en-US" altLang="ja-JP" dirty="0"/>
+              <a:t>1</a:t>
+            </a:r>
+            <a:r>
+              <a:rPr kumimoji="1" lang="ja-JP" altLang="en-US"/>
+              <a:t>レイヤごとの</a:t>
+            </a:r>
+            <a:r>
+              <a:rPr kumimoji="1" lang="en-US" altLang="ja-JP" dirty="0"/>
+              <a:t>QMDD</a:t>
+            </a:r>
+            <a:r>
+              <a:rPr kumimoji="1" lang="ja-JP" altLang="en-US"/>
+              <a:t>のサイズが大きくなってしまう点とゲートの形状に依存して演算時の再帰数が増加してしまう点が問題点として挙げられます。</a:t>
+            </a:r>
+          </a:p>
+        </p:txBody>
+      </p:sp>
+      <p:sp>
+        <p:nvSpPr>
+          <p:cNvPr id="4" name="スライド番号プレースホルダー 3"/>
+          <p:cNvSpPr>
+            <a:spLocks noGrp="1"/>
+          </p:cNvSpPr>
+          <p:nvPr>
+            <p:ph type="sldNum" sz="quarter" idx="5"/>
+          </p:nvPr>
+        </p:nvSpPr>
+        <p:spPr/>
+        <p:txBody>
+          <a:bodyPr/>
+          <a:lstStyle/>
+          <a:p>
+            <a:fld id="{8F6FC832-1C17-2B46-9D92-3AA382C5F850}" type="slidenum">
+              <a:rPr kumimoji="1" lang="ja-JP" altLang="en-US" smtClean="0"/>
+              <a:t>4</a:t>
+            </a:fld>
+            <a:endParaRPr kumimoji="1" lang="ja-JP" altLang="en-US"/>
+          </a:p>
+        </p:txBody>
+      </p:sp>
+    </p:spTree>
+    <p:extLst>
+      <p:ext uri="{BB962C8B-B14F-4D97-AF65-F5344CB8AC3E}">
+        <p14:creationId xmlns:p14="http://schemas.microsoft.com/office/powerpoint/2010/main" val="4142355325"/>
+      </p:ext>
+    </p:extLst>
+  </p:cSld>
+  <p:clrMapOvr>
+    <a:masterClrMapping/>
+  </p:clrMapOvr>
+</p:notes>
+</file>
+
+<file path=ppt/notesSlides/notesSlide5.xml><?xml version="1.0" encoding="utf-8"?>
+<p:notes xmlns:a="http://schemas.openxmlformats.org/drawingml/2006/main" xmlns:r="http://schemas.openxmlformats.org/officeDocument/2006/relationships" xmlns:p="http://schemas.openxmlformats.org/presentationml/2006/main">
+  <p:cSld>
+    <p:spTree>
+      <p:nvGrpSpPr>
+        <p:cNvPr id="1" name=""/>
+        <p:cNvGrpSpPr/>
+        <p:nvPr/>
+      </p:nvGrpSpPr>
+      <p:grpSpPr>
+        <a:xfrm>
+          <a:off x="0" y="0"/>
+          <a:ext cx="0" cy="0"/>
+          <a:chOff x="0" y="0"/>
+          <a:chExt cx="0" cy="0"/>
+        </a:xfrm>
+      </p:grpSpPr>
+      <p:sp>
+        <p:nvSpPr>
+          <p:cNvPr id="2" name="スライド イメージ プレースホルダー 1"/>
+          <p:cNvSpPr>
+            <a:spLocks noGrp="1" noRot="1" noChangeAspect="1"/>
+          </p:cNvSpPr>
+          <p:nvPr>
+            <p:ph type="sldImg"/>
+          </p:nvPr>
+        </p:nvSpPr>
+        <p:spPr/>
+      </p:sp>
+      <p:sp>
+        <p:nvSpPr>
+          <p:cNvPr id="3" name="ノート プレースホルダー 2"/>
+          <p:cNvSpPr>
+            <a:spLocks noGrp="1"/>
+          </p:cNvSpPr>
+          <p:nvPr>
+            <p:ph type="body" idx="1"/>
+          </p:nvPr>
+        </p:nvSpPr>
+        <p:spPr/>
+        <p:txBody>
+          <a:bodyPr/>
+          <a:lstStyle/>
+          <a:p>
+            <a:r>
+              <a:rPr kumimoji="1" lang="ja-JP" altLang="en-US"/>
+              <a:t>ゲート連結の概要について説明いたします。</a:t>
+            </a:r>
+            <a:endParaRPr kumimoji="1" lang="en-US" altLang="ja-JP" dirty="0"/>
+          </a:p>
+          <a:p>
+            <a:endParaRPr kumimoji="1" lang="en-US" altLang="ja-JP" dirty="0"/>
+          </a:p>
+          <a:p>
+            <a:r>
+              <a:rPr kumimoji="1" lang="ja-JP" altLang="en-US"/>
+              <a:t>シミュレータ上ではゲートの</a:t>
+            </a:r>
+            <a:r>
+              <a:rPr kumimoji="1" lang="en-US" altLang="ja-JP" dirty="0"/>
+              <a:t>QMDD</a:t>
+            </a:r>
+            <a:r>
+              <a:rPr kumimoji="1" lang="ja-JP" altLang="en-US"/>
+              <a:t>同士のテンソルを取ることでゲート連結を行っています。</a:t>
+            </a:r>
+            <a:endParaRPr kumimoji="1" lang="en-US" altLang="ja-JP" dirty="0"/>
+          </a:p>
+          <a:p>
+            <a:endParaRPr kumimoji="1" lang="en-US" altLang="ja-JP" dirty="0"/>
+          </a:p>
+          <a:p>
+            <a:r>
+              <a:rPr kumimoji="1" lang="ja-JP" altLang="en-US"/>
+              <a:t>例えば、左下の回路にあるようなゲートの場合には、</a:t>
+            </a:r>
+            <a:r>
+              <a:rPr kumimoji="1" lang="en-US" altLang="ja-JP" dirty="0"/>
+              <a:t>0</a:t>
+            </a:r>
+            <a:r>
+              <a:rPr kumimoji="1" lang="ja-JP" altLang="en-US"/>
+              <a:t>ビット目のアダマールゲートと</a:t>
+            </a:r>
+            <a:r>
+              <a:rPr kumimoji="1" lang="en-US" altLang="ja-JP" dirty="0"/>
+              <a:t>1</a:t>
+            </a:r>
+            <a:r>
+              <a:rPr kumimoji="1" lang="ja-JP" altLang="en-US"/>
+              <a:t>ビット目のノットゲートのテンソルを取りますが、連結後の</a:t>
+            </a:r>
+            <a:r>
+              <a:rPr kumimoji="1" lang="en-US" altLang="ja-JP" dirty="0"/>
+              <a:t>QMDD</a:t>
+            </a:r>
+            <a:r>
+              <a:rPr kumimoji="1" lang="ja-JP" altLang="en-US"/>
+              <a:t>はアダマールゲートの</a:t>
+            </a:r>
+            <a:r>
+              <a:rPr kumimoji="1" lang="en-US" altLang="ja-JP" dirty="0"/>
+              <a:t>QMDD</a:t>
+            </a:r>
+            <a:r>
+              <a:rPr kumimoji="1" lang="ja-JP" altLang="en-US"/>
+              <a:t>の下にノットゲートの</a:t>
+            </a:r>
+            <a:r>
+              <a:rPr kumimoji="1" lang="en-US" altLang="ja-JP" dirty="0"/>
+              <a:t>QMDD</a:t>
+            </a:r>
+            <a:r>
+              <a:rPr kumimoji="1" lang="ja-JP" altLang="en-US"/>
+              <a:t>が接続された形になります。</a:t>
+            </a:r>
+            <a:endParaRPr kumimoji="1" lang="en-US" altLang="ja-JP" dirty="0"/>
+          </a:p>
+          <a:p>
+            <a:endParaRPr kumimoji="1" lang="en-US" altLang="ja-JP" dirty="0"/>
+          </a:p>
+          <a:p>
+            <a:r>
+              <a:rPr kumimoji="1" lang="ja-JP" altLang="en-US"/>
+              <a:t>シミュレート時には生成後の</a:t>
+            </a:r>
+            <a:r>
+              <a:rPr kumimoji="1" lang="en-US" altLang="ja-JP" dirty="0"/>
+              <a:t>QMDD</a:t>
+            </a:r>
+            <a:r>
+              <a:rPr kumimoji="1" lang="ja-JP" altLang="en-US"/>
+              <a:t>のエッジを全通り探索しながら再帰を繰り返します。</a:t>
+            </a:r>
+            <a:endParaRPr kumimoji="1" lang="en-US" altLang="ja-JP" dirty="0"/>
+          </a:p>
+          <a:p>
+            <a:r>
+              <a:rPr kumimoji="1" lang="ja-JP" altLang="en-US"/>
+              <a:t>スライドの右側の</a:t>
+            </a:r>
+            <a:r>
+              <a:rPr kumimoji="1" lang="en-US" altLang="ja-JP" dirty="0"/>
+              <a:t>QMDD</a:t>
+            </a:r>
+            <a:r>
+              <a:rPr kumimoji="1" lang="ja-JP" altLang="en-US"/>
+              <a:t>を例に用いるとキャッシュを考慮しないとき、赤枠の</a:t>
+            </a:r>
+            <a:r>
+              <a:rPr kumimoji="1" lang="en-US" altLang="ja-JP" dirty="0"/>
+              <a:t>QMDD</a:t>
+            </a:r>
+            <a:r>
+              <a:rPr kumimoji="1" lang="ja-JP" altLang="en-US"/>
+              <a:t>のエッジの数</a:t>
+            </a:r>
+            <a:r>
+              <a:rPr kumimoji="1" lang="en-US" altLang="ja-JP" dirty="0"/>
+              <a:t>4</a:t>
+            </a:r>
+            <a:r>
+              <a:rPr kumimoji="1" lang="ja-JP" altLang="en-US"/>
+              <a:t>本と青枠のエッジの数</a:t>
+            </a:r>
+            <a:r>
+              <a:rPr kumimoji="1" lang="en-US" altLang="ja-JP" dirty="0"/>
+              <a:t>4</a:t>
+            </a:r>
+            <a:r>
+              <a:rPr kumimoji="1" lang="ja-JP" altLang="en-US"/>
+              <a:t>本の積である</a:t>
+            </a:r>
+            <a:r>
+              <a:rPr kumimoji="1" lang="en-US" altLang="ja-JP" dirty="0"/>
+              <a:t>16</a:t>
+            </a:r>
+            <a:r>
+              <a:rPr kumimoji="1" lang="ja-JP" altLang="en-US"/>
+              <a:t>回の探索が必要になります。</a:t>
+            </a:r>
+            <a:endParaRPr kumimoji="1" lang="en-US" altLang="ja-JP" dirty="0"/>
+          </a:p>
+          <a:p>
+            <a:r>
+              <a:rPr kumimoji="1" lang="ja-JP" altLang="en-US"/>
+              <a:t>この探索回数の最大値は行列表現した時の要素数になりますが、</a:t>
+            </a:r>
+            <a:r>
+              <a:rPr kumimoji="1" lang="en-US" altLang="ja-JP" dirty="0"/>
+              <a:t>QMDD</a:t>
+            </a:r>
+            <a:r>
+              <a:rPr kumimoji="1" lang="ja-JP" altLang="en-US"/>
+              <a:t>の上位レベルに重みが</a:t>
+            </a:r>
+            <a:r>
+              <a:rPr kumimoji="1" lang="en-US" altLang="ja-JP" dirty="0"/>
+              <a:t>0</a:t>
+            </a:r>
+            <a:r>
+              <a:rPr kumimoji="1" lang="ja-JP" altLang="en-US"/>
+              <a:t>のエッジがあると演算がスキップされ、上位レベルでスキップすると下位レベルへの探索が大幅に削減されます。</a:t>
+            </a:r>
+            <a:endParaRPr kumimoji="1" lang="en-US" altLang="ja-JP" dirty="0"/>
+          </a:p>
+          <a:p>
+            <a:endParaRPr kumimoji="1" lang="en-US" altLang="ja-JP" dirty="0"/>
+          </a:p>
+          <a:p>
+            <a:endParaRPr kumimoji="1" lang="ja-JP" altLang="en-US"/>
+          </a:p>
+        </p:txBody>
+      </p:sp>
+      <p:sp>
+        <p:nvSpPr>
+          <p:cNvPr id="4" name="スライド番号プレースホルダー 3"/>
+          <p:cNvSpPr>
+            <a:spLocks noGrp="1"/>
+          </p:cNvSpPr>
+          <p:nvPr>
+            <p:ph type="sldNum" sz="quarter" idx="5"/>
+          </p:nvPr>
+        </p:nvSpPr>
+        <p:spPr/>
+        <p:txBody>
+          <a:bodyPr/>
+          <a:lstStyle/>
+          <a:p>
+            <a:fld id="{8F6FC832-1C17-2B46-9D92-3AA382C5F850}" type="slidenum">
+              <a:rPr kumimoji="1" lang="ja-JP" altLang="en-US" smtClean="0"/>
+              <a:t>5</a:t>
+            </a:fld>
+            <a:endParaRPr kumimoji="1" lang="ja-JP" altLang="en-US"/>
+          </a:p>
+        </p:txBody>
+      </p:sp>
+    </p:spTree>
+    <p:extLst>
+      <p:ext uri="{BB962C8B-B14F-4D97-AF65-F5344CB8AC3E}">
+        <p14:creationId xmlns:p14="http://schemas.microsoft.com/office/powerpoint/2010/main" val="1798141802"/>
+      </p:ext>
+    </p:extLst>
+  </p:cSld>
+  <p:clrMapOvr>
+    <a:masterClrMapping/>
+  </p:clrMapOvr>
+</p:notes>
+</file>
+
+<file path=ppt/notesSlides/notesSlide6.xml><?xml version="1.0" encoding="utf-8"?>
+<p:notes xmlns:a="http://schemas.openxmlformats.org/drawingml/2006/main" xmlns:r="http://schemas.openxmlformats.org/officeDocument/2006/relationships" xmlns:p="http://schemas.openxmlformats.org/presentationml/2006/main">
+  <p:cSld>
+    <p:spTree>
+      <p:nvGrpSpPr>
+        <p:cNvPr id="1" name=""/>
+        <p:cNvGrpSpPr/>
+        <p:nvPr/>
+      </p:nvGrpSpPr>
+      <p:grpSpPr>
+        <a:xfrm>
+          <a:off x="0" y="0"/>
+          <a:ext cx="0" cy="0"/>
+          <a:chOff x="0" y="0"/>
+          <a:chExt cx="0" cy="0"/>
+        </a:xfrm>
+      </p:grpSpPr>
+      <p:sp>
+        <p:nvSpPr>
+          <p:cNvPr id="2" name="スライド イメージ プレースホルダー 1"/>
+          <p:cNvSpPr>
+            <a:spLocks noGrp="1" noRot="1" noChangeAspect="1"/>
+          </p:cNvSpPr>
+          <p:nvPr>
+            <p:ph type="sldImg"/>
+          </p:nvPr>
+        </p:nvSpPr>
+        <p:spPr/>
+      </p:sp>
+      <p:sp>
+        <p:nvSpPr>
+          <p:cNvPr id="3" name="ノート プレースホルダー 2"/>
+          <p:cNvSpPr>
+            <a:spLocks noGrp="1"/>
+          </p:cNvSpPr>
+          <p:nvPr>
+            <p:ph type="body" idx="1"/>
+          </p:nvPr>
+        </p:nvSpPr>
+        <p:spPr/>
+        <p:txBody>
+          <a:bodyPr/>
+          <a:lstStyle/>
+          <a:p>
+            <a:r>
+              <a:rPr kumimoji="1" lang="ja-JP" altLang="en-US"/>
+              <a:t>ここで、単一量子ゲートの</a:t>
+            </a:r>
+            <a:r>
+              <a:rPr kumimoji="1" lang="en-US" altLang="ja-JP" dirty="0"/>
+              <a:t>QMDD</a:t>
+            </a:r>
+            <a:r>
+              <a:rPr kumimoji="1" lang="ja-JP" altLang="en-US"/>
+              <a:t>の形状を０の要素の有無で大きく二つのタイプに分類します。</a:t>
+            </a:r>
+            <a:endParaRPr kumimoji="1" lang="en-US" altLang="ja-JP" dirty="0"/>
+          </a:p>
+          <a:p>
+            <a:r>
+              <a:rPr kumimoji="1" lang="ja-JP" altLang="en-US"/>
+              <a:t>ノットゲートなどのゼロの要素を持つものは演算中の再起処理をスキップする特性を持ちます。</a:t>
+            </a:r>
+            <a:endParaRPr kumimoji="1" lang="en-US" altLang="ja-JP" dirty="0"/>
+          </a:p>
+          <a:p>
+            <a:endParaRPr kumimoji="1" lang="en-US" altLang="ja-JP" dirty="0"/>
+          </a:p>
+          <a:p>
+            <a:r>
+              <a:rPr kumimoji="1" lang="ja-JP" altLang="en-US"/>
+              <a:t>一方で、アダマールゲートなどの非ゼロの要素のみを持つゲートは演算時に全てのエッジを探索する必要があるという特性があります。</a:t>
+            </a:r>
+          </a:p>
+        </p:txBody>
+      </p:sp>
+      <p:sp>
+        <p:nvSpPr>
+          <p:cNvPr id="4" name="スライド番号プレースホルダー 3"/>
+          <p:cNvSpPr>
+            <a:spLocks noGrp="1"/>
+          </p:cNvSpPr>
+          <p:nvPr>
+            <p:ph type="sldNum" sz="quarter" idx="5"/>
+          </p:nvPr>
+        </p:nvSpPr>
+        <p:spPr/>
+        <p:txBody>
+          <a:bodyPr/>
+          <a:lstStyle/>
+          <a:p>
+            <a:fld id="{8F6FC832-1C17-2B46-9D92-3AA382C5F850}" type="slidenum">
+              <a:rPr kumimoji="1" lang="ja-JP" altLang="en-US" smtClean="0"/>
+              <a:t>6</a:t>
+            </a:fld>
+            <a:endParaRPr kumimoji="1" lang="ja-JP" altLang="en-US"/>
+          </a:p>
+        </p:txBody>
+      </p:sp>
+    </p:spTree>
+    <p:extLst>
+      <p:ext uri="{BB962C8B-B14F-4D97-AF65-F5344CB8AC3E}">
+        <p14:creationId xmlns:p14="http://schemas.microsoft.com/office/powerpoint/2010/main" val="3986634980"/>
+      </p:ext>
+    </p:extLst>
+  </p:cSld>
+  <p:clrMapOvr>
+    <a:masterClrMapping/>
+  </p:clrMapOvr>
+</p:notes>
+</file>
+
+<file path=ppt/notesSlides/notesSlide7.xml><?xml version="1.0" encoding="utf-8"?>
+<p:notes xmlns:a="http://schemas.openxmlformats.org/drawingml/2006/main" xmlns:r="http://schemas.openxmlformats.org/officeDocument/2006/relationships" xmlns:p="http://schemas.openxmlformats.org/presentationml/2006/main">
+  <p:cSld>
+    <p:spTree>
+      <p:nvGrpSpPr>
+        <p:cNvPr id="1" name=""/>
+        <p:cNvGrpSpPr/>
+        <p:nvPr/>
+      </p:nvGrpSpPr>
+      <p:grpSpPr>
+        <a:xfrm>
+          <a:off x="0" y="0"/>
+          <a:ext cx="0" cy="0"/>
+          <a:chOff x="0" y="0"/>
+          <a:chExt cx="0" cy="0"/>
+        </a:xfrm>
+      </p:grpSpPr>
+      <p:sp>
+        <p:nvSpPr>
+          <p:cNvPr id="2" name="スライド イメージ プレースホルダー 1"/>
+          <p:cNvSpPr>
+            <a:spLocks noGrp="1" noRot="1" noChangeAspect="1"/>
+          </p:cNvSpPr>
+          <p:nvPr>
+            <p:ph type="sldImg"/>
+          </p:nvPr>
+        </p:nvSpPr>
+        <p:spPr/>
+      </p:sp>
+      <p:sp>
+        <p:nvSpPr>
+          <p:cNvPr id="3" name="ノート プレースホルダー 2"/>
+          <p:cNvSpPr>
+            <a:spLocks noGrp="1"/>
+          </p:cNvSpPr>
+          <p:nvPr>
+            <p:ph type="body" idx="1"/>
+          </p:nvPr>
+        </p:nvSpPr>
+        <p:spPr/>
+        <p:txBody>
+          <a:bodyPr/>
+          <a:lstStyle/>
+          <a:p>
+            <a:r>
+              <a:rPr kumimoji="1" lang="ja-JP" altLang="en-US"/>
+              <a:t>これらのゲートの特性は特にシミュレート時の乗算と加算の際の再帰数に大きく影響します。</a:t>
+            </a:r>
+            <a:endParaRPr kumimoji="1" lang="en-US" altLang="ja-JP" dirty="0"/>
+          </a:p>
+          <a:p>
+            <a:r>
+              <a:rPr kumimoji="1" lang="ja-JP" altLang="en-US"/>
+              <a:t>非ゼロの要素のみを持つゲートは量子ビット数に応じて指数関数的に演算時の再帰数を増加させます。</a:t>
+            </a:r>
+            <a:endParaRPr kumimoji="1" lang="en-US" altLang="ja-JP" dirty="0"/>
+          </a:p>
+          <a:p>
+            <a:r>
+              <a:rPr kumimoji="1" lang="ja-JP" altLang="en-US"/>
+              <a:t>一方で、</a:t>
+            </a:r>
+            <a:r>
+              <a:rPr kumimoji="1" lang="en-US" altLang="ja-JP" dirty="0"/>
+              <a:t>0</a:t>
+            </a:r>
+            <a:r>
+              <a:rPr kumimoji="1" lang="ja-JP" altLang="en-US"/>
+              <a:t>の要素を持ゲートは量子ビット数に関係なく一部の演算を再帰なしで処理することができます。</a:t>
+            </a:r>
+            <a:endParaRPr kumimoji="1" lang="en-US" altLang="ja-JP" dirty="0"/>
+          </a:p>
+          <a:p>
+            <a:r>
+              <a:rPr kumimoji="1" lang="ja-JP" altLang="en-US"/>
+              <a:t>これは演算時の被演算子の値が</a:t>
+            </a:r>
+            <a:r>
+              <a:rPr kumimoji="1" lang="en-US" altLang="ja-JP" dirty="0"/>
+              <a:t>0</a:t>
+            </a:r>
+            <a:r>
+              <a:rPr kumimoji="1" lang="ja-JP" altLang="en-US"/>
+              <a:t>になることによって起こります。</a:t>
+            </a:r>
+            <a:br>
+              <a:rPr kumimoji="1" lang="en-US" altLang="ja-JP" dirty="0"/>
+            </a:br>
+            <a:r>
+              <a:rPr kumimoji="1" lang="ja-JP" altLang="en-US"/>
+              <a:t>スライドの例では、</a:t>
+            </a:r>
+            <a:r>
+              <a:rPr kumimoji="1" lang="en-US" altLang="ja-JP" dirty="0"/>
+              <a:t>0</a:t>
+            </a:r>
+            <a:r>
+              <a:rPr kumimoji="1" lang="ja-JP" altLang="en-US"/>
+              <a:t>と</a:t>
+            </a:r>
+            <a:r>
+              <a:rPr kumimoji="1" lang="en-US" altLang="ja-JP" dirty="0"/>
+              <a:t>β</a:t>
+            </a:r>
+            <a:r>
+              <a:rPr kumimoji="1" lang="ja-JP" altLang="en-US"/>
+              <a:t>、</a:t>
+            </a:r>
+            <a:r>
+              <a:rPr kumimoji="1" lang="en-US" altLang="ja-JP" dirty="0"/>
+              <a:t>0</a:t>
+            </a:r>
+            <a:r>
+              <a:rPr kumimoji="1" lang="ja-JP" altLang="en-US"/>
+              <a:t>と</a:t>
+            </a:r>
+            <a:r>
+              <a:rPr kumimoji="1" lang="en-US" altLang="ja-JP" dirty="0"/>
+              <a:t>α</a:t>
+            </a:r>
+            <a:r>
+              <a:rPr kumimoji="1" lang="ja-JP" altLang="en-US"/>
+              <a:t>の乗算や、</a:t>
+            </a:r>
+            <a:r>
+              <a:rPr kumimoji="1" lang="en-US" altLang="ja-JP" dirty="0"/>
+              <a:t>Aα</a:t>
+            </a:r>
+            <a:r>
+              <a:rPr kumimoji="1" lang="ja-JP" altLang="en-US"/>
+              <a:t>と</a:t>
+            </a:r>
+            <a:r>
+              <a:rPr kumimoji="1" lang="en-US" altLang="ja-JP" dirty="0"/>
+              <a:t>0</a:t>
+            </a:r>
+            <a:r>
+              <a:rPr kumimoji="1" lang="ja-JP" altLang="en-US"/>
+              <a:t>、</a:t>
+            </a:r>
+            <a:r>
+              <a:rPr kumimoji="1" lang="en-US" altLang="ja-JP" dirty="0"/>
+              <a:t>0</a:t>
+            </a:r>
+            <a:r>
+              <a:rPr kumimoji="1" lang="ja-JP" altLang="en-US"/>
+              <a:t>と</a:t>
+            </a:r>
+            <a:r>
+              <a:rPr kumimoji="1" lang="en-US" altLang="ja-JP" dirty="0"/>
+              <a:t>Dβ</a:t>
+            </a:r>
+            <a:r>
+              <a:rPr kumimoji="1" lang="ja-JP" altLang="en-US"/>
+              <a:t>の加算において、再帰なしで処理することができます。</a:t>
+            </a:r>
+          </a:p>
+        </p:txBody>
+      </p:sp>
+      <p:sp>
+        <p:nvSpPr>
+          <p:cNvPr id="4" name="スライド番号プレースホルダー 3"/>
+          <p:cNvSpPr>
+            <a:spLocks noGrp="1"/>
+          </p:cNvSpPr>
+          <p:nvPr>
+            <p:ph type="sldNum" sz="quarter" idx="5"/>
+          </p:nvPr>
+        </p:nvSpPr>
+        <p:spPr/>
+        <p:txBody>
+          <a:bodyPr/>
+          <a:lstStyle/>
+          <a:p>
+            <a:fld id="{8F6FC832-1C17-2B46-9D92-3AA382C5F850}" type="slidenum">
+              <a:rPr kumimoji="1" lang="ja-JP" altLang="en-US" smtClean="0"/>
+              <a:t>7</a:t>
+            </a:fld>
+            <a:endParaRPr kumimoji="1" lang="ja-JP" altLang="en-US"/>
+          </a:p>
+        </p:txBody>
+      </p:sp>
+    </p:spTree>
+    <p:extLst>
+      <p:ext uri="{BB962C8B-B14F-4D97-AF65-F5344CB8AC3E}">
+        <p14:creationId xmlns:p14="http://schemas.microsoft.com/office/powerpoint/2010/main" val="1009558862"/>
+      </p:ext>
+    </p:extLst>
+  </p:cSld>
+  <p:clrMapOvr>
+    <a:masterClrMapping/>
+  </p:clrMapOvr>
+</p:notes>
+</file>
+
+<file path=ppt/notesSlides/notesSlide8.xml><?xml version="1.0" encoding="utf-8"?>
+<p:notes xmlns:a="http://schemas.openxmlformats.org/drawingml/2006/main" xmlns:r="http://schemas.openxmlformats.org/officeDocument/2006/relationships" xmlns:p="http://schemas.openxmlformats.org/presentationml/2006/main">
+  <p:cSld>
+    <p:spTree>
+      <p:nvGrpSpPr>
+        <p:cNvPr id="1" name=""/>
+        <p:cNvGrpSpPr/>
+        <p:nvPr/>
+      </p:nvGrpSpPr>
+      <p:grpSpPr>
+        <a:xfrm>
+          <a:off x="0" y="0"/>
+          <a:ext cx="0" cy="0"/>
+          <a:chOff x="0" y="0"/>
+          <a:chExt cx="0" cy="0"/>
+        </a:xfrm>
+      </p:grpSpPr>
+      <p:sp>
+        <p:nvSpPr>
+          <p:cNvPr id="2" name="スライド イメージ プレースホルダー 1"/>
+          <p:cNvSpPr>
+            <a:spLocks noGrp="1" noRot="1" noChangeAspect="1"/>
+          </p:cNvSpPr>
+          <p:nvPr>
+            <p:ph type="sldImg"/>
+          </p:nvPr>
+        </p:nvSpPr>
+        <p:spPr/>
+      </p:sp>
+      <p:sp>
+        <p:nvSpPr>
+          <p:cNvPr id="3" name="ノート プレースホルダー 2"/>
+          <p:cNvSpPr>
+            <a:spLocks noGrp="1"/>
+          </p:cNvSpPr>
+          <p:nvPr>
+            <p:ph type="body" idx="1"/>
+          </p:nvPr>
+        </p:nvSpPr>
+        <p:spPr/>
+        <p:txBody>
+          <a:bodyPr/>
+          <a:lstStyle/>
+          <a:p>
+            <a:r>
+              <a:rPr kumimoji="1" lang="ja-JP" altLang="en-US"/>
+              <a:t>これらの</a:t>
+            </a:r>
+            <a:r>
+              <a:rPr kumimoji="1" lang="en-US" altLang="ja-JP" dirty="0"/>
+              <a:t>QMDD</a:t>
+            </a:r>
+            <a:r>
+              <a:rPr kumimoji="1" lang="ja-JP" altLang="en-US"/>
+              <a:t>の演算アルゴリズムの特性を考慮して</a:t>
+            </a:r>
+            <a:r>
+              <a:rPr kumimoji="1" lang="en-US" altLang="ja-JP" dirty="0"/>
+              <a:t>QMDD</a:t>
+            </a:r>
+            <a:r>
+              <a:rPr kumimoji="1" lang="ja-JP" altLang="en-US"/>
+              <a:t>の形状でゲートを</a:t>
+            </a:r>
+            <a:r>
+              <a:rPr kumimoji="1" lang="en-US" altLang="ja-JP" dirty="0"/>
+              <a:t>2</a:t>
+            </a:r>
+            <a:r>
+              <a:rPr kumimoji="1" lang="ja-JP" altLang="en-US"/>
+              <a:t>種類に分類し、ゲートの配置を行います。</a:t>
+            </a:r>
+            <a:endParaRPr kumimoji="1" lang="en-US" altLang="ja-JP" dirty="0"/>
+          </a:p>
+          <a:p>
+            <a:r>
+              <a:rPr kumimoji="1" lang="ja-JP" altLang="en-US"/>
+              <a:t>シミュレートの処理時に再帰数を抑制する０の要素を持つゲートはパディングに使用される</a:t>
+            </a:r>
+            <a:r>
+              <a:rPr kumimoji="1" lang="en-US" altLang="ja-JP" dirty="0"/>
+              <a:t>Identity</a:t>
+            </a:r>
+            <a:r>
+              <a:rPr kumimoji="1" lang="ja-JP" altLang="en-US"/>
+              <a:t>ゲートと演算コストが等価になります。</a:t>
+            </a:r>
+            <a:endParaRPr kumimoji="1" lang="en-US" altLang="ja-JP" dirty="0"/>
+          </a:p>
+          <a:p>
+            <a:r>
+              <a:rPr kumimoji="1" lang="ja-JP" altLang="en-US"/>
+              <a:t>そのため、従来通り並列実行可能であれば同一レイヤ上に配置し、回路の深さの増大を防ぎます。</a:t>
+            </a:r>
+            <a:endParaRPr kumimoji="1" lang="en-US" altLang="ja-JP" dirty="0"/>
+          </a:p>
+          <a:p>
+            <a:endParaRPr kumimoji="1" lang="en-US" altLang="ja-JP" dirty="0"/>
+          </a:p>
+          <a:p>
+            <a:r>
+              <a:rPr kumimoji="1" lang="ja-JP" altLang="en-US"/>
+              <a:t>一方で、</a:t>
+            </a:r>
+            <a:r>
+              <a:rPr kumimoji="1" lang="en-US" altLang="ja-JP" dirty="0"/>
+              <a:t>0</a:t>
+            </a:r>
+            <a:r>
+              <a:rPr kumimoji="1" lang="ja-JP" altLang="en-US"/>
+              <a:t>の要素を持たないゲートよりも上位ビットへのゲートの配置を制限します。</a:t>
+            </a:r>
+            <a:endParaRPr kumimoji="1" lang="en-US" altLang="ja-JP" dirty="0"/>
+          </a:p>
+          <a:p>
+            <a:r>
+              <a:rPr kumimoji="1" lang="en-US" altLang="ja-JP" dirty="0"/>
+              <a:t>QMDD</a:t>
+            </a:r>
+            <a:r>
+              <a:rPr kumimoji="1" lang="ja-JP" altLang="en-US"/>
+              <a:t>の特性上、上位ビットへの</a:t>
+            </a:r>
+            <a:r>
+              <a:rPr kumimoji="1" lang="en-US" altLang="ja-JP" dirty="0"/>
+              <a:t>Identity</a:t>
+            </a:r>
+            <a:r>
+              <a:rPr kumimoji="1" lang="ja-JP" altLang="en-US"/>
+              <a:t>ゲートのパディングは不必要であり、提案する手法では非ゼロの要素のみで構成されるゲートよりも下位のレベルへのゲート連結が発生しません。</a:t>
+            </a:r>
+            <a:endParaRPr kumimoji="1" lang="en-US" altLang="ja-JP" dirty="0"/>
+          </a:p>
+          <a:p>
+            <a:r>
+              <a:rPr kumimoji="1" lang="ja-JP" altLang="en-US"/>
+              <a:t>そのため非ゼロの要素のみで構成されるゲートは必ず終端ノードに接続され、指数関数的な演算コストの増大を抑制します。</a:t>
+            </a:r>
+          </a:p>
+        </p:txBody>
+      </p:sp>
+      <p:sp>
+        <p:nvSpPr>
+          <p:cNvPr id="4" name="スライド番号プレースホルダー 3"/>
+          <p:cNvSpPr>
+            <a:spLocks noGrp="1"/>
+          </p:cNvSpPr>
+          <p:nvPr>
+            <p:ph type="sldNum" sz="quarter" idx="5"/>
+          </p:nvPr>
+        </p:nvSpPr>
+        <p:spPr/>
+        <p:txBody>
+          <a:bodyPr/>
+          <a:lstStyle/>
+          <a:p>
+            <a:fld id="{8F6FC832-1C17-2B46-9D92-3AA382C5F850}" type="slidenum">
+              <a:rPr kumimoji="1" lang="ja-JP" altLang="en-US" smtClean="0"/>
+              <a:t>8</a:t>
+            </a:fld>
+            <a:endParaRPr kumimoji="1" lang="ja-JP" altLang="en-US"/>
+          </a:p>
+        </p:txBody>
+      </p:sp>
+    </p:spTree>
+    <p:extLst>
+      <p:ext uri="{BB962C8B-B14F-4D97-AF65-F5344CB8AC3E}">
+        <p14:creationId xmlns:p14="http://schemas.microsoft.com/office/powerpoint/2010/main" val="1385898121"/>
+      </p:ext>
+    </p:extLst>
+  </p:cSld>
+  <p:clrMapOvr>
+    <a:masterClrMapping/>
+  </p:clrMapOvr>
+</p:notes>
+</file>
+
+<file path=ppt/notesSlides/notesSlide9.xml><?xml version="1.0" encoding="utf-8"?>
+<p:notes xmlns:a="http://schemas.openxmlformats.org/drawingml/2006/main" xmlns:r="http://schemas.openxmlformats.org/officeDocument/2006/relationships" xmlns:p="http://schemas.openxmlformats.org/presentationml/2006/main">
+  <p:cSld>
+    <p:spTree>
+      <p:nvGrpSpPr>
+        <p:cNvPr id="1" name=""/>
+        <p:cNvGrpSpPr/>
+        <p:nvPr/>
+      </p:nvGrpSpPr>
+      <p:grpSpPr>
+        <a:xfrm>
+          <a:off x="0" y="0"/>
+          <a:ext cx="0" cy="0"/>
+          <a:chOff x="0" y="0"/>
+          <a:chExt cx="0" cy="0"/>
+        </a:xfrm>
+      </p:grpSpPr>
+      <p:sp>
+        <p:nvSpPr>
+          <p:cNvPr id="2" name="スライド イメージ プレースホルダー 1"/>
+          <p:cNvSpPr>
+            <a:spLocks noGrp="1" noRot="1" noChangeAspect="1"/>
+          </p:cNvSpPr>
+          <p:nvPr>
+            <p:ph type="sldImg"/>
+          </p:nvPr>
+        </p:nvSpPr>
+        <p:spPr/>
+      </p:sp>
+      <p:sp>
+        <p:nvSpPr>
+          <p:cNvPr id="3" name="ノート プレースホルダー 2"/>
+          <p:cNvSpPr>
+            <a:spLocks noGrp="1"/>
+          </p:cNvSpPr>
+          <p:nvPr>
+            <p:ph type="body" idx="1"/>
+          </p:nvPr>
+        </p:nvSpPr>
+        <p:spPr/>
+        <p:txBody>
+          <a:bodyPr/>
+          <a:lstStyle/>
+          <a:p>
+            <a:r>
+              <a:rPr kumimoji="1" lang="en-US" altLang="ja-JP" dirty="0"/>
+              <a:t>0</a:t>
+            </a:r>
+            <a:r>
+              <a:rPr kumimoji="1" lang="ja-JP" altLang="en-US"/>
+              <a:t>の要素の有無は単一量子ゲートのみに焦点を当てた分類方法でしたが、多量子ゲートの扱いについても紹介いたします。</a:t>
+            </a:r>
+            <a:endParaRPr kumimoji="1" lang="en-US" altLang="ja-JP" dirty="0"/>
+          </a:p>
+          <a:p>
+            <a:endParaRPr kumimoji="1" lang="en-US" altLang="ja-JP" dirty="0"/>
+          </a:p>
+          <a:p>
+            <a:r>
+              <a:rPr kumimoji="1" lang="ja-JP" altLang="en-US"/>
+              <a:t>多量子ゲートでは、零行列の有無で分類します。</a:t>
+            </a:r>
+            <a:endParaRPr kumimoji="1" lang="en-US" altLang="ja-JP" dirty="0"/>
+          </a:p>
+          <a:p>
+            <a:r>
+              <a:rPr kumimoji="1" lang="ja-JP" altLang="en-US"/>
+              <a:t>零行列を部分行列として持つ量子ゲートは</a:t>
+            </a:r>
+            <a:r>
+              <a:rPr kumimoji="1" lang="en-US" altLang="ja-JP" dirty="0"/>
+              <a:t>QMDD</a:t>
+            </a:r>
+            <a:r>
+              <a:rPr kumimoji="1" lang="ja-JP" altLang="en-US"/>
+              <a:t>で表現した際に上位レベルで圧縮が可能になるという性質を持つためです。</a:t>
+            </a:r>
+            <a:endParaRPr kumimoji="1" lang="en-US" altLang="ja-JP" dirty="0"/>
+          </a:p>
+          <a:p>
+            <a:endParaRPr kumimoji="1" lang="en-US" altLang="ja-JP" dirty="0"/>
+          </a:p>
+          <a:p>
+            <a:r>
+              <a:rPr kumimoji="1" lang="ja-JP" altLang="en-US"/>
+              <a:t>また、置換行列に相当する</a:t>
+            </a:r>
+            <a:r>
+              <a:rPr kumimoji="1" lang="en-US" altLang="ja-JP" dirty="0"/>
+              <a:t>SWAP</a:t>
+            </a:r>
+            <a:r>
+              <a:rPr kumimoji="1" lang="ja-JP" altLang="en-US"/>
+              <a:t>ゲートはゼロ行列を部分行列にもたず、他の制御ゲートのようにノードの共有も難しいため、明示的に</a:t>
+            </a:r>
+            <a:r>
+              <a:rPr kumimoji="1" lang="en-US" altLang="ja-JP" dirty="0"/>
+              <a:t>QMDD</a:t>
+            </a:r>
+            <a:r>
+              <a:rPr kumimoji="1" lang="ja-JP" altLang="en-US"/>
+              <a:t>での演算処理をするのではなく置換テーブルで管理します。</a:t>
+            </a:r>
+            <a:endParaRPr kumimoji="1" lang="en-US" altLang="ja-JP" dirty="0"/>
+          </a:p>
+          <a:p>
+            <a:endParaRPr kumimoji="1" lang="en-US" altLang="ja-JP" dirty="0"/>
+          </a:p>
+          <a:p>
+            <a:r>
+              <a:rPr kumimoji="1" lang="ja-JP" altLang="en-US"/>
+              <a:t>さらに一部の制御ゲートでは、制御ビットとターゲットビットの順序関係に依存して大きく</a:t>
+            </a:r>
+            <a:r>
+              <a:rPr kumimoji="1" lang="en-US" altLang="ja-JP" dirty="0"/>
+              <a:t>QMDD</a:t>
+            </a:r>
+            <a:r>
+              <a:rPr kumimoji="1" lang="ja-JP" altLang="en-US"/>
+              <a:t>の形状が変化するため、作用するビットの考慮が必要となります。</a:t>
+            </a:r>
+            <a:endParaRPr kumimoji="1" lang="en-US" altLang="ja-JP" dirty="0"/>
+          </a:p>
+        </p:txBody>
+      </p:sp>
+      <p:sp>
+        <p:nvSpPr>
+          <p:cNvPr id="4" name="スライド番号プレースホルダー 3"/>
+          <p:cNvSpPr>
+            <a:spLocks noGrp="1"/>
+          </p:cNvSpPr>
+          <p:nvPr>
+            <p:ph type="sldNum" sz="quarter" idx="5"/>
+          </p:nvPr>
+        </p:nvSpPr>
+        <p:spPr/>
+        <p:txBody>
+          <a:bodyPr/>
+          <a:lstStyle/>
+          <a:p>
+            <a:fld id="{8F6FC832-1C17-2B46-9D92-3AA382C5F850}" type="slidenum">
+              <a:rPr kumimoji="1" lang="ja-JP" altLang="en-US" smtClean="0"/>
+              <a:t>9</a:t>
+            </a:fld>
+            <a:endParaRPr kumimoji="1" lang="ja-JP" altLang="en-US"/>
+          </a:p>
+        </p:txBody>
+      </p:sp>
+    </p:spTree>
+    <p:extLst>
+      <p:ext uri="{BB962C8B-B14F-4D97-AF65-F5344CB8AC3E}">
+        <p14:creationId xmlns:p14="http://schemas.microsoft.com/office/powerpoint/2010/main" val="2305358093"/>
       </p:ext>
     </p:extLst>
   </p:cSld>
@@ -826,9 +2615,9 @@
           <a:bodyPr/>
           <a:lstStyle/>
           <a:p>
-            <a:fld id="{76CFD282-C1FA-D646-8E86-A56CA00FB796}" type="datetimeFigureOut">
+            <a:fld id="{40ACDCCD-ECE1-404C-B9DC-99F4549AF587}" type="datetime1">
               <a:rPr kumimoji="1" lang="ja-JP" altLang="en-US" smtClean="0"/>
-              <a:t>2025/12/11</a:t>
+              <a:t>2025/12/22</a:t>
             </a:fld>
             <a:endParaRPr kumimoji="1" lang="ja-JP" altLang="en-US"/>
           </a:p>
@@ -1056,9 +2845,9 @@
           <a:bodyPr/>
           <a:lstStyle/>
           <a:p>
-            <a:fld id="{76CFD282-C1FA-D646-8E86-A56CA00FB796}" type="datetimeFigureOut">
+            <a:fld id="{914296E8-DA8E-B74E-93EB-E0FA41B10BF6}" type="datetime1">
               <a:rPr kumimoji="1" lang="ja-JP" altLang="en-US" smtClean="0"/>
-              <a:t>2025/12/11</a:t>
+              <a:t>2025/12/22</a:t>
             </a:fld>
             <a:endParaRPr kumimoji="1" lang="ja-JP" altLang="en-US"/>
           </a:p>
@@ -1296,9 +3085,9 @@
           <a:bodyPr/>
           <a:lstStyle/>
           <a:p>
-            <a:fld id="{76CFD282-C1FA-D646-8E86-A56CA00FB796}" type="datetimeFigureOut">
+            <a:fld id="{0A766FF2-201E-5543-B10B-E80F2325898E}" type="datetime1">
               <a:rPr kumimoji="1" lang="ja-JP" altLang="en-US" smtClean="0"/>
-              <a:t>2025/12/11</a:t>
+              <a:t>2025/12/22</a:t>
             </a:fld>
             <a:endParaRPr kumimoji="1" lang="ja-JP" altLang="en-US"/>
           </a:p>
@@ -1526,9 +3315,9 @@
           <a:bodyPr/>
           <a:lstStyle/>
           <a:p>
-            <a:fld id="{76CFD282-C1FA-D646-8E86-A56CA00FB796}" type="datetimeFigureOut">
+            <a:fld id="{5FCC8A69-A3F7-E24B-A06F-B86971B3B22A}" type="datetime1">
               <a:rPr kumimoji="1" lang="ja-JP" altLang="en-US" smtClean="0"/>
-              <a:t>2025/12/11</a:t>
+              <a:t>2025/12/22</a:t>
             </a:fld>
             <a:endParaRPr kumimoji="1" lang="ja-JP" altLang="en-US"/>
           </a:p>
@@ -1801,9 +3590,9 @@
           <a:bodyPr/>
           <a:lstStyle/>
           <a:p>
-            <a:fld id="{76CFD282-C1FA-D646-8E86-A56CA00FB796}" type="datetimeFigureOut">
+            <a:fld id="{9425F785-B32B-8240-B7C1-E03359B3D1B5}" type="datetime1">
               <a:rPr kumimoji="1" lang="ja-JP" altLang="en-US" smtClean="0"/>
-              <a:t>2025/12/11</a:t>
+              <a:t>2025/12/22</a:t>
             </a:fld>
             <a:endParaRPr kumimoji="1" lang="ja-JP" altLang="en-US"/>
           </a:p>
@@ -2130,9 +3919,9 @@
           <a:bodyPr/>
           <a:lstStyle/>
           <a:p>
-            <a:fld id="{76CFD282-C1FA-D646-8E86-A56CA00FB796}" type="datetimeFigureOut">
+            <a:fld id="{6748B249-895E-9348-AA58-11D360C3A97F}" type="datetime1">
               <a:rPr kumimoji="1" lang="ja-JP" altLang="en-US" smtClean="0"/>
-              <a:t>2025/12/11</a:t>
+              <a:t>2025/12/22</a:t>
             </a:fld>
             <a:endParaRPr kumimoji="1" lang="ja-JP" altLang="en-US"/>
           </a:p>
@@ -2606,9 +4395,9 @@
           <a:bodyPr/>
           <a:lstStyle/>
           <a:p>
-            <a:fld id="{76CFD282-C1FA-D646-8E86-A56CA00FB796}" type="datetimeFigureOut">
+            <a:fld id="{489FC0C0-01DE-5D41-92E0-2B0FB51BB226}" type="datetime1">
               <a:rPr kumimoji="1" lang="ja-JP" altLang="en-US" smtClean="0"/>
-              <a:t>2025/12/11</a:t>
+              <a:t>2025/12/22</a:t>
             </a:fld>
             <a:endParaRPr kumimoji="1" lang="ja-JP" altLang="en-US"/>
           </a:p>
@@ -2747,9 +4536,9 @@
           <a:bodyPr/>
           <a:lstStyle/>
           <a:p>
-            <a:fld id="{76CFD282-C1FA-D646-8E86-A56CA00FB796}" type="datetimeFigureOut">
+            <a:fld id="{869D29F1-347E-9E4A-9837-D451BECC302F}" type="datetime1">
               <a:rPr kumimoji="1" lang="ja-JP" altLang="en-US" smtClean="0"/>
-              <a:t>2025/12/11</a:t>
+              <a:t>2025/12/22</a:t>
             </a:fld>
             <a:endParaRPr kumimoji="1" lang="ja-JP" altLang="en-US"/>
           </a:p>
@@ -2860,9 +4649,9 @@
           <a:bodyPr/>
           <a:lstStyle/>
           <a:p>
-            <a:fld id="{76CFD282-C1FA-D646-8E86-A56CA00FB796}" type="datetimeFigureOut">
+            <a:fld id="{02B93DE7-3BFB-BC4A-9F05-DE0F4DDD055D}" type="datetime1">
               <a:rPr kumimoji="1" lang="ja-JP" altLang="en-US" smtClean="0"/>
-              <a:t>2025/12/11</a:t>
+              <a:t>2025/12/22</a:t>
             </a:fld>
             <a:endParaRPr kumimoji="1" lang="ja-JP" altLang="en-US"/>
           </a:p>
@@ -3203,9 +4992,9 @@
           <a:bodyPr/>
           <a:lstStyle/>
           <a:p>
-            <a:fld id="{76CFD282-C1FA-D646-8E86-A56CA00FB796}" type="datetimeFigureOut">
+            <a:fld id="{A3D06D9B-CC18-0E44-86E8-3096BB54316D}" type="datetime1">
               <a:rPr kumimoji="1" lang="ja-JP" altLang="en-US" smtClean="0"/>
-              <a:t>2025/12/11</a:t>
+              <a:t>2025/12/22</a:t>
             </a:fld>
             <a:endParaRPr kumimoji="1" lang="ja-JP" altLang="en-US"/>
           </a:p>
@@ -3491,9 +5280,9 @@
           <a:bodyPr/>
           <a:lstStyle/>
           <a:p>
-            <a:fld id="{76CFD282-C1FA-D646-8E86-A56CA00FB796}" type="datetimeFigureOut">
+            <a:fld id="{BD9941B9-FC25-3D45-AFC9-5565E82A13D2}" type="datetime1">
               <a:rPr kumimoji="1" lang="ja-JP" altLang="en-US" smtClean="0"/>
-              <a:t>2025/12/11</a:t>
+              <a:t>2025/12/22</a:t>
             </a:fld>
             <a:endParaRPr kumimoji="1" lang="ja-JP" altLang="en-US"/>
           </a:p>
@@ -3764,9 +5553,9 @@
             </a:lvl1pPr>
           </a:lstStyle>
           <a:p>
-            <a:fld id="{76CFD282-C1FA-D646-8E86-A56CA00FB796}" type="datetimeFigureOut">
+            <a:fld id="{40F4A43D-4A20-914C-9D65-3BB73CA12932}" type="datetime1">
               <a:rPr kumimoji="1" lang="ja-JP" altLang="en-US" smtClean="0"/>
-              <a:t>2025/12/11</a:t>
+              <a:t>2025/12/22</a:t>
             </a:fld>
             <a:endParaRPr kumimoji="1" lang="ja-JP" altLang="en-US"/>
           </a:p>
@@ -3883,6 +5672,7 @@
     <p:sldLayoutId id="2147483658" r:id="rId10"/>
     <p:sldLayoutId id="2147483659" r:id="rId11"/>
   </p:sldLayoutIdLst>
+  <p:hf hdr="0" ftr="0" dt="0"/>
   <p:txStyles>
     <p:titleStyle>
       <a:lvl1pPr algn="l" defTabSz="914400" rtl="0" eaLnBrk="1" latinLnBrk="0" hangingPunct="1">
@@ -4199,7 +5989,12 @@
             <p:ph type="ctrTitle"/>
           </p:nvPr>
         </p:nvSpPr>
-        <p:spPr/>
+        <p:spPr>
+          <a:xfrm>
+            <a:off x="459059" y="1141955"/>
+            <a:ext cx="11273882" cy="2387600"/>
+          </a:xfrm>
+        </p:spPr>
         <p:txBody>
           <a:bodyPr>
             <a:normAutofit fontScale="90000"/>
@@ -4207,12 +6002,26 @@
           <a:lstStyle/>
           <a:p>
             <a:r>
+              <a:rPr kumimoji="1" lang="ja-JP" altLang="en-US"/>
+              <a:t>同時に適用する量子ゲートの</a:t>
+            </a:r>
+            <a:br>
+              <a:rPr kumimoji="1" lang="en-US" altLang="ja-JP" dirty="0"/>
+            </a:br>
+            <a:r>
+              <a:rPr kumimoji="1" lang="ja-JP" altLang="en-US"/>
+              <a:t>適切な選択による</a:t>
+            </a:r>
+            <a:br>
+              <a:rPr kumimoji="1" lang="en-US" altLang="ja-JP" dirty="0"/>
+            </a:br>
+            <a:r>
               <a:rPr kumimoji="1" lang="en-US" altLang="ja-JP" dirty="0"/>
               <a:t>QMDD</a:t>
             </a:r>
             <a:r>
               <a:rPr kumimoji="1" lang="ja-JP" altLang="en-US"/>
-              <a:t>を用いた量子回路シミュレータにおけるシミュレーション手法の最適化</a:t>
+              <a:t>の量子回路シミュレーション</a:t>
             </a:r>
           </a:p>
         </p:txBody>
@@ -4275,6 +6084,1015 @@
 </file>
 
 <file path=ppt/slides/slide10.xml><?xml version="1.0" encoding="utf-8"?>
+<p:sld xmlns:a="http://schemas.openxmlformats.org/drawingml/2006/main" xmlns:r="http://schemas.openxmlformats.org/officeDocument/2006/relationships" xmlns:p="http://schemas.openxmlformats.org/presentationml/2006/main">
+  <p:cSld>
+    <p:spTree>
+      <p:nvGrpSpPr>
+        <p:cNvPr id="1" name="">
+          <a:extLst>
+            <a:ext uri="{FF2B5EF4-FFF2-40B4-BE49-F238E27FC236}">
+              <a16:creationId xmlns:a16="http://schemas.microsoft.com/office/drawing/2014/main" id="{F9830DB4-2795-50ED-BD15-2C8A3873763D}"/>
+            </a:ext>
+          </a:extLst>
+        </p:cNvPr>
+        <p:cNvGrpSpPr/>
+        <p:nvPr/>
+      </p:nvGrpSpPr>
+      <p:grpSpPr>
+        <a:xfrm>
+          <a:off x="0" y="0"/>
+          <a:ext cx="0" cy="0"/>
+          <a:chOff x="0" y="0"/>
+          <a:chExt cx="0" cy="0"/>
+        </a:xfrm>
+      </p:grpSpPr>
+      <p:pic>
+        <p:nvPicPr>
+          <p:cNvPr id="6" name="グラフィックス 5">
+            <a:extLst>
+              <a:ext uri="{FF2B5EF4-FFF2-40B4-BE49-F238E27FC236}">
+                <a16:creationId xmlns:a16="http://schemas.microsoft.com/office/drawing/2014/main" id="{565695B0-5F5F-F93D-72C3-60F809008F53}"/>
+              </a:ext>
+            </a:extLst>
+          </p:cNvPr>
+          <p:cNvPicPr>
+            <a:picLocks noChangeAspect="1"/>
+          </p:cNvPicPr>
+          <p:nvPr/>
+        </p:nvPicPr>
+        <p:blipFill>
+          <a:blip r:embed="rId3">
+            <a:extLst>
+              <a:ext uri="{96DAC541-7B7A-43D3-8B79-37D633B846F1}">
+                <asvg:svgBlip xmlns:asvg="http://schemas.microsoft.com/office/drawing/2016/SVG/main" r:embed="rId4"/>
+              </a:ext>
+            </a:extLst>
+          </a:blip>
+          <a:stretch>
+            <a:fillRect/>
+          </a:stretch>
+        </p:blipFill>
+        <p:spPr>
+          <a:xfrm>
+            <a:off x="223836" y="4471147"/>
+            <a:ext cx="11744325" cy="2192573"/>
+          </a:xfrm>
+          <a:prstGeom prst="rect">
+            <a:avLst/>
+          </a:prstGeom>
+        </p:spPr>
+      </p:pic>
+      <p:sp>
+        <p:nvSpPr>
+          <p:cNvPr id="2" name="タイトル 1">
+            <a:extLst>
+              <a:ext uri="{FF2B5EF4-FFF2-40B4-BE49-F238E27FC236}">
+                <a16:creationId xmlns:a16="http://schemas.microsoft.com/office/drawing/2014/main" id="{5BA2D152-2511-CD69-C92D-664D2F09D713}"/>
+              </a:ext>
+            </a:extLst>
+          </p:cNvPr>
+          <p:cNvSpPr>
+            <a:spLocks noGrp="1"/>
+          </p:cNvSpPr>
+          <p:nvPr>
+            <p:ph type="title"/>
+          </p:nvPr>
+        </p:nvSpPr>
+        <p:spPr/>
+        <p:txBody>
+          <a:bodyPr/>
+          <a:lstStyle/>
+          <a:p>
+            <a:r>
+              <a:rPr kumimoji="1" lang="ja-JP" altLang="en-US"/>
+              <a:t>手法の比較</a:t>
+            </a:r>
+          </a:p>
+        </p:txBody>
+      </p:sp>
+      <p:sp>
+        <p:nvSpPr>
+          <p:cNvPr id="4" name="スライド番号プレースホルダー 3">
+            <a:extLst>
+              <a:ext uri="{FF2B5EF4-FFF2-40B4-BE49-F238E27FC236}">
+                <a16:creationId xmlns:a16="http://schemas.microsoft.com/office/drawing/2014/main" id="{865737B3-D9D7-6F2B-8571-00204C4BA8A1}"/>
+              </a:ext>
+            </a:extLst>
+          </p:cNvPr>
+          <p:cNvSpPr>
+            <a:spLocks noGrp="1"/>
+          </p:cNvSpPr>
+          <p:nvPr>
+            <p:ph type="sldNum" sz="quarter" idx="12"/>
+          </p:nvPr>
+        </p:nvSpPr>
+        <p:spPr/>
+        <p:txBody>
+          <a:bodyPr/>
+          <a:lstStyle/>
+          <a:p>
+            <a:fld id="{A05843C0-813E-B949-A4C0-2511A34E55B1}" type="slidenum">
+              <a:rPr kumimoji="1" lang="ja-JP" altLang="en-US" smtClean="0"/>
+              <a:t>10</a:t>
+            </a:fld>
+            <a:endParaRPr kumimoji="1" lang="ja-JP" altLang="en-US"/>
+          </a:p>
+        </p:txBody>
+      </p:sp>
+      <p:pic>
+        <p:nvPicPr>
+          <p:cNvPr id="8" name="図 7" descr="グラフ, 散布図&#10;&#10;自動的に生成された説明">
+            <a:extLst>
+              <a:ext uri="{FF2B5EF4-FFF2-40B4-BE49-F238E27FC236}">
+                <a16:creationId xmlns:a16="http://schemas.microsoft.com/office/drawing/2014/main" id="{665603E3-B8D6-A127-CA24-C3789F315D24}"/>
+              </a:ext>
+            </a:extLst>
+          </p:cNvPr>
+          <p:cNvPicPr>
+            <a:picLocks noChangeAspect="1"/>
+          </p:cNvPicPr>
+          <p:nvPr/>
+        </p:nvPicPr>
+        <p:blipFill>
+          <a:blip r:embed="rId5"/>
+          <a:stretch>
+            <a:fillRect/>
+          </a:stretch>
+        </p:blipFill>
+        <p:spPr>
+          <a:xfrm>
+            <a:off x="171370" y="1693997"/>
+            <a:ext cx="11849259" cy="2211421"/>
+          </a:xfrm>
+          <a:prstGeom prst="rect">
+            <a:avLst/>
+          </a:prstGeom>
+        </p:spPr>
+      </p:pic>
+      <p:sp>
+        <p:nvSpPr>
+          <p:cNvPr id="5" name="テキスト ボックス 4">
+            <a:extLst>
+              <a:ext uri="{FF2B5EF4-FFF2-40B4-BE49-F238E27FC236}">
+                <a16:creationId xmlns:a16="http://schemas.microsoft.com/office/drawing/2014/main" id="{212BD358-E3A1-989D-B981-E0581C575082}"/>
+              </a:ext>
+            </a:extLst>
+          </p:cNvPr>
+          <p:cNvSpPr txBox="1"/>
+          <p:nvPr/>
+        </p:nvSpPr>
+        <p:spPr>
+          <a:xfrm>
+            <a:off x="171370" y="1399660"/>
+            <a:ext cx="4051139" cy="369332"/>
+          </a:xfrm>
+          <a:prstGeom prst="rect">
+            <a:avLst/>
+          </a:prstGeom>
+          <a:noFill/>
+        </p:spPr>
+        <p:txBody>
+          <a:bodyPr wrap="square" rtlCol="0">
+            <a:spAutoFit/>
+          </a:bodyPr>
+          <a:lstStyle/>
+          <a:p>
+            <a:r>
+              <a:rPr kumimoji="1" lang="ja-JP" altLang="en-US" b="1"/>
+              <a:t>既存のシミュレーション手法</a:t>
+            </a:r>
+          </a:p>
+        </p:txBody>
+      </p:sp>
+      <p:sp>
+        <p:nvSpPr>
+          <p:cNvPr id="9" name="テキスト ボックス 8">
+            <a:extLst>
+              <a:ext uri="{FF2B5EF4-FFF2-40B4-BE49-F238E27FC236}">
+                <a16:creationId xmlns:a16="http://schemas.microsoft.com/office/drawing/2014/main" id="{91D6917A-7AD6-C7BF-504F-29E764E55528}"/>
+              </a:ext>
+            </a:extLst>
+          </p:cNvPr>
+          <p:cNvSpPr txBox="1"/>
+          <p:nvPr/>
+        </p:nvSpPr>
+        <p:spPr>
+          <a:xfrm>
+            <a:off x="171370" y="4119498"/>
+            <a:ext cx="4051139" cy="369332"/>
+          </a:xfrm>
+          <a:prstGeom prst="rect">
+            <a:avLst/>
+          </a:prstGeom>
+          <a:noFill/>
+        </p:spPr>
+        <p:txBody>
+          <a:bodyPr wrap="square" rtlCol="0">
+            <a:spAutoFit/>
+          </a:bodyPr>
+          <a:lstStyle/>
+          <a:p>
+            <a:r>
+              <a:rPr kumimoji="1" lang="ja-JP" altLang="en-US" b="1"/>
+              <a:t>提案するシミュレーション手法</a:t>
+            </a:r>
+          </a:p>
+        </p:txBody>
+      </p:sp>
+      <p:sp>
+        <p:nvSpPr>
+          <p:cNvPr id="10" name="正方形/長方形 9">
+            <a:extLst>
+              <a:ext uri="{FF2B5EF4-FFF2-40B4-BE49-F238E27FC236}">
+                <a16:creationId xmlns:a16="http://schemas.microsoft.com/office/drawing/2014/main" id="{5914A285-B21F-2659-F5AD-4ECE330F1296}"/>
+              </a:ext>
+            </a:extLst>
+          </p:cNvPr>
+          <p:cNvSpPr/>
+          <p:nvPr/>
+        </p:nvSpPr>
+        <p:spPr>
+          <a:xfrm>
+            <a:off x="1886673" y="1690688"/>
+            <a:ext cx="1238492" cy="2128958"/>
+          </a:xfrm>
+          <a:prstGeom prst="rect">
+            <a:avLst/>
+          </a:prstGeom>
+          <a:noFill/>
+          <a:ln w="28575">
+            <a:solidFill>
+              <a:srgbClr val="7030A0"/>
+            </a:solidFill>
+          </a:ln>
+        </p:spPr>
+        <p:style>
+          <a:lnRef idx="2">
+            <a:schemeClr val="accent1">
+              <a:shade val="15000"/>
+            </a:schemeClr>
+          </a:lnRef>
+          <a:fillRef idx="1">
+            <a:schemeClr val="accent1"/>
+          </a:fillRef>
+          <a:effectRef idx="0">
+            <a:schemeClr val="accent1"/>
+          </a:effectRef>
+          <a:fontRef idx="minor">
+            <a:schemeClr val="lt1"/>
+          </a:fontRef>
+        </p:style>
+        <p:txBody>
+          <a:bodyPr rtlCol="0" anchor="ctr"/>
+          <a:lstStyle/>
+          <a:p>
+            <a:pPr algn="ctr"/>
+            <a:endParaRPr kumimoji="1" lang="ja-JP" altLang="en-US"/>
+          </a:p>
+        </p:txBody>
+      </p:sp>
+      <p:sp>
+        <p:nvSpPr>
+          <p:cNvPr id="12" name="正方形/長方形 11">
+            <a:extLst>
+              <a:ext uri="{FF2B5EF4-FFF2-40B4-BE49-F238E27FC236}">
+                <a16:creationId xmlns:a16="http://schemas.microsoft.com/office/drawing/2014/main" id="{DD73AA14-1A65-AEA2-D957-D7586A20F09A}"/>
+              </a:ext>
+            </a:extLst>
+          </p:cNvPr>
+          <p:cNvSpPr/>
+          <p:nvPr/>
+        </p:nvSpPr>
+        <p:spPr>
+          <a:xfrm>
+            <a:off x="1737359" y="4497671"/>
+            <a:ext cx="1333501" cy="2157208"/>
+          </a:xfrm>
+          <a:prstGeom prst="rect">
+            <a:avLst/>
+          </a:prstGeom>
+          <a:noFill/>
+          <a:ln w="28575">
+            <a:solidFill>
+              <a:srgbClr val="7030A0"/>
+            </a:solidFill>
+          </a:ln>
+        </p:spPr>
+        <p:style>
+          <a:lnRef idx="2">
+            <a:schemeClr val="accent1">
+              <a:shade val="15000"/>
+            </a:schemeClr>
+          </a:lnRef>
+          <a:fillRef idx="1">
+            <a:schemeClr val="accent1"/>
+          </a:fillRef>
+          <a:effectRef idx="0">
+            <a:schemeClr val="accent1"/>
+          </a:effectRef>
+          <a:fontRef idx="minor">
+            <a:schemeClr val="lt1"/>
+          </a:fontRef>
+        </p:style>
+        <p:txBody>
+          <a:bodyPr rtlCol="0" anchor="ctr"/>
+          <a:lstStyle/>
+          <a:p>
+            <a:pPr algn="ctr"/>
+            <a:endParaRPr kumimoji="1" lang="ja-JP" altLang="en-US"/>
+          </a:p>
+        </p:txBody>
+      </p:sp>
+      <p:sp>
+        <p:nvSpPr>
+          <p:cNvPr id="13" name="正方形/長方形 12">
+            <a:extLst>
+              <a:ext uri="{FF2B5EF4-FFF2-40B4-BE49-F238E27FC236}">
+                <a16:creationId xmlns:a16="http://schemas.microsoft.com/office/drawing/2014/main" id="{1899AE52-567A-784A-A47A-23ADACB81F3B}"/>
+              </a:ext>
+            </a:extLst>
+          </p:cNvPr>
+          <p:cNvSpPr/>
+          <p:nvPr/>
+        </p:nvSpPr>
+        <p:spPr>
+          <a:xfrm>
+            <a:off x="7969682" y="4497671"/>
+            <a:ext cx="1060018" cy="2157208"/>
+          </a:xfrm>
+          <a:prstGeom prst="rect">
+            <a:avLst/>
+          </a:prstGeom>
+          <a:noFill/>
+          <a:ln w="28575">
+            <a:solidFill>
+              <a:srgbClr val="7030A0"/>
+            </a:solidFill>
+          </a:ln>
+        </p:spPr>
+        <p:style>
+          <a:lnRef idx="2">
+            <a:schemeClr val="accent1">
+              <a:shade val="15000"/>
+            </a:schemeClr>
+          </a:lnRef>
+          <a:fillRef idx="1">
+            <a:schemeClr val="accent1"/>
+          </a:fillRef>
+          <a:effectRef idx="0">
+            <a:schemeClr val="accent1"/>
+          </a:effectRef>
+          <a:fontRef idx="minor">
+            <a:schemeClr val="lt1"/>
+          </a:fontRef>
+        </p:style>
+        <p:txBody>
+          <a:bodyPr rtlCol="0" anchor="ctr"/>
+          <a:lstStyle/>
+          <a:p>
+            <a:pPr algn="ctr"/>
+            <a:endParaRPr kumimoji="1" lang="ja-JP" altLang="en-US"/>
+          </a:p>
+        </p:txBody>
+      </p:sp>
+      <p:sp>
+        <p:nvSpPr>
+          <p:cNvPr id="14" name="正方形/長方形 13">
+            <a:extLst>
+              <a:ext uri="{FF2B5EF4-FFF2-40B4-BE49-F238E27FC236}">
+                <a16:creationId xmlns:a16="http://schemas.microsoft.com/office/drawing/2014/main" id="{93214009-FCFA-8B9E-E010-71A4E471DFA3}"/>
+              </a:ext>
+            </a:extLst>
+          </p:cNvPr>
+          <p:cNvSpPr/>
+          <p:nvPr/>
+        </p:nvSpPr>
+        <p:spPr>
+          <a:xfrm>
+            <a:off x="9150619" y="4495878"/>
+            <a:ext cx="709661" cy="2157208"/>
+          </a:xfrm>
+          <a:prstGeom prst="rect">
+            <a:avLst/>
+          </a:prstGeom>
+          <a:noFill/>
+          <a:ln w="28575">
+            <a:solidFill>
+              <a:srgbClr val="7030A0"/>
+            </a:solidFill>
+          </a:ln>
+        </p:spPr>
+        <p:style>
+          <a:lnRef idx="2">
+            <a:schemeClr val="accent1">
+              <a:shade val="15000"/>
+            </a:schemeClr>
+          </a:lnRef>
+          <a:fillRef idx="1">
+            <a:schemeClr val="accent1"/>
+          </a:fillRef>
+          <a:effectRef idx="0">
+            <a:schemeClr val="accent1"/>
+          </a:effectRef>
+          <a:fontRef idx="minor">
+            <a:schemeClr val="lt1"/>
+          </a:fontRef>
+        </p:style>
+        <p:txBody>
+          <a:bodyPr rtlCol="0" anchor="ctr"/>
+          <a:lstStyle/>
+          <a:p>
+            <a:pPr algn="ctr"/>
+            <a:endParaRPr kumimoji="1" lang="ja-JP" altLang="en-US"/>
+          </a:p>
+        </p:txBody>
+      </p:sp>
+      <p:sp>
+        <p:nvSpPr>
+          <p:cNvPr id="15" name="正方形/長方形 14">
+            <a:extLst>
+              <a:ext uri="{FF2B5EF4-FFF2-40B4-BE49-F238E27FC236}">
+                <a16:creationId xmlns:a16="http://schemas.microsoft.com/office/drawing/2014/main" id="{59597383-E449-5AF4-A2D6-21CA83FCD28C}"/>
+              </a:ext>
+            </a:extLst>
+          </p:cNvPr>
+          <p:cNvSpPr/>
+          <p:nvPr/>
+        </p:nvSpPr>
+        <p:spPr>
+          <a:xfrm>
+            <a:off x="7859210" y="1690688"/>
+            <a:ext cx="636608" cy="2128958"/>
+          </a:xfrm>
+          <a:prstGeom prst="rect">
+            <a:avLst/>
+          </a:prstGeom>
+          <a:noFill/>
+          <a:ln w="28575">
+            <a:solidFill>
+              <a:srgbClr val="7030A0"/>
+            </a:solidFill>
+          </a:ln>
+        </p:spPr>
+        <p:style>
+          <a:lnRef idx="2">
+            <a:schemeClr val="accent1">
+              <a:shade val="15000"/>
+            </a:schemeClr>
+          </a:lnRef>
+          <a:fillRef idx="1">
+            <a:schemeClr val="accent1"/>
+          </a:fillRef>
+          <a:effectRef idx="0">
+            <a:schemeClr val="accent1"/>
+          </a:effectRef>
+          <a:fontRef idx="minor">
+            <a:schemeClr val="lt1"/>
+          </a:fontRef>
+        </p:style>
+        <p:txBody>
+          <a:bodyPr rtlCol="0" anchor="ctr"/>
+          <a:lstStyle/>
+          <a:p>
+            <a:pPr algn="ctr"/>
+            <a:endParaRPr kumimoji="1" lang="ja-JP" altLang="en-US"/>
+          </a:p>
+        </p:txBody>
+      </p:sp>
+      <p:sp>
+        <p:nvSpPr>
+          <p:cNvPr id="16" name="正方形/長方形 15">
+            <a:extLst>
+              <a:ext uri="{FF2B5EF4-FFF2-40B4-BE49-F238E27FC236}">
+                <a16:creationId xmlns:a16="http://schemas.microsoft.com/office/drawing/2014/main" id="{4A836A72-23DF-7095-DB53-8E5A6435F6C9}"/>
+              </a:ext>
+            </a:extLst>
+          </p:cNvPr>
+          <p:cNvSpPr/>
+          <p:nvPr/>
+        </p:nvSpPr>
+        <p:spPr>
+          <a:xfrm>
+            <a:off x="8692587" y="1690688"/>
+            <a:ext cx="432123" cy="2128958"/>
+          </a:xfrm>
+          <a:prstGeom prst="rect">
+            <a:avLst/>
+          </a:prstGeom>
+          <a:noFill/>
+          <a:ln w="28575">
+            <a:solidFill>
+              <a:srgbClr val="7030A0"/>
+            </a:solidFill>
+          </a:ln>
+        </p:spPr>
+        <p:style>
+          <a:lnRef idx="2">
+            <a:schemeClr val="accent1">
+              <a:shade val="15000"/>
+            </a:schemeClr>
+          </a:lnRef>
+          <a:fillRef idx="1">
+            <a:schemeClr val="accent1"/>
+          </a:fillRef>
+          <a:effectRef idx="0">
+            <a:schemeClr val="accent1"/>
+          </a:effectRef>
+          <a:fontRef idx="minor">
+            <a:schemeClr val="lt1"/>
+          </a:fontRef>
+        </p:style>
+        <p:txBody>
+          <a:bodyPr rtlCol="0" anchor="ctr"/>
+          <a:lstStyle/>
+          <a:p>
+            <a:pPr algn="ctr"/>
+            <a:endParaRPr kumimoji="1" lang="ja-JP" altLang="en-US"/>
+          </a:p>
+        </p:txBody>
+      </p:sp>
+      <p:sp>
+        <p:nvSpPr>
+          <p:cNvPr id="11" name="正方形/長方形 10">
+            <a:extLst>
+              <a:ext uri="{FF2B5EF4-FFF2-40B4-BE49-F238E27FC236}">
+                <a16:creationId xmlns:a16="http://schemas.microsoft.com/office/drawing/2014/main" id="{A8AAD739-56CC-6DB0-8D1D-79AC6E7F50F6}"/>
+              </a:ext>
+            </a:extLst>
+          </p:cNvPr>
+          <p:cNvSpPr/>
+          <p:nvPr/>
+        </p:nvSpPr>
+        <p:spPr>
+          <a:xfrm>
+            <a:off x="1771977" y="4735376"/>
+            <a:ext cx="121181" cy="1653440"/>
+          </a:xfrm>
+          <a:prstGeom prst="rect">
+            <a:avLst/>
+          </a:prstGeom>
+          <a:noFill/>
+          <a:ln>
+            <a:solidFill>
+              <a:srgbClr val="FF0000"/>
+            </a:solidFill>
+          </a:ln>
+        </p:spPr>
+        <p:style>
+          <a:lnRef idx="2">
+            <a:schemeClr val="accent1">
+              <a:shade val="15000"/>
+            </a:schemeClr>
+          </a:lnRef>
+          <a:fillRef idx="1">
+            <a:schemeClr val="accent1"/>
+          </a:fillRef>
+          <a:effectRef idx="0">
+            <a:schemeClr val="accent1"/>
+          </a:effectRef>
+          <a:fontRef idx="minor">
+            <a:schemeClr val="lt1"/>
+          </a:fontRef>
+        </p:style>
+        <p:txBody>
+          <a:bodyPr rtlCol="0" anchor="ctr"/>
+          <a:lstStyle/>
+          <a:p>
+            <a:pPr algn="ctr"/>
+            <a:endParaRPr kumimoji="1" lang="ja-JP" altLang="en-US"/>
+          </a:p>
+        </p:txBody>
+      </p:sp>
+      <p:sp>
+        <p:nvSpPr>
+          <p:cNvPr id="20" name="正方形/長方形 19">
+            <a:extLst>
+              <a:ext uri="{FF2B5EF4-FFF2-40B4-BE49-F238E27FC236}">
+                <a16:creationId xmlns:a16="http://schemas.microsoft.com/office/drawing/2014/main" id="{6C82EE91-5D97-492C-CC29-2B41059F45A8}"/>
+              </a:ext>
+            </a:extLst>
+          </p:cNvPr>
+          <p:cNvSpPr/>
+          <p:nvPr/>
+        </p:nvSpPr>
+        <p:spPr>
+          <a:xfrm>
+            <a:off x="1941396" y="5239382"/>
+            <a:ext cx="121181" cy="1149434"/>
+          </a:xfrm>
+          <a:prstGeom prst="rect">
+            <a:avLst/>
+          </a:prstGeom>
+          <a:noFill/>
+          <a:ln>
+            <a:solidFill>
+              <a:srgbClr val="FF0000"/>
+            </a:solidFill>
+          </a:ln>
+        </p:spPr>
+        <p:style>
+          <a:lnRef idx="2">
+            <a:schemeClr val="accent1">
+              <a:shade val="15000"/>
+            </a:schemeClr>
+          </a:lnRef>
+          <a:fillRef idx="1">
+            <a:schemeClr val="accent1"/>
+          </a:fillRef>
+          <a:effectRef idx="0">
+            <a:schemeClr val="accent1"/>
+          </a:effectRef>
+          <a:fontRef idx="minor">
+            <a:schemeClr val="lt1"/>
+          </a:fontRef>
+        </p:style>
+        <p:txBody>
+          <a:bodyPr rtlCol="0" anchor="ctr"/>
+          <a:lstStyle/>
+          <a:p>
+            <a:pPr algn="ctr"/>
+            <a:endParaRPr kumimoji="1" lang="ja-JP" altLang="en-US"/>
+          </a:p>
+        </p:txBody>
+      </p:sp>
+      <p:sp>
+        <p:nvSpPr>
+          <p:cNvPr id="21" name="正方形/長方形 20">
+            <a:extLst>
+              <a:ext uri="{FF2B5EF4-FFF2-40B4-BE49-F238E27FC236}">
+                <a16:creationId xmlns:a16="http://schemas.microsoft.com/office/drawing/2014/main" id="{E39FCFD5-63CD-1A43-D178-AA50BE6B7C70}"/>
+              </a:ext>
+            </a:extLst>
+          </p:cNvPr>
+          <p:cNvSpPr/>
+          <p:nvPr/>
+        </p:nvSpPr>
+        <p:spPr>
+          <a:xfrm>
+            <a:off x="2111132" y="5733418"/>
+            <a:ext cx="121181" cy="655398"/>
+          </a:xfrm>
+          <a:prstGeom prst="rect">
+            <a:avLst/>
+          </a:prstGeom>
+          <a:noFill/>
+          <a:ln>
+            <a:solidFill>
+              <a:srgbClr val="FF0000"/>
+            </a:solidFill>
+          </a:ln>
+        </p:spPr>
+        <p:style>
+          <a:lnRef idx="2">
+            <a:schemeClr val="accent1">
+              <a:shade val="15000"/>
+            </a:schemeClr>
+          </a:lnRef>
+          <a:fillRef idx="1">
+            <a:schemeClr val="accent1"/>
+          </a:fillRef>
+          <a:effectRef idx="0">
+            <a:schemeClr val="accent1"/>
+          </a:effectRef>
+          <a:fontRef idx="minor">
+            <a:schemeClr val="lt1"/>
+          </a:fontRef>
+        </p:style>
+        <p:txBody>
+          <a:bodyPr rtlCol="0" anchor="ctr"/>
+          <a:lstStyle/>
+          <a:p>
+            <a:pPr algn="ctr"/>
+            <a:endParaRPr kumimoji="1" lang="ja-JP" altLang="en-US"/>
+          </a:p>
+        </p:txBody>
+      </p:sp>
+      <p:sp>
+        <p:nvSpPr>
+          <p:cNvPr id="22" name="正方形/長方形 21">
+            <a:extLst>
+              <a:ext uri="{FF2B5EF4-FFF2-40B4-BE49-F238E27FC236}">
+                <a16:creationId xmlns:a16="http://schemas.microsoft.com/office/drawing/2014/main" id="{C65B108A-5432-B233-BFFC-AE909F90688E}"/>
+              </a:ext>
+            </a:extLst>
+          </p:cNvPr>
+          <p:cNvSpPr/>
+          <p:nvPr/>
+        </p:nvSpPr>
+        <p:spPr>
+          <a:xfrm>
+            <a:off x="8006027" y="5246782"/>
+            <a:ext cx="131691" cy="1142033"/>
+          </a:xfrm>
+          <a:prstGeom prst="rect">
+            <a:avLst/>
+          </a:prstGeom>
+          <a:noFill/>
+          <a:ln>
+            <a:solidFill>
+              <a:srgbClr val="FF0000"/>
+            </a:solidFill>
+          </a:ln>
+        </p:spPr>
+        <p:style>
+          <a:lnRef idx="2">
+            <a:schemeClr val="accent1">
+              <a:shade val="15000"/>
+            </a:schemeClr>
+          </a:lnRef>
+          <a:fillRef idx="1">
+            <a:schemeClr val="accent1"/>
+          </a:fillRef>
+          <a:effectRef idx="0">
+            <a:schemeClr val="accent1"/>
+          </a:effectRef>
+          <a:fontRef idx="minor">
+            <a:schemeClr val="lt1"/>
+          </a:fontRef>
+        </p:style>
+        <p:txBody>
+          <a:bodyPr rtlCol="0" anchor="ctr"/>
+          <a:lstStyle/>
+          <a:p>
+            <a:pPr algn="ctr"/>
+            <a:endParaRPr kumimoji="1" lang="ja-JP" altLang="en-US"/>
+          </a:p>
+        </p:txBody>
+      </p:sp>
+      <p:sp>
+        <p:nvSpPr>
+          <p:cNvPr id="23" name="正方形/長方形 22">
+            <a:extLst>
+              <a:ext uri="{FF2B5EF4-FFF2-40B4-BE49-F238E27FC236}">
+                <a16:creationId xmlns:a16="http://schemas.microsoft.com/office/drawing/2014/main" id="{EC696712-FFB9-0E6A-0AF7-A4C4E0584DE3}"/>
+              </a:ext>
+            </a:extLst>
+          </p:cNvPr>
+          <p:cNvSpPr/>
+          <p:nvPr/>
+        </p:nvSpPr>
+        <p:spPr>
+          <a:xfrm>
+            <a:off x="8349418" y="5246782"/>
+            <a:ext cx="131691" cy="1142033"/>
+          </a:xfrm>
+          <a:prstGeom prst="rect">
+            <a:avLst/>
+          </a:prstGeom>
+          <a:noFill/>
+          <a:ln>
+            <a:solidFill>
+              <a:srgbClr val="FF0000"/>
+            </a:solidFill>
+          </a:ln>
+        </p:spPr>
+        <p:style>
+          <a:lnRef idx="2">
+            <a:schemeClr val="accent1">
+              <a:shade val="15000"/>
+            </a:schemeClr>
+          </a:lnRef>
+          <a:fillRef idx="1">
+            <a:schemeClr val="accent1"/>
+          </a:fillRef>
+          <a:effectRef idx="0">
+            <a:schemeClr val="accent1"/>
+          </a:effectRef>
+          <a:fontRef idx="minor">
+            <a:schemeClr val="lt1"/>
+          </a:fontRef>
+        </p:style>
+        <p:txBody>
+          <a:bodyPr rtlCol="0" anchor="ctr"/>
+          <a:lstStyle/>
+          <a:p>
+            <a:pPr algn="ctr"/>
+            <a:endParaRPr kumimoji="1" lang="ja-JP" altLang="en-US"/>
+          </a:p>
+        </p:txBody>
+      </p:sp>
+      <p:sp>
+        <p:nvSpPr>
+          <p:cNvPr id="24" name="正方形/長方形 23">
+            <a:extLst>
+              <a:ext uri="{FF2B5EF4-FFF2-40B4-BE49-F238E27FC236}">
+                <a16:creationId xmlns:a16="http://schemas.microsoft.com/office/drawing/2014/main" id="{F7F95F7E-56DD-23D6-8977-83C22DBC8C9F}"/>
+              </a:ext>
+            </a:extLst>
+          </p:cNvPr>
+          <p:cNvSpPr/>
+          <p:nvPr/>
+        </p:nvSpPr>
+        <p:spPr>
+          <a:xfrm>
+            <a:off x="8513904" y="5733418"/>
+            <a:ext cx="131691" cy="655397"/>
+          </a:xfrm>
+          <a:prstGeom prst="rect">
+            <a:avLst/>
+          </a:prstGeom>
+          <a:noFill/>
+          <a:ln>
+            <a:solidFill>
+              <a:srgbClr val="FF0000"/>
+            </a:solidFill>
+          </a:ln>
+        </p:spPr>
+        <p:style>
+          <a:lnRef idx="2">
+            <a:schemeClr val="accent1">
+              <a:shade val="15000"/>
+            </a:schemeClr>
+          </a:lnRef>
+          <a:fillRef idx="1">
+            <a:schemeClr val="accent1"/>
+          </a:fillRef>
+          <a:effectRef idx="0">
+            <a:schemeClr val="accent1"/>
+          </a:effectRef>
+          <a:fontRef idx="minor">
+            <a:schemeClr val="lt1"/>
+          </a:fontRef>
+        </p:style>
+        <p:txBody>
+          <a:bodyPr rtlCol="0" anchor="ctr"/>
+          <a:lstStyle/>
+          <a:p>
+            <a:pPr algn="ctr"/>
+            <a:endParaRPr kumimoji="1" lang="ja-JP" altLang="en-US"/>
+          </a:p>
+        </p:txBody>
+      </p:sp>
+      <p:sp>
+        <p:nvSpPr>
+          <p:cNvPr id="25" name="正方形/長方形 24">
+            <a:extLst>
+              <a:ext uri="{FF2B5EF4-FFF2-40B4-BE49-F238E27FC236}">
+                <a16:creationId xmlns:a16="http://schemas.microsoft.com/office/drawing/2014/main" id="{8AA6A65C-AE91-E5A3-9031-611D8FD67B65}"/>
+              </a:ext>
+            </a:extLst>
+          </p:cNvPr>
+          <p:cNvSpPr/>
+          <p:nvPr/>
+        </p:nvSpPr>
+        <p:spPr>
+          <a:xfrm>
+            <a:off x="8850928" y="5733418"/>
+            <a:ext cx="131691" cy="655397"/>
+          </a:xfrm>
+          <a:prstGeom prst="rect">
+            <a:avLst/>
+          </a:prstGeom>
+          <a:noFill/>
+          <a:ln>
+            <a:solidFill>
+              <a:srgbClr val="FF0000"/>
+            </a:solidFill>
+          </a:ln>
+        </p:spPr>
+        <p:style>
+          <a:lnRef idx="2">
+            <a:schemeClr val="accent1">
+              <a:shade val="15000"/>
+            </a:schemeClr>
+          </a:lnRef>
+          <a:fillRef idx="1">
+            <a:schemeClr val="accent1"/>
+          </a:fillRef>
+          <a:effectRef idx="0">
+            <a:schemeClr val="accent1"/>
+          </a:effectRef>
+          <a:fontRef idx="minor">
+            <a:schemeClr val="lt1"/>
+          </a:fontRef>
+        </p:style>
+        <p:txBody>
+          <a:bodyPr rtlCol="0" anchor="ctr"/>
+          <a:lstStyle/>
+          <a:p>
+            <a:pPr algn="ctr"/>
+            <a:endParaRPr kumimoji="1" lang="ja-JP" altLang="en-US"/>
+          </a:p>
+        </p:txBody>
+      </p:sp>
+      <p:sp>
+        <p:nvSpPr>
+          <p:cNvPr id="26" name="正方形/長方形 25">
+            <a:extLst>
+              <a:ext uri="{FF2B5EF4-FFF2-40B4-BE49-F238E27FC236}">
+                <a16:creationId xmlns:a16="http://schemas.microsoft.com/office/drawing/2014/main" id="{552F5DB8-DC21-CA92-BD27-62CCF0224DB4}"/>
+              </a:ext>
+            </a:extLst>
+          </p:cNvPr>
+          <p:cNvSpPr/>
+          <p:nvPr/>
+        </p:nvSpPr>
+        <p:spPr>
+          <a:xfrm>
+            <a:off x="9356819" y="5246782"/>
+            <a:ext cx="131691" cy="1142033"/>
+          </a:xfrm>
+          <a:prstGeom prst="rect">
+            <a:avLst/>
+          </a:prstGeom>
+          <a:noFill/>
+          <a:ln>
+            <a:solidFill>
+              <a:srgbClr val="FF0000"/>
+            </a:solidFill>
+          </a:ln>
+        </p:spPr>
+        <p:style>
+          <a:lnRef idx="2">
+            <a:schemeClr val="accent1">
+              <a:shade val="15000"/>
+            </a:schemeClr>
+          </a:lnRef>
+          <a:fillRef idx="1">
+            <a:schemeClr val="accent1"/>
+          </a:fillRef>
+          <a:effectRef idx="0">
+            <a:schemeClr val="accent1"/>
+          </a:effectRef>
+          <a:fontRef idx="minor">
+            <a:schemeClr val="lt1"/>
+          </a:fontRef>
+        </p:style>
+        <p:txBody>
+          <a:bodyPr rtlCol="0" anchor="ctr"/>
+          <a:lstStyle/>
+          <a:p>
+            <a:pPr algn="ctr"/>
+            <a:endParaRPr kumimoji="1" lang="ja-JP" altLang="en-US"/>
+          </a:p>
+        </p:txBody>
+      </p:sp>
+      <p:sp>
+        <p:nvSpPr>
+          <p:cNvPr id="27" name="正方形/長方形 26">
+            <a:extLst>
+              <a:ext uri="{FF2B5EF4-FFF2-40B4-BE49-F238E27FC236}">
+                <a16:creationId xmlns:a16="http://schemas.microsoft.com/office/drawing/2014/main" id="{2F419717-81A0-4A33-8EE8-BB347EDF318F}"/>
+              </a:ext>
+            </a:extLst>
+          </p:cNvPr>
+          <p:cNvSpPr/>
+          <p:nvPr/>
+        </p:nvSpPr>
+        <p:spPr>
+          <a:xfrm>
+            <a:off x="9525219" y="5733418"/>
+            <a:ext cx="131691" cy="655397"/>
+          </a:xfrm>
+          <a:prstGeom prst="rect">
+            <a:avLst/>
+          </a:prstGeom>
+          <a:noFill/>
+          <a:ln>
+            <a:solidFill>
+              <a:srgbClr val="FF0000"/>
+            </a:solidFill>
+          </a:ln>
+        </p:spPr>
+        <p:style>
+          <a:lnRef idx="2">
+            <a:schemeClr val="accent1">
+              <a:shade val="15000"/>
+            </a:schemeClr>
+          </a:lnRef>
+          <a:fillRef idx="1">
+            <a:schemeClr val="accent1"/>
+          </a:fillRef>
+          <a:effectRef idx="0">
+            <a:schemeClr val="accent1"/>
+          </a:effectRef>
+          <a:fontRef idx="minor">
+            <a:schemeClr val="lt1"/>
+          </a:fontRef>
+        </p:style>
+        <p:txBody>
+          <a:bodyPr rtlCol="0" anchor="ctr"/>
+          <a:lstStyle/>
+          <a:p>
+            <a:pPr algn="ctr"/>
+            <a:endParaRPr kumimoji="1" lang="ja-JP" altLang="en-US"/>
+          </a:p>
+        </p:txBody>
+      </p:sp>
+    </p:spTree>
+    <p:extLst>
+      <p:ext uri="{BB962C8B-B14F-4D97-AF65-F5344CB8AC3E}">
+        <p14:creationId xmlns:p14="http://schemas.microsoft.com/office/powerpoint/2010/main" val="2911148074"/>
+      </p:ext>
+    </p:extLst>
+  </p:cSld>
+  <p:clrMapOvr>
+    <a:masterClrMapping/>
+  </p:clrMapOvr>
+</p:sld>
+</file>
+
+<file path=ppt/slides/slide11.xml><?xml version="1.0" encoding="utf-8"?>
 <p:sld xmlns:a="http://schemas.openxmlformats.org/drawingml/2006/main" xmlns:r="http://schemas.openxmlformats.org/officeDocument/2006/relationships" xmlns:p="http://schemas.openxmlformats.org/presentationml/2006/main">
   <p:cSld>
     <p:spTree>
@@ -4319,8 +7137,8 @@
           </a:p>
         </p:txBody>
       </p:sp>
-      <mc:AlternateContent xmlns:mc="http://schemas.openxmlformats.org/markup-compatibility/2006">
-        <mc:Choice xmlns:a14="http://schemas.microsoft.com/office/drawing/2010/main" Requires="a14">
+      <mc:AlternateContent xmlns:mc="http://schemas.openxmlformats.org/markup-compatibility/2006" xmlns:a14="http://schemas.microsoft.com/office/drawing/2010/main">
+        <mc:Choice Requires="a14">
           <p:sp>
             <p:nvSpPr>
               <p:cNvPr id="3" name="コンテンツ プレースホルダー 2">
@@ -4349,12 +7167,24 @@
                   <a:t>量子ゲートの</a:t>
                 </a:r>
                 <a:r>
-                  <a:rPr lang="en-US" altLang="ja-JP" dirty="0"/>
+                  <a:rPr lang="en-US" altLang="ja-JP" dirty="0">
+                    <a:solidFill>
+                      <a:srgbClr val="FF0000"/>
+                    </a:solidFill>
+                  </a:rPr>
                   <a:t>QMDD</a:t>
                 </a:r>
                 <a:r>
+                  <a:rPr lang="ja-JP" altLang="en-US">
+                    <a:solidFill>
+                      <a:srgbClr val="FF0000"/>
+                    </a:solidFill>
+                  </a:rPr>
+                  <a:t>の形状</a:t>
+                </a:r>
+                <a:r>
                   <a:rPr lang="ja-JP" altLang="en-US"/>
-                  <a:t>の形状に注目したシミュレーション手法</a:t>
+                  <a:t>に注目したシミュレーション手法</a:t>
                 </a:r>
                 <a:br>
                   <a:rPr lang="en-US" altLang="ja-JP" dirty="0"/>
@@ -4448,14 +7278,14 @@
               <a:p>
                 <a:r>
                   <a:rPr lang="ja-JP" altLang="en-US"/>
-                  <a:t>制御ビットとターゲットビットの大小関係を考慮した最適化</a:t>
+                  <a:t>制御ビットとターゲットビットの順序関係を考慮した最適化</a:t>
                 </a:r>
                 <a:endParaRPr lang="en-US" altLang="ja-JP" dirty="0"/>
               </a:p>
             </p:txBody>
           </p:sp>
         </mc:Choice>
-        <mc:Fallback>
+        <mc:Fallback xmlns="">
           <p:sp>
             <p:nvSpPr>
               <p:cNvPr id="3" name="コンテンツ プレースホルダー 2">
@@ -4474,7 +7304,7 @@
             </p:nvSpPr>
             <p:spPr>
               <a:blipFill>
-                <a:blip r:embed="rId2"/>
+                <a:blip r:embed="rId3"/>
                 <a:stretch>
                   <a:fillRect l="-1206" t="-3198" b="-2907"/>
                 </a:stretch>
@@ -4518,7 +7348,7 @@
           <a:p>
             <a:fld id="{A05843C0-813E-B949-A4C0-2511A34E55B1}" type="slidenum">
               <a:rPr kumimoji="1" lang="ja-JP" altLang="en-US" smtClean="0"/>
-              <a:t>10</a:t>
+              <a:t>11</a:t>
             </a:fld>
             <a:endParaRPr kumimoji="1" lang="ja-JP" altLang="en-US"/>
           </a:p>
@@ -4537,7 +7367,7 @@
 </p:sld>
 </file>
 
-<file path=ppt/slides/slide11.xml><?xml version="1.0" encoding="utf-8"?>
+<file path=ppt/slides/slide12.xml><?xml version="1.0" encoding="utf-8"?>
 <p:sld xmlns:a="http://schemas.openxmlformats.org/drawingml/2006/main" xmlns:r="http://schemas.openxmlformats.org/officeDocument/2006/relationships" xmlns:p="http://schemas.openxmlformats.org/presentationml/2006/main">
   <p:cSld>
     <p:spTree>
@@ -4610,7 +7440,7 @@
           <a:p>
             <a:fld id="{EA2F3317-65BA-D746-98B8-3038158C8C28}" type="slidenum">
               <a:rPr kumimoji="1" lang="ja-JP" altLang="en-US" smtClean="0"/>
-              <a:t>11</a:t>
+              <a:t>12</a:t>
             </a:fld>
             <a:endParaRPr kumimoji="1" lang="ja-JP" altLang="en-US"/>
           </a:p>
@@ -4629,7 +7459,7 @@
 </p:sld>
 </file>
 
-<file path=ppt/slides/slide12.xml><?xml version="1.0" encoding="utf-8"?>
+<file path=ppt/slides/slide13.xml><?xml version="1.0" encoding="utf-8"?>
 <p:sld xmlns:a="http://schemas.openxmlformats.org/drawingml/2006/main" xmlns:r="http://schemas.openxmlformats.org/officeDocument/2006/relationships" xmlns:p="http://schemas.openxmlformats.org/presentationml/2006/main">
   <p:cSld>
     <p:spTree>
@@ -5832,6 +8662,35 @@
           </a:prstGeom>
         </p:spPr>
       </p:pic>
+      <p:sp>
+        <p:nvSpPr>
+          <p:cNvPr id="2" name="スライド番号プレースホルダー 1">
+            <a:extLst>
+              <a:ext uri="{FF2B5EF4-FFF2-40B4-BE49-F238E27FC236}">
+                <a16:creationId xmlns:a16="http://schemas.microsoft.com/office/drawing/2014/main" id="{44FA14CB-AEAB-33DC-231D-6CC8C0A9BE18}"/>
+              </a:ext>
+            </a:extLst>
+          </p:cNvPr>
+          <p:cNvSpPr>
+            <a:spLocks noGrp="1"/>
+          </p:cNvSpPr>
+          <p:nvPr>
+            <p:ph type="sldNum" sz="quarter" idx="12"/>
+          </p:nvPr>
+        </p:nvSpPr>
+        <p:spPr/>
+        <p:txBody>
+          <a:bodyPr/>
+          <a:lstStyle/>
+          <a:p>
+            <a:fld id="{B7DD3F26-AD0F-FC47-9ED8-571159D68F9B}" type="slidenum">
+              <a:rPr kumimoji="1" lang="ja-JP" altLang="en-US" smtClean="0"/>
+              <a:t>13</a:t>
+            </a:fld>
+            <a:endParaRPr kumimoji="1" lang="ja-JP" altLang="en-US"/>
+          </a:p>
+        </p:txBody>
+      </p:sp>
     </p:spTree>
     <p:extLst>
       <p:ext uri="{BB962C8B-B14F-4D97-AF65-F5344CB8AC3E}">
@@ -5845,7 +8704,7 @@
 </p:sld>
 </file>
 
-<file path=ppt/slides/slide13.xml><?xml version="1.0" encoding="utf-8"?>
+<file path=ppt/slides/slide14.xml><?xml version="1.0" encoding="utf-8"?>
 <p:sld xmlns:a="http://schemas.openxmlformats.org/drawingml/2006/main" xmlns:r="http://schemas.openxmlformats.org/officeDocument/2006/relationships" xmlns:p="http://schemas.openxmlformats.org/presentationml/2006/main">
   <p:cSld>
     <p:spTree>
@@ -9264,6 +12123,35 @@
           </a:p>
         </p:txBody>
       </p:sp>
+      <p:sp>
+        <p:nvSpPr>
+          <p:cNvPr id="25" name="スライド番号プレースホルダー 24">
+            <a:extLst>
+              <a:ext uri="{FF2B5EF4-FFF2-40B4-BE49-F238E27FC236}">
+                <a16:creationId xmlns:a16="http://schemas.microsoft.com/office/drawing/2014/main" id="{EEC8201F-2016-32A3-A271-F2BDF8880D60}"/>
+              </a:ext>
+            </a:extLst>
+          </p:cNvPr>
+          <p:cNvSpPr>
+            <a:spLocks noGrp="1"/>
+          </p:cNvSpPr>
+          <p:nvPr>
+            <p:ph type="sldNum" sz="quarter" idx="12"/>
+          </p:nvPr>
+        </p:nvSpPr>
+        <p:spPr/>
+        <p:txBody>
+          <a:bodyPr/>
+          <a:lstStyle/>
+          <a:p>
+            <a:fld id="{B7DD3F26-AD0F-FC47-9ED8-571159D68F9B}" type="slidenum">
+              <a:rPr kumimoji="1" lang="ja-JP" altLang="en-US" smtClean="0"/>
+              <a:t>14</a:t>
+            </a:fld>
+            <a:endParaRPr kumimoji="1" lang="ja-JP" altLang="en-US"/>
+          </a:p>
+        </p:txBody>
+      </p:sp>
     </p:spTree>
     <p:extLst>
       <p:ext uri="{BB962C8B-B14F-4D97-AF65-F5344CB8AC3E}">
@@ -9277,7 +12165,7 @@
 </p:sld>
 </file>
 
-<file path=ppt/slides/slide14.xml><?xml version="1.0" encoding="utf-8"?>
+<file path=ppt/slides/slide15.xml><?xml version="1.0" encoding="utf-8"?>
 <p:sld xmlns:a="http://schemas.openxmlformats.org/drawingml/2006/main" xmlns:r="http://schemas.openxmlformats.org/officeDocument/2006/relationships" xmlns:p="http://schemas.openxmlformats.org/presentationml/2006/main">
   <p:cSld>
     <p:spTree>
@@ -11886,6 +14774,35 @@
           </a:prstGeom>
         </p:spPr>
       </p:pic>
+      <p:sp>
+        <p:nvSpPr>
+          <p:cNvPr id="11" name="スライド番号プレースホルダー 10">
+            <a:extLst>
+              <a:ext uri="{FF2B5EF4-FFF2-40B4-BE49-F238E27FC236}">
+                <a16:creationId xmlns:a16="http://schemas.microsoft.com/office/drawing/2014/main" id="{C7B40E3F-F8EE-C9A8-5296-6BC3EC04E8FD}"/>
+              </a:ext>
+            </a:extLst>
+          </p:cNvPr>
+          <p:cNvSpPr>
+            <a:spLocks noGrp="1"/>
+          </p:cNvSpPr>
+          <p:nvPr>
+            <p:ph type="sldNum" sz="quarter" idx="12"/>
+          </p:nvPr>
+        </p:nvSpPr>
+        <p:spPr/>
+        <p:txBody>
+          <a:bodyPr/>
+          <a:lstStyle/>
+          <a:p>
+            <a:fld id="{B7DD3F26-AD0F-FC47-9ED8-571159D68F9B}" type="slidenum">
+              <a:rPr kumimoji="1" lang="ja-JP" altLang="en-US" smtClean="0"/>
+              <a:t>15</a:t>
+            </a:fld>
+            <a:endParaRPr kumimoji="1" lang="ja-JP" altLang="en-US"/>
+          </a:p>
+        </p:txBody>
+      </p:sp>
     </p:spTree>
     <p:extLst>
       <p:ext uri="{BB962C8B-B14F-4D97-AF65-F5344CB8AC3E}">
@@ -11899,7 +14816,7 @@
 </p:sld>
 </file>
 
-<file path=ppt/slides/slide15.xml><?xml version="1.0" encoding="utf-8"?>
+<file path=ppt/slides/slide16.xml><?xml version="1.0" encoding="utf-8"?>
 <p:sld xmlns:a="http://schemas.openxmlformats.org/drawingml/2006/main" xmlns:r="http://schemas.openxmlformats.org/officeDocument/2006/relationships" xmlns:p="http://schemas.openxmlformats.org/presentationml/2006/main">
   <p:cSld>
     <p:spTree>
@@ -15754,6 +18671,35 @@
           </a:prstGeom>
         </p:spPr>
       </p:pic>
+      <p:sp>
+        <p:nvSpPr>
+          <p:cNvPr id="13" name="スライド番号プレースホルダー 12">
+            <a:extLst>
+              <a:ext uri="{FF2B5EF4-FFF2-40B4-BE49-F238E27FC236}">
+                <a16:creationId xmlns:a16="http://schemas.microsoft.com/office/drawing/2014/main" id="{7A390365-85AC-F6A0-AE22-BDE63DDBDC46}"/>
+              </a:ext>
+            </a:extLst>
+          </p:cNvPr>
+          <p:cNvSpPr>
+            <a:spLocks noGrp="1"/>
+          </p:cNvSpPr>
+          <p:nvPr>
+            <p:ph type="sldNum" sz="quarter" idx="12"/>
+          </p:nvPr>
+        </p:nvSpPr>
+        <p:spPr/>
+        <p:txBody>
+          <a:bodyPr/>
+          <a:lstStyle/>
+          <a:p>
+            <a:fld id="{B7DD3F26-AD0F-FC47-9ED8-571159D68F9B}" type="slidenum">
+              <a:rPr kumimoji="1" lang="ja-JP" altLang="en-US" smtClean="0"/>
+              <a:t>16</a:t>
+            </a:fld>
+            <a:endParaRPr kumimoji="1" lang="ja-JP" altLang="en-US"/>
+          </a:p>
+        </p:txBody>
+      </p:sp>
     </p:spTree>
     <p:extLst>
       <p:ext uri="{BB962C8B-B14F-4D97-AF65-F5344CB8AC3E}">
@@ -15767,7 +18713,7 @@
 </p:sld>
 </file>
 
-<file path=ppt/slides/slide16.xml><?xml version="1.0" encoding="utf-8"?>
+<file path=ppt/slides/slide17.xml><?xml version="1.0" encoding="utf-8"?>
 <p:sld xmlns:a="http://schemas.openxmlformats.org/drawingml/2006/main" xmlns:r="http://schemas.openxmlformats.org/officeDocument/2006/relationships" xmlns:p="http://schemas.openxmlformats.org/presentationml/2006/main">
   <p:cSld>
     <p:spTree>
@@ -18821,6 +21767,35 @@
           </a:prstGeom>
         </p:spPr>
       </p:pic>
+      <p:sp>
+        <p:nvSpPr>
+          <p:cNvPr id="9" name="スライド番号プレースホルダー 8">
+            <a:extLst>
+              <a:ext uri="{FF2B5EF4-FFF2-40B4-BE49-F238E27FC236}">
+                <a16:creationId xmlns:a16="http://schemas.microsoft.com/office/drawing/2014/main" id="{E143DC48-B75E-0627-5883-0D761687D6C3}"/>
+              </a:ext>
+            </a:extLst>
+          </p:cNvPr>
+          <p:cNvSpPr>
+            <a:spLocks noGrp="1"/>
+          </p:cNvSpPr>
+          <p:nvPr>
+            <p:ph type="sldNum" sz="quarter" idx="12"/>
+          </p:nvPr>
+        </p:nvSpPr>
+        <p:spPr/>
+        <p:txBody>
+          <a:bodyPr/>
+          <a:lstStyle/>
+          <a:p>
+            <a:fld id="{B7DD3F26-AD0F-FC47-9ED8-571159D68F9B}" type="slidenum">
+              <a:rPr kumimoji="1" lang="ja-JP" altLang="en-US" smtClean="0"/>
+              <a:t>17</a:t>
+            </a:fld>
+            <a:endParaRPr kumimoji="1" lang="ja-JP" altLang="en-US"/>
+          </a:p>
+        </p:txBody>
+      </p:sp>
     </p:spTree>
     <p:extLst>
       <p:ext uri="{BB962C8B-B14F-4D97-AF65-F5344CB8AC3E}">
@@ -18834,7 +21809,7 @@
 </p:sld>
 </file>
 
-<file path=ppt/slides/slide17.xml><?xml version="1.0" encoding="utf-8"?>
+<file path=ppt/slides/slide18.xml><?xml version="1.0" encoding="utf-8"?>
 <p:sld xmlns:a="http://schemas.openxmlformats.org/drawingml/2006/main" xmlns:r="http://schemas.openxmlformats.org/officeDocument/2006/relationships" xmlns:p="http://schemas.openxmlformats.org/presentationml/2006/main">
   <p:cSld>
     <p:spTree>
@@ -20004,7 +22979,7 @@
           <a:p>
             <a:fld id="{A05843C0-813E-B949-A4C0-2511A34E55B1}" type="slidenum">
               <a:rPr kumimoji="1" lang="ja-JP" altLang="en-US" smtClean="0"/>
-              <a:t>17</a:t>
+              <a:t>18</a:t>
             </a:fld>
             <a:endParaRPr kumimoji="1" lang="ja-JP" altLang="en-US"/>
           </a:p>
@@ -20023,7 +22998,7 @@
 </p:sld>
 </file>
 
-<file path=ppt/slides/slide18.xml><?xml version="1.0" encoding="utf-8"?>
+<file path=ppt/slides/slide19.xml><?xml version="1.0" encoding="utf-8"?>
 <p:sld xmlns:a="http://schemas.openxmlformats.org/drawingml/2006/main" xmlns:r="http://schemas.openxmlformats.org/officeDocument/2006/relationships" xmlns:p="http://schemas.openxmlformats.org/presentationml/2006/main">
   <p:cSld>
     <p:spTree>
@@ -21524,7 +24499,7 @@
           <a:p>
             <a:fld id="{A05843C0-813E-B949-A4C0-2511A34E55B1}" type="slidenum">
               <a:rPr kumimoji="1" lang="ja-JP" altLang="en-US" smtClean="0"/>
-              <a:t>18</a:t>
+              <a:t>19</a:t>
             </a:fld>
             <a:endParaRPr kumimoji="1" lang="ja-JP" altLang="en-US"/>
           </a:p>
@@ -22823,6 +25798,1320 @@
   <p:cSld>
     <p:spTree>
       <p:nvGrpSpPr>
+        <p:cNvPr id="1" name="">
+          <a:extLst>
+            <a:ext uri="{FF2B5EF4-FFF2-40B4-BE49-F238E27FC236}">
+              <a16:creationId xmlns:a16="http://schemas.microsoft.com/office/drawing/2014/main" id="{DB9EA7A3-B247-BDD4-6674-25DA5A0E903E}"/>
+            </a:ext>
+          </a:extLst>
+        </p:cNvPr>
+        <p:cNvGrpSpPr/>
+        <p:nvPr/>
+      </p:nvGrpSpPr>
+      <p:grpSpPr>
+        <a:xfrm>
+          <a:off x="0" y="0"/>
+          <a:ext cx="0" cy="0"/>
+          <a:chOff x="0" y="0"/>
+          <a:chExt cx="0" cy="0"/>
+        </a:xfrm>
+      </p:grpSpPr>
+      <p:pic>
+        <p:nvPicPr>
+          <p:cNvPr id="7" name="コンテンツ プレースホルダー 6" descr="ダイアグラム&#10;&#10;中程度の精度で自動的に生成された説明">
+            <a:extLst>
+              <a:ext uri="{FF2B5EF4-FFF2-40B4-BE49-F238E27FC236}">
+                <a16:creationId xmlns:a16="http://schemas.microsoft.com/office/drawing/2014/main" id="{F4723785-77F1-61FF-8457-E6F6FEA3A572}"/>
+              </a:ext>
+            </a:extLst>
+          </p:cNvPr>
+          <p:cNvPicPr>
+            <a:picLocks noGrp="1" noChangeAspect="1"/>
+          </p:cNvPicPr>
+          <p:nvPr>
+            <p:ph sz="half" idx="2"/>
+          </p:nvPr>
+        </p:nvPicPr>
+        <p:blipFill>
+          <a:blip r:embed="rId3"/>
+          <a:stretch>
+            <a:fillRect/>
+          </a:stretch>
+        </p:blipFill>
+        <p:spPr>
+          <a:xfrm>
+            <a:off x="6853328" y="217480"/>
+            <a:ext cx="4065647" cy="6423040"/>
+          </a:xfrm>
+        </p:spPr>
+      </p:pic>
+      <p:sp>
+        <p:nvSpPr>
+          <p:cNvPr id="4" name="タイトル 3">
+            <a:extLst>
+              <a:ext uri="{FF2B5EF4-FFF2-40B4-BE49-F238E27FC236}">
+                <a16:creationId xmlns:a16="http://schemas.microsoft.com/office/drawing/2014/main" id="{E474707C-772D-78B5-A093-2816552A9361}"/>
+              </a:ext>
+            </a:extLst>
+          </p:cNvPr>
+          <p:cNvSpPr>
+            <a:spLocks noGrp="1"/>
+          </p:cNvSpPr>
+          <p:nvPr>
+            <p:ph type="title"/>
+          </p:nvPr>
+        </p:nvSpPr>
+        <p:spPr/>
+        <p:txBody>
+          <a:bodyPr/>
+          <a:lstStyle/>
+          <a:p>
+            <a:r>
+              <a:rPr lang="en-US" altLang="ja-JP" dirty="0"/>
+              <a:t>QMDD</a:t>
+            </a:r>
+            <a:r>
+              <a:rPr lang="ja-JP" altLang="en-US"/>
+              <a:t>の構造</a:t>
+            </a:r>
+          </a:p>
+        </p:txBody>
+      </p:sp>
+      <p:sp>
+        <p:nvSpPr>
+          <p:cNvPr id="5" name="コンテンツ プレースホルダー 4">
+            <a:extLst>
+              <a:ext uri="{FF2B5EF4-FFF2-40B4-BE49-F238E27FC236}">
+                <a16:creationId xmlns:a16="http://schemas.microsoft.com/office/drawing/2014/main" id="{4454B091-8B4B-B730-E17B-5F9BE8C2978C}"/>
+              </a:ext>
+            </a:extLst>
+          </p:cNvPr>
+          <p:cNvSpPr>
+            <a:spLocks noGrp="1"/>
+          </p:cNvSpPr>
+          <p:nvPr>
+            <p:ph sz="half" idx="1"/>
+          </p:nvPr>
+        </p:nvSpPr>
+        <p:spPr/>
+        <p:txBody>
+          <a:bodyPr/>
+          <a:lstStyle/>
+          <a:p>
+            <a:r>
+              <a:rPr lang="ja-JP" altLang="en-US"/>
+              <a:t>例</a:t>
+            </a:r>
+            <a:r>
+              <a:rPr lang="en-US" altLang="ja-JP" dirty="0"/>
+              <a:t>) CV</a:t>
+            </a:r>
+            <a:r>
+              <a:rPr lang="ja-JP" altLang="en-US"/>
+              <a:t>ゲート</a:t>
+            </a:r>
+          </a:p>
+        </p:txBody>
+      </p:sp>
+      <p:pic>
+        <p:nvPicPr>
+          <p:cNvPr id="13" name="図 12" descr="カレンダー が含まれている画像&#10;&#10;自動的に生成された説明">
+            <a:extLst>
+              <a:ext uri="{FF2B5EF4-FFF2-40B4-BE49-F238E27FC236}">
+                <a16:creationId xmlns:a16="http://schemas.microsoft.com/office/drawing/2014/main" id="{D7C09BBE-01B3-5DDB-3401-8A1D784D4FF7}"/>
+              </a:ext>
+            </a:extLst>
+          </p:cNvPr>
+          <p:cNvPicPr>
+            <a:picLocks noChangeAspect="1"/>
+          </p:cNvPicPr>
+          <p:nvPr/>
+        </p:nvPicPr>
+        <p:blipFill>
+          <a:blip r:embed="rId4"/>
+          <a:stretch>
+            <a:fillRect/>
+          </a:stretch>
+        </p:blipFill>
+        <p:spPr>
+          <a:xfrm>
+            <a:off x="591485" y="2971799"/>
+            <a:ext cx="5343825" cy="2747963"/>
+          </a:xfrm>
+          <a:prstGeom prst="rect">
+            <a:avLst/>
+          </a:prstGeom>
+        </p:spPr>
+      </p:pic>
+      <p:cxnSp>
+        <p:nvCxnSpPr>
+          <p:cNvPr id="2" name="直線コネクタ 1">
+            <a:extLst>
+              <a:ext uri="{FF2B5EF4-FFF2-40B4-BE49-F238E27FC236}">
+                <a16:creationId xmlns:a16="http://schemas.microsoft.com/office/drawing/2014/main" id="{C6B36BA1-BA65-FCC2-9FB7-33268BED06BC}"/>
+              </a:ext>
+            </a:extLst>
+          </p:cNvPr>
+          <p:cNvCxnSpPr>
+            <a:cxnSpLocks/>
+          </p:cNvCxnSpPr>
+          <p:nvPr/>
+        </p:nvCxnSpPr>
+        <p:spPr>
+          <a:xfrm>
+            <a:off x="671495" y="4246196"/>
+            <a:ext cx="5343825" cy="0"/>
+          </a:xfrm>
+          <a:prstGeom prst="line">
+            <a:avLst/>
+          </a:prstGeom>
+          <a:ln>
+            <a:solidFill>
+              <a:schemeClr val="tx1"/>
+            </a:solidFill>
+            <a:prstDash val="sysDot"/>
+          </a:ln>
+        </p:spPr>
+        <p:style>
+          <a:lnRef idx="2">
+            <a:schemeClr val="accent1"/>
+          </a:lnRef>
+          <a:fillRef idx="0">
+            <a:schemeClr val="accent1"/>
+          </a:fillRef>
+          <a:effectRef idx="1">
+            <a:schemeClr val="accent1"/>
+          </a:effectRef>
+          <a:fontRef idx="minor">
+            <a:schemeClr val="tx1"/>
+          </a:fontRef>
+        </p:style>
+      </p:cxnSp>
+      <p:cxnSp>
+        <p:nvCxnSpPr>
+          <p:cNvPr id="3" name="直線コネクタ 2">
+            <a:extLst>
+              <a:ext uri="{FF2B5EF4-FFF2-40B4-BE49-F238E27FC236}">
+                <a16:creationId xmlns:a16="http://schemas.microsoft.com/office/drawing/2014/main" id="{4F51D4D9-965A-E101-5A2F-169AB562FBDC}"/>
+              </a:ext>
+            </a:extLst>
+          </p:cNvPr>
+          <p:cNvCxnSpPr>
+            <a:cxnSpLocks/>
+          </p:cNvCxnSpPr>
+          <p:nvPr/>
+        </p:nvCxnSpPr>
+        <p:spPr>
+          <a:xfrm>
+            <a:off x="2698852" y="2824119"/>
+            <a:ext cx="14326" cy="2932967"/>
+          </a:xfrm>
+          <a:prstGeom prst="line">
+            <a:avLst/>
+          </a:prstGeom>
+          <a:ln>
+            <a:solidFill>
+              <a:schemeClr val="tx1"/>
+            </a:solidFill>
+            <a:prstDash val="sysDot"/>
+          </a:ln>
+        </p:spPr>
+        <p:style>
+          <a:lnRef idx="2">
+            <a:schemeClr val="accent1"/>
+          </a:lnRef>
+          <a:fillRef idx="0">
+            <a:schemeClr val="accent1"/>
+          </a:fillRef>
+          <a:effectRef idx="1">
+            <a:schemeClr val="accent1"/>
+          </a:effectRef>
+          <a:fontRef idx="minor">
+            <a:schemeClr val="tx1"/>
+          </a:fontRef>
+        </p:style>
+      </p:cxnSp>
+      <p:cxnSp>
+        <p:nvCxnSpPr>
+          <p:cNvPr id="17" name="直線コネクタ 16">
+            <a:extLst>
+              <a:ext uri="{FF2B5EF4-FFF2-40B4-BE49-F238E27FC236}">
+                <a16:creationId xmlns:a16="http://schemas.microsoft.com/office/drawing/2014/main" id="{DA691EBC-8C1C-7310-A03F-B6F60A1BCC42}"/>
+              </a:ext>
+            </a:extLst>
+          </p:cNvPr>
+          <p:cNvCxnSpPr>
+            <a:cxnSpLocks/>
+          </p:cNvCxnSpPr>
+          <p:nvPr/>
+        </p:nvCxnSpPr>
+        <p:spPr>
+          <a:xfrm>
+            <a:off x="591485" y="3616410"/>
+            <a:ext cx="2972809" cy="0"/>
+          </a:xfrm>
+          <a:prstGeom prst="line">
+            <a:avLst/>
+          </a:prstGeom>
+          <a:ln>
+            <a:solidFill>
+              <a:schemeClr val="tx1"/>
+            </a:solidFill>
+            <a:prstDash val="sysDot"/>
+          </a:ln>
+        </p:spPr>
+        <p:style>
+          <a:lnRef idx="2">
+            <a:schemeClr val="accent1"/>
+          </a:lnRef>
+          <a:fillRef idx="0">
+            <a:schemeClr val="accent1"/>
+          </a:fillRef>
+          <a:effectRef idx="1">
+            <a:schemeClr val="accent1"/>
+          </a:effectRef>
+          <a:fontRef idx="minor">
+            <a:schemeClr val="tx1"/>
+          </a:fontRef>
+        </p:style>
+      </p:cxnSp>
+      <p:cxnSp>
+        <p:nvCxnSpPr>
+          <p:cNvPr id="18" name="直線コネクタ 17">
+            <a:extLst>
+              <a:ext uri="{FF2B5EF4-FFF2-40B4-BE49-F238E27FC236}">
+                <a16:creationId xmlns:a16="http://schemas.microsoft.com/office/drawing/2014/main" id="{35FDC16B-2C31-B8F0-F176-EEB98B355134}"/>
+              </a:ext>
+            </a:extLst>
+          </p:cNvPr>
+          <p:cNvCxnSpPr>
+            <a:cxnSpLocks/>
+          </p:cNvCxnSpPr>
+          <p:nvPr/>
+        </p:nvCxnSpPr>
+        <p:spPr>
+          <a:xfrm flipH="1">
+            <a:off x="1752149" y="2861251"/>
+            <a:ext cx="16567" cy="1561459"/>
+          </a:xfrm>
+          <a:prstGeom prst="line">
+            <a:avLst/>
+          </a:prstGeom>
+          <a:ln>
+            <a:solidFill>
+              <a:schemeClr val="tx1"/>
+            </a:solidFill>
+            <a:prstDash val="sysDot"/>
+          </a:ln>
+        </p:spPr>
+        <p:style>
+          <a:lnRef idx="2">
+            <a:schemeClr val="accent1"/>
+          </a:lnRef>
+          <a:fillRef idx="0">
+            <a:schemeClr val="accent1"/>
+          </a:fillRef>
+          <a:effectRef idx="1">
+            <a:schemeClr val="accent1"/>
+          </a:effectRef>
+          <a:fontRef idx="minor">
+            <a:schemeClr val="tx1"/>
+          </a:fontRef>
+        </p:style>
+      </p:cxnSp>
+      <p:sp>
+        <p:nvSpPr>
+          <p:cNvPr id="11" name="曲折矢印 10">
+            <a:extLst>
+              <a:ext uri="{FF2B5EF4-FFF2-40B4-BE49-F238E27FC236}">
+                <a16:creationId xmlns:a16="http://schemas.microsoft.com/office/drawing/2014/main" id="{061F8626-DAD4-33B4-ED8B-BBFA2093A907}"/>
+              </a:ext>
+            </a:extLst>
+          </p:cNvPr>
+          <p:cNvSpPr/>
+          <p:nvPr/>
+        </p:nvSpPr>
+        <p:spPr>
+          <a:xfrm flipH="1" flipV="1">
+            <a:off x="6433935" y="4857846"/>
+            <a:ext cx="863973" cy="1552837"/>
+          </a:xfrm>
+          <a:prstGeom prst="bentArrow">
+            <a:avLst>
+              <a:gd name="adj1" fmla="val 14547"/>
+              <a:gd name="adj2" fmla="val 25000"/>
+              <a:gd name="adj3" fmla="val 25000"/>
+              <a:gd name="adj4" fmla="val 29528"/>
+            </a:avLst>
+          </a:prstGeom>
+          <a:solidFill>
+            <a:srgbClr val="C00000"/>
+          </a:solidFill>
+          <a:ln>
+            <a:solidFill>
+              <a:srgbClr val="C00000"/>
+            </a:solidFill>
+          </a:ln>
+        </p:spPr>
+        <p:style>
+          <a:lnRef idx="2">
+            <a:schemeClr val="accent1">
+              <a:shade val="15000"/>
+            </a:schemeClr>
+          </a:lnRef>
+          <a:fillRef idx="1">
+            <a:schemeClr val="accent1"/>
+          </a:fillRef>
+          <a:effectRef idx="0">
+            <a:schemeClr val="accent1"/>
+          </a:effectRef>
+          <a:fontRef idx="minor">
+            <a:schemeClr val="lt1"/>
+          </a:fontRef>
+        </p:style>
+        <p:txBody>
+          <a:bodyPr rtlCol="0" anchor="ctr"/>
+          <a:lstStyle/>
+          <a:p>
+            <a:pPr algn="ctr"/>
+            <a:endParaRPr kumimoji="1" lang="ja-JP" altLang="en-US">
+              <a:solidFill>
+                <a:schemeClr val="tx1"/>
+              </a:solidFill>
+            </a:endParaRPr>
+          </a:p>
+        </p:txBody>
+      </p:sp>
+      <mc:AlternateContent xmlns:mc="http://schemas.openxmlformats.org/markup-compatibility/2006" xmlns:a14="http://schemas.microsoft.com/office/drawing/2010/main">
+        <mc:Choice Requires="a14">
+          <p:sp>
+            <p:nvSpPr>
+              <p:cNvPr id="12" name="テキスト ボックス 11">
+                <a:extLst>
+                  <a:ext uri="{FF2B5EF4-FFF2-40B4-BE49-F238E27FC236}">
+                    <a16:creationId xmlns:a16="http://schemas.microsoft.com/office/drawing/2014/main" id="{B61681A1-A49B-CBCB-B48D-EC486A25625A}"/>
+                  </a:ext>
+                </a:extLst>
+              </p:cNvPr>
+              <p:cNvSpPr txBox="1"/>
+              <p:nvPr/>
+            </p:nvSpPr>
+            <p:spPr>
+              <a:xfrm>
+                <a:off x="5596962" y="5964665"/>
+                <a:ext cx="779380" cy="461921"/>
+              </a:xfrm>
+              <a:prstGeom prst="rect">
+                <a:avLst/>
+              </a:prstGeom>
+              <a:noFill/>
+            </p:spPr>
+            <p:txBody>
+              <a:bodyPr wrap="none" lIns="0" tIns="0" rIns="0" bIns="0" rtlCol="0">
+                <a:spAutoFit/>
+              </a:bodyPr>
+              <a:lstStyle/>
+              <a:p>
+                <a:pPr/>
+                <a14:m>
+                  <m:oMathPara xmlns:m="http://schemas.openxmlformats.org/officeDocument/2006/math">
+                    <m:oMathParaPr>
+                      <m:jc m:val="centerGroup"/>
+                    </m:oMathParaPr>
+                    <m:oMath xmlns:m="http://schemas.openxmlformats.org/officeDocument/2006/math">
+                      <m:d>
+                        <m:dPr>
+                          <m:ctrlPr>
+                            <a:rPr kumimoji="1" lang="en-US" altLang="ja-JP" i="1" smtClean="0">
+                              <a:latin typeface="Cambria Math" panose="02040503050406030204" pitchFamily="18" charset="0"/>
+                            </a:rPr>
+                          </m:ctrlPr>
+                        </m:dPr>
+                        <m:e>
+                          <m:m>
+                            <m:mPr>
+                              <m:plcHide m:val="on"/>
+                              <m:mcs>
+                                <m:mc>
+                                  <m:mcPr>
+                                    <m:count m:val="2"/>
+                                    <m:mcJc m:val="center"/>
+                                  </m:mcPr>
+                                </m:mc>
+                              </m:mcs>
+                              <m:ctrlPr>
+                                <a:rPr kumimoji="1" lang="en-US" altLang="ja-JP" i="1" smtClean="0">
+                                  <a:latin typeface="Cambria Math" panose="02040503050406030204" pitchFamily="18" charset="0"/>
+                                </a:rPr>
+                              </m:ctrlPr>
+                            </m:mPr>
+                            <m:mr>
+                              <m:e>
+                                <m:r>
+                                  <a:rPr kumimoji="1" lang="en-US" altLang="ja-JP" i="1" smtClean="0">
+                                    <a:latin typeface="Cambria Math" panose="02040503050406030204" pitchFamily="18" charset="0"/>
+                                  </a:rPr>
+                                  <m:t>1</m:t>
+                                </m:r>
+                              </m:e>
+                              <m:e>
+                                <m:r>
+                                  <a:rPr kumimoji="1" lang="en-US" altLang="ja-JP" i="1" smtClean="0">
+                                    <a:latin typeface="Cambria Math" panose="02040503050406030204" pitchFamily="18" charset="0"/>
+                                  </a:rPr>
+                                  <m:t>0</m:t>
+                                </m:r>
+                              </m:e>
+                            </m:mr>
+                            <m:mr>
+                              <m:e>
+                                <m:r>
+                                  <a:rPr kumimoji="1" lang="en-US" altLang="ja-JP" i="1" smtClean="0">
+                                    <a:latin typeface="Cambria Math" panose="02040503050406030204" pitchFamily="18" charset="0"/>
+                                  </a:rPr>
+                                  <m:t>0</m:t>
+                                </m:r>
+                              </m:e>
+                              <m:e>
+                                <m:r>
+                                  <a:rPr kumimoji="1" lang="en-US" altLang="ja-JP" i="1" smtClean="0">
+                                    <a:latin typeface="Cambria Math" panose="02040503050406030204" pitchFamily="18" charset="0"/>
+                                  </a:rPr>
+                                  <m:t>1</m:t>
+                                </m:r>
+                              </m:e>
+                            </m:mr>
+                          </m:m>
+                        </m:e>
+                      </m:d>
+                    </m:oMath>
+                  </m:oMathPara>
+                </a14:m>
+                <a:endParaRPr kumimoji="1" lang="ja-JP" altLang="en-US"/>
+              </a:p>
+            </p:txBody>
+          </p:sp>
+        </mc:Choice>
+        <mc:Fallback xmlns="">
+          <p:sp>
+            <p:nvSpPr>
+              <p:cNvPr id="12" name="テキスト ボックス 11">
+                <a:extLst>
+                  <a:ext uri="{FF2B5EF4-FFF2-40B4-BE49-F238E27FC236}">
+                    <a16:creationId xmlns:a16="http://schemas.microsoft.com/office/drawing/2014/main" id="{B61681A1-A49B-CBCB-B48D-EC486A25625A}"/>
+                  </a:ext>
+                </a:extLst>
+              </p:cNvPr>
+              <p:cNvSpPr txBox="1">
+                <a:spLocks noRot="1" noChangeAspect="1" noMove="1" noResize="1" noEditPoints="1" noAdjustHandles="1" noChangeArrowheads="1" noChangeShapeType="1" noTextEdit="1"/>
+              </p:cNvSpPr>
+              <p:nvPr/>
+            </p:nvSpPr>
+            <p:spPr>
+              <a:xfrm>
+                <a:off x="5596962" y="5964665"/>
+                <a:ext cx="779380" cy="461921"/>
+              </a:xfrm>
+              <a:prstGeom prst="rect">
+                <a:avLst/>
+              </a:prstGeom>
+              <a:blipFill>
+                <a:blip r:embed="rId5"/>
+                <a:stretch>
+                  <a:fillRect t="-2703" b="-16216"/>
+                </a:stretch>
+              </a:blipFill>
+            </p:spPr>
+            <p:txBody>
+              <a:bodyPr/>
+              <a:lstStyle/>
+              <a:p>
+                <a:r>
+                  <a:rPr lang="ja-JP" altLang="en-US">
+                    <a:noFill/>
+                  </a:rPr>
+                  <a:t> </a:t>
+                </a:r>
+              </a:p>
+            </p:txBody>
+          </p:sp>
+        </mc:Fallback>
+      </mc:AlternateContent>
+      <p:sp>
+        <p:nvSpPr>
+          <p:cNvPr id="14" name="正方形/長方形 13">
+            <a:extLst>
+              <a:ext uri="{FF2B5EF4-FFF2-40B4-BE49-F238E27FC236}">
+                <a16:creationId xmlns:a16="http://schemas.microsoft.com/office/drawing/2014/main" id="{270D677F-1397-B10C-B3E3-65FEEE8C2CA3}"/>
+              </a:ext>
+            </a:extLst>
+          </p:cNvPr>
+          <p:cNvSpPr/>
+          <p:nvPr/>
+        </p:nvSpPr>
+        <p:spPr>
+          <a:xfrm>
+            <a:off x="2706150" y="2934475"/>
+            <a:ext cx="3002988" cy="1311721"/>
+          </a:xfrm>
+          <a:prstGeom prst="rect">
+            <a:avLst/>
+          </a:prstGeom>
+          <a:noFill/>
+          <a:ln w="28575">
+            <a:solidFill>
+              <a:srgbClr val="002060"/>
+            </a:solidFill>
+          </a:ln>
+        </p:spPr>
+        <p:style>
+          <a:lnRef idx="2">
+            <a:schemeClr val="accent1">
+              <a:shade val="15000"/>
+            </a:schemeClr>
+          </a:lnRef>
+          <a:fillRef idx="1">
+            <a:schemeClr val="accent1"/>
+          </a:fillRef>
+          <a:effectRef idx="0">
+            <a:schemeClr val="accent1"/>
+          </a:effectRef>
+          <a:fontRef idx="minor">
+            <a:schemeClr val="lt1"/>
+          </a:fontRef>
+        </p:style>
+        <p:txBody>
+          <a:bodyPr rtlCol="0" anchor="ctr"/>
+          <a:lstStyle/>
+          <a:p>
+            <a:pPr algn="ctr"/>
+            <a:endParaRPr kumimoji="1" lang="ja-JP" altLang="en-US"/>
+          </a:p>
+        </p:txBody>
+      </p:sp>
+      <p:sp>
+        <p:nvSpPr>
+          <p:cNvPr id="15" name="正方形/長方形 14">
+            <a:extLst>
+              <a:ext uri="{FF2B5EF4-FFF2-40B4-BE49-F238E27FC236}">
+                <a16:creationId xmlns:a16="http://schemas.microsoft.com/office/drawing/2014/main" id="{FDF53CB2-33E4-AE48-572E-36FF69FA31F9}"/>
+              </a:ext>
+            </a:extLst>
+          </p:cNvPr>
+          <p:cNvSpPr/>
+          <p:nvPr/>
+        </p:nvSpPr>
+        <p:spPr>
+          <a:xfrm>
+            <a:off x="838199" y="4246196"/>
+            <a:ext cx="1867951" cy="1372827"/>
+          </a:xfrm>
+          <a:prstGeom prst="rect">
+            <a:avLst/>
+          </a:prstGeom>
+          <a:noFill/>
+          <a:ln w="28575">
+            <a:solidFill>
+              <a:srgbClr val="002060"/>
+            </a:solidFill>
+          </a:ln>
+        </p:spPr>
+        <p:style>
+          <a:lnRef idx="2">
+            <a:schemeClr val="accent1">
+              <a:shade val="15000"/>
+            </a:schemeClr>
+          </a:lnRef>
+          <a:fillRef idx="1">
+            <a:schemeClr val="accent1"/>
+          </a:fillRef>
+          <a:effectRef idx="0">
+            <a:schemeClr val="accent1"/>
+          </a:effectRef>
+          <a:fontRef idx="minor">
+            <a:schemeClr val="lt1"/>
+          </a:fontRef>
+        </p:style>
+        <p:txBody>
+          <a:bodyPr rtlCol="0" anchor="ctr"/>
+          <a:lstStyle/>
+          <a:p>
+            <a:pPr algn="ctr"/>
+            <a:endParaRPr kumimoji="1" lang="ja-JP" altLang="en-US"/>
+          </a:p>
+        </p:txBody>
+      </p:sp>
+      <p:sp>
+        <p:nvSpPr>
+          <p:cNvPr id="16" name="正方形/長方形 15">
+            <a:extLst>
+              <a:ext uri="{FF2B5EF4-FFF2-40B4-BE49-F238E27FC236}">
+                <a16:creationId xmlns:a16="http://schemas.microsoft.com/office/drawing/2014/main" id="{C202CAC7-D316-CB25-C4D5-4D5BE133316D}"/>
+              </a:ext>
+            </a:extLst>
+          </p:cNvPr>
+          <p:cNvSpPr/>
+          <p:nvPr/>
+        </p:nvSpPr>
+        <p:spPr>
+          <a:xfrm>
+            <a:off x="1752045" y="2934475"/>
+            <a:ext cx="946703" cy="681935"/>
+          </a:xfrm>
+          <a:prstGeom prst="rect">
+            <a:avLst/>
+          </a:prstGeom>
+          <a:noFill/>
+          <a:ln w="28575">
+            <a:solidFill>
+              <a:srgbClr val="002060"/>
+            </a:solidFill>
+          </a:ln>
+        </p:spPr>
+        <p:style>
+          <a:lnRef idx="2">
+            <a:schemeClr val="accent1">
+              <a:shade val="15000"/>
+            </a:schemeClr>
+          </a:lnRef>
+          <a:fillRef idx="1">
+            <a:schemeClr val="accent1"/>
+          </a:fillRef>
+          <a:effectRef idx="0">
+            <a:schemeClr val="accent1"/>
+          </a:effectRef>
+          <a:fontRef idx="minor">
+            <a:schemeClr val="lt1"/>
+          </a:fontRef>
+        </p:style>
+        <p:txBody>
+          <a:bodyPr rtlCol="0" anchor="ctr"/>
+          <a:lstStyle/>
+          <a:p>
+            <a:pPr algn="ctr"/>
+            <a:endParaRPr kumimoji="1" lang="ja-JP" altLang="en-US"/>
+          </a:p>
+        </p:txBody>
+      </p:sp>
+      <p:sp>
+        <p:nvSpPr>
+          <p:cNvPr id="23" name="正方形/長方形 22">
+            <a:extLst>
+              <a:ext uri="{FF2B5EF4-FFF2-40B4-BE49-F238E27FC236}">
+                <a16:creationId xmlns:a16="http://schemas.microsoft.com/office/drawing/2014/main" id="{04E1E73E-A893-1857-69E7-8C3937BD3F1D}"/>
+              </a:ext>
+            </a:extLst>
+          </p:cNvPr>
+          <p:cNvSpPr/>
+          <p:nvPr/>
+        </p:nvSpPr>
+        <p:spPr>
+          <a:xfrm>
+            <a:off x="838200" y="3612889"/>
+            <a:ext cx="921351" cy="633307"/>
+          </a:xfrm>
+          <a:prstGeom prst="rect">
+            <a:avLst/>
+          </a:prstGeom>
+          <a:noFill/>
+          <a:ln w="28575">
+            <a:solidFill>
+              <a:srgbClr val="002060"/>
+            </a:solidFill>
+          </a:ln>
+        </p:spPr>
+        <p:style>
+          <a:lnRef idx="2">
+            <a:schemeClr val="accent1">
+              <a:shade val="15000"/>
+            </a:schemeClr>
+          </a:lnRef>
+          <a:fillRef idx="1">
+            <a:schemeClr val="accent1"/>
+          </a:fillRef>
+          <a:effectRef idx="0">
+            <a:schemeClr val="accent1"/>
+          </a:effectRef>
+          <a:fontRef idx="minor">
+            <a:schemeClr val="lt1"/>
+          </a:fontRef>
+        </p:style>
+        <p:txBody>
+          <a:bodyPr rtlCol="0" anchor="ctr"/>
+          <a:lstStyle/>
+          <a:p>
+            <a:pPr algn="ctr"/>
+            <a:endParaRPr kumimoji="1" lang="ja-JP" altLang="en-US"/>
+          </a:p>
+        </p:txBody>
+      </p:sp>
+      <p:sp>
+        <p:nvSpPr>
+          <p:cNvPr id="24" name="正方形/長方形 23">
+            <a:extLst>
+              <a:ext uri="{FF2B5EF4-FFF2-40B4-BE49-F238E27FC236}">
+                <a16:creationId xmlns:a16="http://schemas.microsoft.com/office/drawing/2014/main" id="{9D6C4630-3246-EC74-1294-C8272ECC94C1}"/>
+              </a:ext>
+            </a:extLst>
+          </p:cNvPr>
+          <p:cNvSpPr/>
+          <p:nvPr/>
+        </p:nvSpPr>
+        <p:spPr>
+          <a:xfrm>
+            <a:off x="1759551" y="3616410"/>
+            <a:ext cx="939197" cy="626265"/>
+          </a:xfrm>
+          <a:prstGeom prst="rect">
+            <a:avLst/>
+          </a:prstGeom>
+          <a:noFill/>
+          <a:ln w="28575">
+            <a:solidFill>
+              <a:srgbClr val="C00000"/>
+            </a:solidFill>
+          </a:ln>
+        </p:spPr>
+        <p:style>
+          <a:lnRef idx="2">
+            <a:schemeClr val="accent1">
+              <a:shade val="15000"/>
+            </a:schemeClr>
+          </a:lnRef>
+          <a:fillRef idx="1">
+            <a:schemeClr val="accent1"/>
+          </a:fillRef>
+          <a:effectRef idx="0">
+            <a:schemeClr val="accent1"/>
+          </a:effectRef>
+          <a:fontRef idx="minor">
+            <a:schemeClr val="lt1"/>
+          </a:fontRef>
+        </p:style>
+        <p:txBody>
+          <a:bodyPr rtlCol="0" anchor="ctr"/>
+          <a:lstStyle/>
+          <a:p>
+            <a:pPr algn="ctr"/>
+            <a:endParaRPr kumimoji="1" lang="ja-JP" altLang="en-US"/>
+          </a:p>
+        </p:txBody>
+      </p:sp>
+      <p:sp>
+        <p:nvSpPr>
+          <p:cNvPr id="25" name="正方形/長方形 24">
+            <a:extLst>
+              <a:ext uri="{FF2B5EF4-FFF2-40B4-BE49-F238E27FC236}">
+                <a16:creationId xmlns:a16="http://schemas.microsoft.com/office/drawing/2014/main" id="{CB7E262E-73EE-F933-DCE8-462BEF4539F2}"/>
+              </a:ext>
+            </a:extLst>
+          </p:cNvPr>
+          <p:cNvSpPr/>
+          <p:nvPr/>
+        </p:nvSpPr>
+        <p:spPr>
+          <a:xfrm>
+            <a:off x="838200" y="2934475"/>
+            <a:ext cx="921247" cy="681935"/>
+          </a:xfrm>
+          <a:prstGeom prst="rect">
+            <a:avLst/>
+          </a:prstGeom>
+          <a:noFill/>
+          <a:ln w="28575">
+            <a:solidFill>
+              <a:srgbClr val="C00000"/>
+            </a:solidFill>
+          </a:ln>
+        </p:spPr>
+        <p:style>
+          <a:lnRef idx="2">
+            <a:schemeClr val="accent1">
+              <a:shade val="15000"/>
+            </a:schemeClr>
+          </a:lnRef>
+          <a:fillRef idx="1">
+            <a:schemeClr val="accent1"/>
+          </a:fillRef>
+          <a:effectRef idx="0">
+            <a:schemeClr val="accent1"/>
+          </a:effectRef>
+          <a:fontRef idx="minor">
+            <a:schemeClr val="lt1"/>
+          </a:fontRef>
+        </p:style>
+        <p:txBody>
+          <a:bodyPr rtlCol="0" anchor="ctr"/>
+          <a:lstStyle/>
+          <a:p>
+            <a:pPr algn="ctr"/>
+            <a:endParaRPr kumimoji="1" lang="ja-JP" altLang="en-US"/>
+          </a:p>
+        </p:txBody>
+      </p:sp>
+      <p:sp>
+        <p:nvSpPr>
+          <p:cNvPr id="26" name="正方形/長方形 25">
+            <a:extLst>
+              <a:ext uri="{FF2B5EF4-FFF2-40B4-BE49-F238E27FC236}">
+                <a16:creationId xmlns:a16="http://schemas.microsoft.com/office/drawing/2014/main" id="{B96F3C14-88CA-102D-B982-FD546C6BCD5E}"/>
+              </a:ext>
+            </a:extLst>
+          </p:cNvPr>
+          <p:cNvSpPr/>
+          <p:nvPr/>
+        </p:nvSpPr>
+        <p:spPr>
+          <a:xfrm>
+            <a:off x="2698748" y="4246195"/>
+            <a:ext cx="1548478" cy="693843"/>
+          </a:xfrm>
+          <a:prstGeom prst="rect">
+            <a:avLst/>
+          </a:prstGeom>
+          <a:noFill/>
+          <a:ln w="28575">
+            <a:solidFill>
+              <a:srgbClr val="C00000"/>
+            </a:solidFill>
+          </a:ln>
+        </p:spPr>
+        <p:style>
+          <a:lnRef idx="2">
+            <a:schemeClr val="accent1">
+              <a:shade val="15000"/>
+            </a:schemeClr>
+          </a:lnRef>
+          <a:fillRef idx="1">
+            <a:schemeClr val="accent1"/>
+          </a:fillRef>
+          <a:effectRef idx="0">
+            <a:schemeClr val="accent1"/>
+          </a:effectRef>
+          <a:fontRef idx="minor">
+            <a:schemeClr val="lt1"/>
+          </a:fontRef>
+        </p:style>
+        <p:txBody>
+          <a:bodyPr rtlCol="0" anchor="ctr"/>
+          <a:lstStyle/>
+          <a:p>
+            <a:pPr algn="ctr"/>
+            <a:endParaRPr kumimoji="1" lang="ja-JP" altLang="en-US"/>
+          </a:p>
+        </p:txBody>
+      </p:sp>
+      <p:sp>
+        <p:nvSpPr>
+          <p:cNvPr id="27" name="正方形/長方形 26">
+            <a:extLst>
+              <a:ext uri="{FF2B5EF4-FFF2-40B4-BE49-F238E27FC236}">
+                <a16:creationId xmlns:a16="http://schemas.microsoft.com/office/drawing/2014/main" id="{9468F205-210F-2DBF-F0E6-19EDFE5652E0}"/>
+              </a:ext>
+            </a:extLst>
+          </p:cNvPr>
+          <p:cNvSpPr/>
+          <p:nvPr/>
+        </p:nvSpPr>
+        <p:spPr>
+          <a:xfrm>
+            <a:off x="2706151" y="4943558"/>
+            <a:ext cx="1541178" cy="674038"/>
+          </a:xfrm>
+          <a:prstGeom prst="rect">
+            <a:avLst/>
+          </a:prstGeom>
+          <a:noFill/>
+          <a:ln w="28575">
+            <a:solidFill>
+              <a:srgbClr val="C00000"/>
+            </a:solidFill>
+          </a:ln>
+        </p:spPr>
+        <p:style>
+          <a:lnRef idx="2">
+            <a:schemeClr val="accent1">
+              <a:shade val="15000"/>
+            </a:schemeClr>
+          </a:lnRef>
+          <a:fillRef idx="1">
+            <a:schemeClr val="accent1"/>
+          </a:fillRef>
+          <a:effectRef idx="0">
+            <a:schemeClr val="accent1"/>
+          </a:effectRef>
+          <a:fontRef idx="minor">
+            <a:schemeClr val="lt1"/>
+          </a:fontRef>
+        </p:style>
+        <p:txBody>
+          <a:bodyPr rtlCol="0" anchor="ctr"/>
+          <a:lstStyle/>
+          <a:p>
+            <a:pPr algn="ctr"/>
+            <a:endParaRPr kumimoji="1" lang="ja-JP" altLang="en-US"/>
+          </a:p>
+        </p:txBody>
+      </p:sp>
+      <p:sp>
+        <p:nvSpPr>
+          <p:cNvPr id="28" name="正方形/長方形 27">
+            <a:extLst>
+              <a:ext uri="{FF2B5EF4-FFF2-40B4-BE49-F238E27FC236}">
+                <a16:creationId xmlns:a16="http://schemas.microsoft.com/office/drawing/2014/main" id="{5E6669EE-C668-BAB5-78FC-819F80D7B8A0}"/>
+              </a:ext>
+            </a:extLst>
+          </p:cNvPr>
+          <p:cNvSpPr/>
+          <p:nvPr/>
+        </p:nvSpPr>
+        <p:spPr>
+          <a:xfrm>
+            <a:off x="4247226" y="4951891"/>
+            <a:ext cx="1461912" cy="674039"/>
+          </a:xfrm>
+          <a:prstGeom prst="rect">
+            <a:avLst/>
+          </a:prstGeom>
+          <a:noFill/>
+          <a:ln w="28575">
+            <a:solidFill>
+              <a:srgbClr val="C00000"/>
+            </a:solidFill>
+          </a:ln>
+        </p:spPr>
+        <p:style>
+          <a:lnRef idx="2">
+            <a:schemeClr val="accent1">
+              <a:shade val="15000"/>
+            </a:schemeClr>
+          </a:lnRef>
+          <a:fillRef idx="1">
+            <a:schemeClr val="accent1"/>
+          </a:fillRef>
+          <a:effectRef idx="0">
+            <a:schemeClr val="accent1"/>
+          </a:effectRef>
+          <a:fontRef idx="minor">
+            <a:schemeClr val="lt1"/>
+          </a:fontRef>
+        </p:style>
+        <p:txBody>
+          <a:bodyPr rtlCol="0" anchor="ctr"/>
+          <a:lstStyle/>
+          <a:p>
+            <a:pPr algn="ctr"/>
+            <a:endParaRPr kumimoji="1" lang="ja-JP" altLang="en-US"/>
+          </a:p>
+        </p:txBody>
+      </p:sp>
+      <p:sp>
+        <p:nvSpPr>
+          <p:cNvPr id="29" name="正方形/長方形 28">
+            <a:extLst>
+              <a:ext uri="{FF2B5EF4-FFF2-40B4-BE49-F238E27FC236}">
+                <a16:creationId xmlns:a16="http://schemas.microsoft.com/office/drawing/2014/main" id="{F47ABEC6-1C91-B51E-7299-435789735D51}"/>
+              </a:ext>
+            </a:extLst>
+          </p:cNvPr>
+          <p:cNvSpPr/>
+          <p:nvPr/>
+        </p:nvSpPr>
+        <p:spPr>
+          <a:xfrm>
+            <a:off x="4240522" y="4246195"/>
+            <a:ext cx="1468616" cy="705696"/>
+          </a:xfrm>
+          <a:prstGeom prst="rect">
+            <a:avLst/>
+          </a:prstGeom>
+          <a:noFill/>
+          <a:ln w="28575">
+            <a:solidFill>
+              <a:srgbClr val="C00000"/>
+            </a:solidFill>
+          </a:ln>
+        </p:spPr>
+        <p:style>
+          <a:lnRef idx="2">
+            <a:schemeClr val="accent1">
+              <a:shade val="15000"/>
+            </a:schemeClr>
+          </a:lnRef>
+          <a:fillRef idx="1">
+            <a:schemeClr val="accent1"/>
+          </a:fillRef>
+          <a:effectRef idx="0">
+            <a:schemeClr val="accent1"/>
+          </a:effectRef>
+          <a:fontRef idx="minor">
+            <a:schemeClr val="lt1"/>
+          </a:fontRef>
+        </p:style>
+        <p:txBody>
+          <a:bodyPr rtlCol="0" anchor="ctr"/>
+          <a:lstStyle/>
+          <a:p>
+            <a:pPr algn="ctr"/>
+            <a:endParaRPr kumimoji="1" lang="ja-JP" altLang="en-US"/>
+          </a:p>
+        </p:txBody>
+      </p:sp>
+      <p:sp>
+        <p:nvSpPr>
+          <p:cNvPr id="30" name="正方形/長方形 29">
+            <a:extLst>
+              <a:ext uri="{FF2B5EF4-FFF2-40B4-BE49-F238E27FC236}">
+                <a16:creationId xmlns:a16="http://schemas.microsoft.com/office/drawing/2014/main" id="{83D94432-C32E-DB76-23B3-9AF8C39FE419}"/>
+              </a:ext>
+            </a:extLst>
+          </p:cNvPr>
+          <p:cNvSpPr/>
+          <p:nvPr/>
+        </p:nvSpPr>
+        <p:spPr>
+          <a:xfrm>
+            <a:off x="8593566" y="2611804"/>
+            <a:ext cx="322671" cy="322671"/>
+          </a:xfrm>
+          <a:prstGeom prst="rect">
+            <a:avLst/>
+          </a:prstGeom>
+          <a:noFill/>
+          <a:ln w="28575">
+            <a:solidFill>
+              <a:srgbClr val="002060"/>
+            </a:solidFill>
+          </a:ln>
+        </p:spPr>
+        <p:style>
+          <a:lnRef idx="2">
+            <a:schemeClr val="accent1">
+              <a:shade val="15000"/>
+            </a:schemeClr>
+          </a:lnRef>
+          <a:fillRef idx="1">
+            <a:schemeClr val="accent1"/>
+          </a:fillRef>
+          <a:effectRef idx="0">
+            <a:schemeClr val="accent1"/>
+          </a:effectRef>
+          <a:fontRef idx="minor">
+            <a:schemeClr val="lt1"/>
+          </a:fontRef>
+        </p:style>
+        <p:txBody>
+          <a:bodyPr rtlCol="0" anchor="ctr"/>
+          <a:lstStyle/>
+          <a:p>
+            <a:pPr algn="ctr"/>
+            <a:endParaRPr kumimoji="1" lang="ja-JP" altLang="en-US"/>
+          </a:p>
+        </p:txBody>
+      </p:sp>
+      <p:sp>
+        <p:nvSpPr>
+          <p:cNvPr id="31" name="正方形/長方形 30">
+            <a:extLst>
+              <a:ext uri="{FF2B5EF4-FFF2-40B4-BE49-F238E27FC236}">
+                <a16:creationId xmlns:a16="http://schemas.microsoft.com/office/drawing/2014/main" id="{7EEF4C0F-05B2-2545-9CDF-D189A47DA8F4}"/>
+              </a:ext>
+            </a:extLst>
+          </p:cNvPr>
+          <p:cNvSpPr/>
+          <p:nvPr/>
+        </p:nvSpPr>
+        <p:spPr>
+          <a:xfrm>
+            <a:off x="9070552" y="2611803"/>
+            <a:ext cx="322671" cy="322671"/>
+          </a:xfrm>
+          <a:prstGeom prst="rect">
+            <a:avLst/>
+          </a:prstGeom>
+          <a:noFill/>
+          <a:ln w="28575">
+            <a:solidFill>
+              <a:srgbClr val="002060"/>
+            </a:solidFill>
+          </a:ln>
+        </p:spPr>
+        <p:style>
+          <a:lnRef idx="2">
+            <a:schemeClr val="accent1">
+              <a:shade val="15000"/>
+            </a:schemeClr>
+          </a:lnRef>
+          <a:fillRef idx="1">
+            <a:schemeClr val="accent1"/>
+          </a:fillRef>
+          <a:effectRef idx="0">
+            <a:schemeClr val="accent1"/>
+          </a:effectRef>
+          <a:fontRef idx="minor">
+            <a:schemeClr val="lt1"/>
+          </a:fontRef>
+        </p:style>
+        <p:txBody>
+          <a:bodyPr rtlCol="0" anchor="ctr"/>
+          <a:lstStyle/>
+          <a:p>
+            <a:pPr algn="ctr"/>
+            <a:endParaRPr kumimoji="1" lang="ja-JP" altLang="en-US"/>
+          </a:p>
+        </p:txBody>
+      </p:sp>
+      <p:sp>
+        <p:nvSpPr>
+          <p:cNvPr id="32" name="正方形/長方形 31">
+            <a:extLst>
+              <a:ext uri="{FF2B5EF4-FFF2-40B4-BE49-F238E27FC236}">
+                <a16:creationId xmlns:a16="http://schemas.microsoft.com/office/drawing/2014/main" id="{E7D59065-1671-55C4-4EA1-677B64476798}"/>
+              </a:ext>
+            </a:extLst>
+          </p:cNvPr>
+          <p:cNvSpPr/>
+          <p:nvPr/>
+        </p:nvSpPr>
+        <p:spPr>
+          <a:xfrm>
+            <a:off x="7927069" y="3235959"/>
+            <a:ext cx="322671" cy="322671"/>
+          </a:xfrm>
+          <a:prstGeom prst="rect">
+            <a:avLst/>
+          </a:prstGeom>
+          <a:noFill/>
+          <a:ln w="28575">
+            <a:solidFill>
+              <a:srgbClr val="002060"/>
+            </a:solidFill>
+          </a:ln>
+        </p:spPr>
+        <p:style>
+          <a:lnRef idx="2">
+            <a:schemeClr val="accent1">
+              <a:shade val="15000"/>
+            </a:schemeClr>
+          </a:lnRef>
+          <a:fillRef idx="1">
+            <a:schemeClr val="accent1"/>
+          </a:fillRef>
+          <a:effectRef idx="0">
+            <a:schemeClr val="accent1"/>
+          </a:effectRef>
+          <a:fontRef idx="minor">
+            <a:schemeClr val="lt1"/>
+          </a:fontRef>
+        </p:style>
+        <p:txBody>
+          <a:bodyPr rtlCol="0" anchor="ctr"/>
+          <a:lstStyle/>
+          <a:p>
+            <a:pPr algn="ctr"/>
+            <a:endParaRPr kumimoji="1" lang="ja-JP" altLang="en-US"/>
+          </a:p>
+        </p:txBody>
+      </p:sp>
+      <p:sp>
+        <p:nvSpPr>
+          <p:cNvPr id="33" name="正方形/長方形 32">
+            <a:extLst>
+              <a:ext uri="{FF2B5EF4-FFF2-40B4-BE49-F238E27FC236}">
+                <a16:creationId xmlns:a16="http://schemas.microsoft.com/office/drawing/2014/main" id="{015768E8-2A24-5CB3-2711-296D3354DFFF}"/>
+              </a:ext>
+            </a:extLst>
+          </p:cNvPr>
+          <p:cNvSpPr/>
+          <p:nvPr/>
+        </p:nvSpPr>
+        <p:spPr>
+          <a:xfrm>
+            <a:off x="7527241" y="3373056"/>
+            <a:ext cx="322671" cy="322671"/>
+          </a:xfrm>
+          <a:prstGeom prst="rect">
+            <a:avLst/>
+          </a:prstGeom>
+          <a:noFill/>
+          <a:ln w="28575">
+            <a:solidFill>
+              <a:srgbClr val="002060"/>
+            </a:solidFill>
+          </a:ln>
+        </p:spPr>
+        <p:style>
+          <a:lnRef idx="2">
+            <a:schemeClr val="accent1">
+              <a:shade val="15000"/>
+            </a:schemeClr>
+          </a:lnRef>
+          <a:fillRef idx="1">
+            <a:schemeClr val="accent1"/>
+          </a:fillRef>
+          <a:effectRef idx="0">
+            <a:schemeClr val="accent1"/>
+          </a:effectRef>
+          <a:fontRef idx="minor">
+            <a:schemeClr val="lt1"/>
+          </a:fontRef>
+        </p:style>
+        <p:txBody>
+          <a:bodyPr rtlCol="0" anchor="ctr"/>
+          <a:lstStyle/>
+          <a:p>
+            <a:pPr algn="ctr"/>
+            <a:endParaRPr kumimoji="1" lang="ja-JP" altLang="en-US"/>
+          </a:p>
+        </p:txBody>
+      </p:sp>
+      <p:sp>
+        <p:nvSpPr>
+          <p:cNvPr id="6" name="スライド番号プレースホルダー 5">
+            <a:extLst>
+              <a:ext uri="{FF2B5EF4-FFF2-40B4-BE49-F238E27FC236}">
+                <a16:creationId xmlns:a16="http://schemas.microsoft.com/office/drawing/2014/main" id="{74FC3882-AB3A-297B-8FA7-E9673D8CF394}"/>
+              </a:ext>
+            </a:extLst>
+          </p:cNvPr>
+          <p:cNvSpPr>
+            <a:spLocks noGrp="1"/>
+          </p:cNvSpPr>
+          <p:nvPr>
+            <p:ph type="sldNum" sz="quarter" idx="12"/>
+          </p:nvPr>
+        </p:nvSpPr>
+        <p:spPr/>
+        <p:txBody>
+          <a:bodyPr/>
+          <a:lstStyle/>
+          <a:p>
+            <a:fld id="{EA2F3317-65BA-D746-98B8-3038158C8C28}" type="slidenum">
+              <a:rPr kumimoji="1" lang="ja-JP" altLang="en-US" smtClean="0"/>
+              <a:t>3</a:t>
+            </a:fld>
+            <a:endParaRPr kumimoji="1" lang="ja-JP" altLang="en-US"/>
+          </a:p>
+        </p:txBody>
+      </p:sp>
+    </p:spTree>
+    <p:extLst>
+      <p:ext uri="{BB962C8B-B14F-4D97-AF65-F5344CB8AC3E}">
+        <p14:creationId xmlns:p14="http://schemas.microsoft.com/office/powerpoint/2010/main" val="3075136653"/>
+      </p:ext>
+    </p:extLst>
+  </p:cSld>
+  <p:clrMapOvr>
+    <a:masterClrMapping/>
+  </p:clrMapOvr>
+</p:sld>
+</file>
+
+<file path=ppt/slides/slide4.xml><?xml version="1.0" encoding="utf-8"?>
+<p:sld xmlns:a="http://schemas.openxmlformats.org/drawingml/2006/main" xmlns:r="http://schemas.openxmlformats.org/officeDocument/2006/relationships" xmlns:p="http://schemas.openxmlformats.org/presentationml/2006/main">
+  <p:cSld>
+    <p:spTree>
+      <p:nvGrpSpPr>
         <p:cNvPr id="1" name=""/>
         <p:cNvGrpSpPr/>
         <p:nvPr/>
@@ -22886,7 +27175,7 @@
         <p:spPr/>
         <p:txBody>
           <a:bodyPr>
-            <a:normAutofit lnSpcReduction="10000"/>
+            <a:normAutofit fontScale="92500" lnSpcReduction="10000"/>
           </a:bodyPr>
           <a:lstStyle/>
           <a:p>
@@ -22909,6 +27198,10 @@
             <a:endParaRPr lang="en-US" altLang="ja-JP" dirty="0"/>
           </a:p>
           <a:p>
+            <a:pPr marL="914400" lvl="1" indent="-457200">
+              <a:buFont typeface="+mj-lt"/>
+              <a:buAutoNum type="arabicPeriod"/>
+            </a:pPr>
             <a:r>
               <a:rPr kumimoji="1" lang="ja-JP" altLang="en-US"/>
               <a:t>並列実行可能なゲートを同じレイヤに配置</a:t>
@@ -22916,9 +27209,67 @@
             <a:endParaRPr kumimoji="1" lang="en-US" altLang="ja-JP" dirty="0"/>
           </a:p>
           <a:p>
+            <a:pPr marL="914400" lvl="1" indent="-457200">
+              <a:buFont typeface="+mj-lt"/>
+              <a:buAutoNum type="arabicPeriod"/>
+            </a:pPr>
+            <a:r>
+              <a:rPr lang="ja-JP" altLang="en-US"/>
+              <a:t>同一レイヤ上のゲート群をまとめ、一つの</a:t>
+            </a:r>
+            <a:r>
+              <a:rPr lang="en-US" altLang="ja-JP" dirty="0"/>
+              <a:t>QMDD</a:t>
+            </a:r>
+            <a:r>
+              <a:rPr lang="ja-JP" altLang="en-US"/>
+              <a:t>を生成（</a:t>
+            </a:r>
+            <a:r>
+              <a:rPr lang="ja-JP" altLang="en-US">
+                <a:solidFill>
+                  <a:srgbClr val="FF0000"/>
+                </a:solidFill>
+              </a:rPr>
+              <a:t>ゲート連結</a:t>
+            </a:r>
+            <a:r>
+              <a:rPr lang="ja-JP" altLang="en-US"/>
+              <a:t>）</a:t>
+            </a:r>
             <a:endParaRPr lang="en-US" altLang="ja-JP" dirty="0"/>
           </a:p>
           <a:p>
+            <a:pPr marL="914400" lvl="1" indent="-457200">
+              <a:buFont typeface="+mj-lt"/>
+              <a:buAutoNum type="arabicPeriod"/>
+            </a:pPr>
+            <a:r>
+              <a:rPr kumimoji="1" lang="ja-JP" altLang="en-US"/>
+              <a:t>量子状態との積をとり、</a:t>
+            </a:r>
+            <a:r>
+              <a:rPr kumimoji="1" lang="en-US" altLang="ja-JP" dirty="0"/>
+              <a:t> 1</a:t>
+            </a:r>
+            <a:r>
+              <a:rPr kumimoji="1" lang="ja-JP" altLang="en-US"/>
+              <a:t>ステップで</a:t>
+            </a:r>
+            <a:r>
+              <a:rPr kumimoji="1" lang="en-US" altLang="ja-JP" dirty="0"/>
+              <a:t>1</a:t>
+            </a:r>
+            <a:r>
+              <a:rPr kumimoji="1" lang="ja-JP" altLang="en-US"/>
+              <a:t>レイヤ分のゲートを適用</a:t>
+            </a:r>
+            <a:endParaRPr kumimoji="1" lang="en-US" altLang="ja-JP" dirty="0"/>
+          </a:p>
+          <a:p>
+            <a:pPr marL="0" indent="0">
+              <a:buNone/>
+            </a:pPr>
             <a:endParaRPr kumimoji="1" lang="en-US" altLang="ja-JP" dirty="0"/>
           </a:p>
           <a:p>
@@ -22967,12 +27318,41 @@
           </a:p>
         </p:txBody>
       </p:sp>
+      <p:sp>
+        <p:nvSpPr>
+          <p:cNvPr id="6" name="スライド番号プレースホルダー 5">
+            <a:extLst>
+              <a:ext uri="{FF2B5EF4-FFF2-40B4-BE49-F238E27FC236}">
+                <a16:creationId xmlns:a16="http://schemas.microsoft.com/office/drawing/2014/main" id="{898D01EF-45CA-5DA5-4BFC-A71407CFD82E}"/>
+              </a:ext>
+            </a:extLst>
+          </p:cNvPr>
+          <p:cNvSpPr>
+            <a:spLocks noGrp="1"/>
+          </p:cNvSpPr>
+          <p:nvPr>
+            <p:ph type="sldNum" sz="quarter" idx="12"/>
+          </p:nvPr>
+        </p:nvSpPr>
+        <p:spPr/>
+        <p:txBody>
+          <a:bodyPr/>
+          <a:lstStyle/>
+          <a:p>
+            <a:fld id="{B7DD3F26-AD0F-FC47-9ED8-571159D68F9B}" type="slidenum">
+              <a:rPr kumimoji="1" lang="ja-JP" altLang="en-US" smtClean="0"/>
+              <a:t>4</a:t>
+            </a:fld>
+            <a:endParaRPr kumimoji="1" lang="ja-JP" altLang="en-US"/>
+          </a:p>
+        </p:txBody>
+      </p:sp>
       <p:pic>
         <p:nvPicPr>
-          <p:cNvPr id="4" name="図 3" descr="ダイアグラム&#10;&#10;自動的に生成された説明">
+          <p:cNvPr id="9" name="図 8" descr="時計 が含まれている画像&#10;&#10;自動的に生成された説明">
             <a:extLst>
               <a:ext uri="{FF2B5EF4-FFF2-40B4-BE49-F238E27FC236}">
-                <a16:creationId xmlns:a16="http://schemas.microsoft.com/office/drawing/2014/main" id="{B68AE4E2-045C-BA80-365B-94EFBE0C0102}"/>
+                <a16:creationId xmlns:a16="http://schemas.microsoft.com/office/drawing/2014/main" id="{E86EE5C6-48FC-E8F0-222A-2A196F9DB426}"/>
               </a:ext>
             </a:extLst>
           </p:cNvPr>
@@ -22982,28 +27362,237 @@
           <p:nvPr/>
         </p:nvPicPr>
         <p:blipFill>
-          <a:blip r:embed="rId2"/>
-          <a:srcRect l="7111" t="2306" r="6362" b="8296"/>
-          <a:stretch/>
+          <a:blip r:embed="rId3"/>
+          <a:stretch>
+            <a:fillRect/>
+          </a:stretch>
         </p:blipFill>
         <p:spPr>
           <a:xfrm>
-            <a:off x="1696761" y="2932531"/>
-            <a:ext cx="1461978" cy="1493874"/>
+            <a:off x="4298950" y="3460532"/>
+            <a:ext cx="3594100" cy="1409700"/>
           </a:xfrm>
           <a:prstGeom prst="rect">
             <a:avLst/>
           </a:prstGeom>
         </p:spPr>
       </p:pic>
-      <mc:AlternateContent xmlns:mc="http://schemas.openxmlformats.org/markup-compatibility/2006">
-        <mc:Choice xmlns:a14="http://schemas.microsoft.com/office/drawing/2010/main" Requires="a14">
+      <p:sp>
+        <p:nvSpPr>
+          <p:cNvPr id="10" name="正方形/長方形 9">
+            <a:extLst>
+              <a:ext uri="{FF2B5EF4-FFF2-40B4-BE49-F238E27FC236}">
+                <a16:creationId xmlns:a16="http://schemas.microsoft.com/office/drawing/2014/main" id="{31EE4351-3A43-D043-84CE-654142CF2C54}"/>
+              </a:ext>
+            </a:extLst>
+          </p:cNvPr>
+          <p:cNvSpPr/>
+          <p:nvPr/>
+        </p:nvSpPr>
+        <p:spPr>
+          <a:xfrm>
+            <a:off x="5037719" y="3481535"/>
+            <a:ext cx="454361" cy="1346042"/>
+          </a:xfrm>
+          <a:prstGeom prst="rect">
+            <a:avLst/>
+          </a:prstGeom>
+          <a:noFill/>
+          <a:ln w="28575">
+            <a:solidFill>
+              <a:srgbClr val="002060"/>
+            </a:solidFill>
+          </a:ln>
+        </p:spPr>
+        <p:style>
+          <a:lnRef idx="2">
+            <a:schemeClr val="accent1">
+              <a:shade val="15000"/>
+            </a:schemeClr>
+          </a:lnRef>
+          <a:fillRef idx="1">
+            <a:schemeClr val="accent1"/>
+          </a:fillRef>
+          <a:effectRef idx="0">
+            <a:schemeClr val="accent1"/>
+          </a:effectRef>
+          <a:fontRef idx="minor">
+            <a:schemeClr val="lt1"/>
+          </a:fontRef>
+        </p:style>
+        <p:txBody>
+          <a:bodyPr rtlCol="0" anchor="ctr"/>
+          <a:lstStyle/>
+          <a:p>
+            <a:pPr algn="ctr"/>
+            <a:endParaRPr kumimoji="1" lang="ja-JP" altLang="en-US"/>
+          </a:p>
+        </p:txBody>
+      </p:sp>
+      <p:sp>
+        <p:nvSpPr>
+          <p:cNvPr id="11" name="正方形/長方形 10">
+            <a:extLst>
+              <a:ext uri="{FF2B5EF4-FFF2-40B4-BE49-F238E27FC236}">
+                <a16:creationId xmlns:a16="http://schemas.microsoft.com/office/drawing/2014/main" id="{4655E4C8-553F-5A10-F981-17D15FE2B543}"/>
+              </a:ext>
+            </a:extLst>
+          </p:cNvPr>
+          <p:cNvSpPr/>
+          <p:nvPr/>
+        </p:nvSpPr>
+        <p:spPr>
+          <a:xfrm>
+            <a:off x="5647319" y="3481535"/>
+            <a:ext cx="454361" cy="1346042"/>
+          </a:xfrm>
+          <a:prstGeom prst="rect">
+            <a:avLst/>
+          </a:prstGeom>
+          <a:noFill/>
+          <a:ln w="28575">
+            <a:solidFill>
+              <a:srgbClr val="002060"/>
+            </a:solidFill>
+          </a:ln>
+        </p:spPr>
+        <p:style>
+          <a:lnRef idx="2">
+            <a:schemeClr val="accent1">
+              <a:shade val="15000"/>
+            </a:schemeClr>
+          </a:lnRef>
+          <a:fillRef idx="1">
+            <a:schemeClr val="accent1"/>
+          </a:fillRef>
+          <a:effectRef idx="0">
+            <a:schemeClr val="accent1"/>
+          </a:effectRef>
+          <a:fontRef idx="minor">
+            <a:schemeClr val="lt1"/>
+          </a:fontRef>
+        </p:style>
+        <p:txBody>
+          <a:bodyPr rtlCol="0" anchor="ctr"/>
+          <a:lstStyle/>
+          <a:p>
+            <a:pPr algn="ctr"/>
+            <a:endParaRPr kumimoji="1" lang="ja-JP" altLang="en-US"/>
+          </a:p>
+        </p:txBody>
+      </p:sp>
+      <p:sp>
+        <p:nvSpPr>
+          <p:cNvPr id="12" name="正方形/長方形 11">
+            <a:extLst>
+              <a:ext uri="{FF2B5EF4-FFF2-40B4-BE49-F238E27FC236}">
+                <a16:creationId xmlns:a16="http://schemas.microsoft.com/office/drawing/2014/main" id="{6C207DB9-8111-D500-8ADB-F9B7111C4C82}"/>
+              </a:ext>
+            </a:extLst>
+          </p:cNvPr>
+          <p:cNvSpPr/>
+          <p:nvPr/>
+        </p:nvSpPr>
+        <p:spPr>
+          <a:xfrm>
+            <a:off x="6273959" y="3480445"/>
+            <a:ext cx="454361" cy="1346042"/>
+          </a:xfrm>
+          <a:prstGeom prst="rect">
+            <a:avLst/>
+          </a:prstGeom>
+          <a:noFill/>
+          <a:ln w="28575">
+            <a:solidFill>
+              <a:srgbClr val="002060"/>
+            </a:solidFill>
+          </a:ln>
+        </p:spPr>
+        <p:style>
+          <a:lnRef idx="2">
+            <a:schemeClr val="accent1">
+              <a:shade val="15000"/>
+            </a:schemeClr>
+          </a:lnRef>
+          <a:fillRef idx="1">
+            <a:schemeClr val="accent1"/>
+          </a:fillRef>
+          <a:effectRef idx="0">
+            <a:schemeClr val="accent1"/>
+          </a:effectRef>
+          <a:fontRef idx="minor">
+            <a:schemeClr val="lt1"/>
+          </a:fontRef>
+        </p:style>
+        <p:txBody>
+          <a:bodyPr rtlCol="0" anchor="ctr"/>
+          <a:lstStyle/>
+          <a:p>
+            <a:pPr algn="ctr"/>
+            <a:endParaRPr kumimoji="1" lang="ja-JP" altLang="en-US"/>
+          </a:p>
+        </p:txBody>
+      </p:sp>
+      <p:sp>
+        <p:nvSpPr>
+          <p:cNvPr id="13" name="正方形/長方形 12">
+            <a:extLst>
+              <a:ext uri="{FF2B5EF4-FFF2-40B4-BE49-F238E27FC236}">
+                <a16:creationId xmlns:a16="http://schemas.microsoft.com/office/drawing/2014/main" id="{C75A7778-4F1C-1FAC-C4F4-49D6613D0714}"/>
+              </a:ext>
+            </a:extLst>
+          </p:cNvPr>
+          <p:cNvSpPr/>
+          <p:nvPr/>
+        </p:nvSpPr>
+        <p:spPr>
+          <a:xfrm>
+            <a:off x="6900599" y="3480445"/>
+            <a:ext cx="454361" cy="870054"/>
+          </a:xfrm>
+          <a:prstGeom prst="rect">
+            <a:avLst/>
+          </a:prstGeom>
+          <a:noFill/>
+          <a:ln w="28575">
+            <a:solidFill>
+              <a:srgbClr val="002060"/>
+            </a:solidFill>
+          </a:ln>
+        </p:spPr>
+        <p:style>
+          <a:lnRef idx="2">
+            <a:schemeClr val="accent1">
+              <a:shade val="15000"/>
+            </a:schemeClr>
+          </a:lnRef>
+          <a:fillRef idx="1">
+            <a:schemeClr val="accent1"/>
+          </a:fillRef>
+          <a:effectRef idx="0">
+            <a:schemeClr val="accent1"/>
+          </a:effectRef>
+          <a:fontRef idx="minor">
+            <a:schemeClr val="lt1"/>
+          </a:fontRef>
+        </p:style>
+        <p:txBody>
+          <a:bodyPr rtlCol="0" anchor="ctr"/>
+          <a:lstStyle/>
+          <a:p>
+            <a:pPr algn="ctr"/>
+            <a:endParaRPr kumimoji="1" lang="ja-JP" altLang="en-US"/>
+          </a:p>
+        </p:txBody>
+      </p:sp>
+      <mc:AlternateContent xmlns:mc="http://schemas.openxmlformats.org/markup-compatibility/2006" xmlns:a14="http://schemas.microsoft.com/office/drawing/2010/main">
+        <mc:Choice Requires="a14">
           <p:sp>
             <p:nvSpPr>
-              <p:cNvPr id="5" name="テキスト ボックス 4">
+              <p:cNvPr id="14" name="テキスト ボックス 13">
                 <a:extLst>
                   <a:ext uri="{FF2B5EF4-FFF2-40B4-BE49-F238E27FC236}">
-                    <a16:creationId xmlns:a16="http://schemas.microsoft.com/office/drawing/2014/main" id="{4F1ABDD4-B3F4-6614-ABDD-C1A81B8E76ED}"/>
+                    <a16:creationId xmlns:a16="http://schemas.microsoft.com/office/drawing/2014/main" id="{64697C0C-08B7-1B6F-2157-9F3DD2731DD9}"/>
                   </a:ext>
                 </a:extLst>
               </p:cNvPr>
@@ -23012,8 +27601,8 @@
             </p:nvSpPr>
             <p:spPr>
               <a:xfrm>
-                <a:off x="2478730" y="3494802"/>
-                <a:ext cx="2835713" cy="369332"/>
+                <a:off x="7749984" y="4685566"/>
+                <a:ext cx="1112164" cy="369332"/>
               </a:xfrm>
               <a:prstGeom prst="rect">
                 <a:avLst/>
@@ -23021,7 +27610,7 @@
               <a:noFill/>
             </p:spPr>
             <p:txBody>
-              <a:bodyPr wrap="square" lIns="0" tIns="0" rIns="0" bIns="0" rtlCol="0">
+              <a:bodyPr wrap="none" rtlCol="0">
                 <a:spAutoFit/>
               </a:bodyPr>
               <a:lstStyle/>
@@ -23034,55 +27623,54 @@
                     </m:oMathParaPr>
                     <m:oMath xmlns:m="http://schemas.openxmlformats.org/officeDocument/2006/math">
                       <m:r>
-                        <a:rPr lang="en-US" altLang="ja-JP" sz="2400" b="0" i="1" smtClean="0">
+                        <a:rPr kumimoji="1" lang="en-US" altLang="ja-JP" b="0" i="1" smtClean="0">
+                          <a:latin typeface="Cambria Math" panose="02040503050406030204" pitchFamily="18" charset="0"/>
+                        </a:rPr>
+                        <m:t>𝑉</m:t>
+                      </m:r>
+                      <m:r>
+                        <a:rPr kumimoji="1" lang="en-US" altLang="ja-JP" b="0" i="1" smtClean="0">
+                          <a:latin typeface="Cambria Math" panose="02040503050406030204" pitchFamily="18" charset="0"/>
+                          <a:ea typeface="Cambria Math" panose="02040503050406030204" pitchFamily="18" charset="0"/>
+                        </a:rPr>
+                        <m:t>⨂</m:t>
+                      </m:r>
+                      <m:r>
+                        <a:rPr kumimoji="1" lang="en-US" altLang="ja-JP" b="0" i="1" smtClean="0">
                           <a:latin typeface="Cambria Math" panose="02040503050406030204" pitchFamily="18" charset="0"/>
                           <a:ea typeface="Cambria Math" panose="02040503050406030204" pitchFamily="18" charset="0"/>
                         </a:rPr>
                         <m:t>𝑋</m:t>
                       </m:r>
                       <m:r>
-                        <a:rPr lang="en-US" altLang="ja-JP" sz="2400" i="1">
+                        <a:rPr lang="en-US" altLang="ja-JP" i="1">
                           <a:latin typeface="Cambria Math" panose="02040503050406030204" pitchFamily="18" charset="0"/>
                           <a:ea typeface="Cambria Math" panose="02040503050406030204" pitchFamily="18" charset="0"/>
                         </a:rPr>
                         <m:t>⨂</m:t>
                       </m:r>
                       <m:r>
-                        <a:rPr lang="en-US" altLang="ja-JP" sz="2400" b="0" i="1" smtClean="0">
+                        <a:rPr lang="en-US" altLang="ja-JP" b="0" i="1" smtClean="0">
                           <a:latin typeface="Cambria Math" panose="02040503050406030204" pitchFamily="18" charset="0"/>
                           <a:ea typeface="Cambria Math" panose="02040503050406030204" pitchFamily="18" charset="0"/>
                         </a:rPr>
-                        <m:t>𝑌</m:t>
-                      </m:r>
-                      <m:r>
-                        <a:rPr kumimoji="1" lang="en-US" altLang="ja-JP" sz="2400" i="1" smtClean="0">
-                          <a:latin typeface="Cambria Math" panose="02040503050406030204" pitchFamily="18" charset="0"/>
-                          <a:ea typeface="Cambria Math" panose="02040503050406030204" pitchFamily="18" charset="0"/>
-                        </a:rPr>
-                        <m:t>⨂</m:t>
-                      </m:r>
-                      <m:r>
-                        <a:rPr kumimoji="1" lang="en-US" altLang="ja-JP" sz="2400" b="0" i="1" smtClean="0">
-                          <a:latin typeface="Cambria Math" panose="02040503050406030204" pitchFamily="18" charset="0"/>
-                          <a:ea typeface="Cambria Math" panose="02040503050406030204" pitchFamily="18" charset="0"/>
-                        </a:rPr>
-                        <m:t>𝑍</m:t>
+                        <m:t>𝑋</m:t>
                       </m:r>
                     </m:oMath>
                   </m:oMathPara>
                 </a14:m>
-                <a:endParaRPr kumimoji="1" lang="ja-JP" altLang="en-US" sz="2400"/>
+                <a:endParaRPr kumimoji="1" lang="ja-JP" altLang="en-US"/>
               </a:p>
             </p:txBody>
           </p:sp>
         </mc:Choice>
-        <mc:Fallback>
+        <mc:Fallback xmlns="">
           <p:sp>
             <p:nvSpPr>
-              <p:cNvPr id="5" name="テキスト ボックス 4">
+              <p:cNvPr id="14" name="テキスト ボックス 13">
                 <a:extLst>
                   <a:ext uri="{FF2B5EF4-FFF2-40B4-BE49-F238E27FC236}">
-                    <a16:creationId xmlns:a16="http://schemas.microsoft.com/office/drawing/2014/main" id="{4F1ABDD4-B3F4-6614-ABDD-C1A81B8E76ED}"/>
+                    <a16:creationId xmlns:a16="http://schemas.microsoft.com/office/drawing/2014/main" id="{64697C0C-08B7-1B6F-2157-9F3DD2731DD9}"/>
                   </a:ext>
                 </a:extLst>
               </p:cNvPr>
@@ -23093,16 +27681,16 @@
             </p:nvSpPr>
             <p:spPr>
               <a:xfrm>
-                <a:off x="2478730" y="3494802"/>
-                <a:ext cx="2835713" cy="369332"/>
+                <a:off x="7749984" y="4685566"/>
+                <a:ext cx="1112164" cy="369332"/>
               </a:xfrm>
               <a:prstGeom prst="rect">
                 <a:avLst/>
               </a:prstGeom>
               <a:blipFill>
-                <a:blip r:embed="rId3"/>
+                <a:blip r:embed="rId5"/>
                 <a:stretch>
-                  <a:fillRect b="-13333"/>
+                  <a:fillRect b="-3448"/>
                 </a:stretch>
               </a:blipFill>
             </p:spPr>
@@ -23121,6 +27709,527 @@
           </p:sp>
         </mc:Fallback>
       </mc:AlternateContent>
+      <p:cxnSp>
+        <p:nvCxnSpPr>
+          <p:cNvPr id="16" name="直線矢印コネクタ 15">
+            <a:extLst>
+              <a:ext uri="{FF2B5EF4-FFF2-40B4-BE49-F238E27FC236}">
+                <a16:creationId xmlns:a16="http://schemas.microsoft.com/office/drawing/2014/main" id="{B1A4A651-A013-67EA-DE58-1903AB380676}"/>
+              </a:ext>
+            </a:extLst>
+          </p:cNvPr>
+          <p:cNvCxnSpPr>
+            <a:stCxn id="12" idx="2"/>
+            <a:endCxn id="14" idx="1"/>
+          </p:cNvCxnSpPr>
+          <p:nvPr/>
+        </p:nvCxnSpPr>
+        <p:spPr>
+          <a:xfrm>
+            <a:off x="6501140" y="4826487"/>
+            <a:ext cx="1248844" cy="43745"/>
+          </a:xfrm>
+          <a:prstGeom prst="straightConnector1">
+            <a:avLst/>
+          </a:prstGeom>
+          <a:ln>
+            <a:tailEnd type="triangle"/>
+          </a:ln>
+        </p:spPr>
+        <p:style>
+          <a:lnRef idx="2">
+            <a:schemeClr val="accent1"/>
+          </a:lnRef>
+          <a:fillRef idx="0">
+            <a:schemeClr val="accent1"/>
+          </a:fillRef>
+          <a:effectRef idx="1">
+            <a:schemeClr val="accent1"/>
+          </a:effectRef>
+          <a:fontRef idx="minor">
+            <a:schemeClr val="tx1"/>
+          </a:fontRef>
+        </p:style>
+      </p:cxnSp>
+      <mc:AlternateContent xmlns:mc="http://schemas.openxmlformats.org/markup-compatibility/2006" xmlns:a14="http://schemas.microsoft.com/office/drawing/2010/main">
+        <mc:Choice Requires="a14">
+          <p:sp>
+            <p:nvSpPr>
+              <p:cNvPr id="17" name="テキスト ボックス 16">
+                <a:extLst>
+                  <a:ext uri="{FF2B5EF4-FFF2-40B4-BE49-F238E27FC236}">
+                    <a16:creationId xmlns:a16="http://schemas.microsoft.com/office/drawing/2014/main" id="{0D740CA8-B3C9-D95A-F6D2-47F8F768A3A8}"/>
+                  </a:ext>
+                </a:extLst>
+              </p:cNvPr>
+              <p:cNvSpPr txBox="1"/>
+              <p:nvPr/>
+            </p:nvSpPr>
+            <p:spPr>
+              <a:xfrm>
+                <a:off x="7831490" y="3194169"/>
+                <a:ext cx="757067" cy="369332"/>
+              </a:xfrm>
+              <a:prstGeom prst="rect">
+                <a:avLst/>
+              </a:prstGeom>
+              <a:noFill/>
+            </p:spPr>
+            <p:txBody>
+              <a:bodyPr wrap="none" rtlCol="0">
+                <a:spAutoFit/>
+              </a:bodyPr>
+              <a:lstStyle/>
+              <a:p>
+                <a:pPr/>
+                <a14:m>
+                  <m:oMathPara xmlns:m="http://schemas.openxmlformats.org/officeDocument/2006/math">
+                    <m:oMathParaPr>
+                      <m:jc m:val="centerGroup"/>
+                    </m:oMathParaPr>
+                    <m:oMath xmlns:m="http://schemas.openxmlformats.org/officeDocument/2006/math">
+                      <m:r>
+                        <a:rPr kumimoji="1" lang="en-US" altLang="ja-JP" b="0" i="1" smtClean="0">
+                          <a:latin typeface="Cambria Math" panose="02040503050406030204" pitchFamily="18" charset="0"/>
+                          <a:ea typeface="Cambria Math" panose="02040503050406030204" pitchFamily="18" charset="0"/>
+                        </a:rPr>
+                        <m:t>𝑋</m:t>
+                      </m:r>
+                      <m:r>
+                        <a:rPr kumimoji="1" lang="en-US" altLang="ja-JP" b="0" i="1" smtClean="0">
+                          <a:latin typeface="Cambria Math" panose="02040503050406030204" pitchFamily="18" charset="0"/>
+                          <a:ea typeface="Cambria Math" panose="02040503050406030204" pitchFamily="18" charset="0"/>
+                        </a:rPr>
+                        <m:t>⨂</m:t>
+                      </m:r>
+                      <m:r>
+                        <a:rPr kumimoji="1" lang="en-US" altLang="ja-JP" b="0" i="1" smtClean="0">
+                          <a:latin typeface="Cambria Math" panose="02040503050406030204" pitchFamily="18" charset="0"/>
+                          <a:ea typeface="Cambria Math" panose="02040503050406030204" pitchFamily="18" charset="0"/>
+                        </a:rPr>
+                        <m:t>𝑉</m:t>
+                      </m:r>
+                    </m:oMath>
+                  </m:oMathPara>
+                </a14:m>
+                <a:endParaRPr kumimoji="1" lang="ja-JP" altLang="en-US"/>
+              </a:p>
+            </p:txBody>
+          </p:sp>
+        </mc:Choice>
+        <mc:Fallback xmlns="">
+          <p:sp>
+            <p:nvSpPr>
+              <p:cNvPr id="17" name="テキスト ボックス 16">
+                <a:extLst>
+                  <a:ext uri="{FF2B5EF4-FFF2-40B4-BE49-F238E27FC236}">
+                    <a16:creationId xmlns:a16="http://schemas.microsoft.com/office/drawing/2014/main" id="{0D740CA8-B3C9-D95A-F6D2-47F8F768A3A8}"/>
+                  </a:ext>
+                </a:extLst>
+              </p:cNvPr>
+              <p:cNvSpPr txBox="1">
+                <a:spLocks noRot="1" noChangeAspect="1" noMove="1" noResize="1" noEditPoints="1" noAdjustHandles="1" noChangeArrowheads="1" noChangeShapeType="1" noTextEdit="1"/>
+              </p:cNvSpPr>
+              <p:nvPr/>
+            </p:nvSpPr>
+            <p:spPr>
+              <a:xfrm>
+                <a:off x="7831490" y="3194169"/>
+                <a:ext cx="757067" cy="369332"/>
+              </a:xfrm>
+              <a:prstGeom prst="rect">
+                <a:avLst/>
+              </a:prstGeom>
+              <a:blipFill>
+                <a:blip r:embed="rId6"/>
+                <a:stretch>
+                  <a:fillRect b="-3333"/>
+                </a:stretch>
+              </a:blipFill>
+            </p:spPr>
+            <p:txBody>
+              <a:bodyPr/>
+              <a:lstStyle/>
+              <a:p>
+                <a:r>
+                  <a:rPr lang="ja-JP" altLang="en-US">
+                    <a:noFill/>
+                  </a:rPr>
+                  <a:t> </a:t>
+                </a:r>
+              </a:p>
+            </p:txBody>
+          </p:sp>
+        </mc:Fallback>
+      </mc:AlternateContent>
+      <p:cxnSp>
+        <p:nvCxnSpPr>
+          <p:cNvPr id="18" name="直線矢印コネクタ 17">
+            <a:extLst>
+              <a:ext uri="{FF2B5EF4-FFF2-40B4-BE49-F238E27FC236}">
+                <a16:creationId xmlns:a16="http://schemas.microsoft.com/office/drawing/2014/main" id="{735BAB4F-B221-67F0-881D-DCFF239FE732}"/>
+              </a:ext>
+            </a:extLst>
+          </p:cNvPr>
+          <p:cNvCxnSpPr>
+            <a:cxnSpLocks/>
+            <a:stCxn id="13" idx="0"/>
+            <a:endCxn id="17" idx="1"/>
+          </p:cNvCxnSpPr>
+          <p:nvPr/>
+        </p:nvCxnSpPr>
+        <p:spPr>
+          <a:xfrm flipV="1">
+            <a:off x="7127780" y="3378835"/>
+            <a:ext cx="703710" cy="101610"/>
+          </a:xfrm>
+          <a:prstGeom prst="straightConnector1">
+            <a:avLst/>
+          </a:prstGeom>
+          <a:ln>
+            <a:tailEnd type="triangle"/>
+          </a:ln>
+        </p:spPr>
+        <p:style>
+          <a:lnRef idx="2">
+            <a:schemeClr val="accent1"/>
+          </a:lnRef>
+          <a:fillRef idx="0">
+            <a:schemeClr val="accent1"/>
+          </a:fillRef>
+          <a:effectRef idx="1">
+            <a:schemeClr val="accent1"/>
+          </a:effectRef>
+          <a:fontRef idx="minor">
+            <a:schemeClr val="tx1"/>
+          </a:fontRef>
+        </p:style>
+      </p:cxnSp>
+      <mc:AlternateContent xmlns:mc="http://schemas.openxmlformats.org/markup-compatibility/2006" xmlns:a14="http://schemas.microsoft.com/office/drawing/2010/main">
+        <mc:Choice Requires="a14">
+          <p:sp>
+            <p:nvSpPr>
+              <p:cNvPr id="22" name="テキスト ボックス 21">
+                <a:extLst>
+                  <a:ext uri="{FF2B5EF4-FFF2-40B4-BE49-F238E27FC236}">
+                    <a16:creationId xmlns:a16="http://schemas.microsoft.com/office/drawing/2014/main" id="{C2F0089C-64AD-8CDD-3FB5-F2051A91EF8E}"/>
+                  </a:ext>
+                </a:extLst>
+              </p:cNvPr>
+              <p:cNvSpPr txBox="1"/>
+              <p:nvPr/>
+            </p:nvSpPr>
+            <p:spPr>
+              <a:xfrm>
+                <a:off x="2852936" y="4685566"/>
+                <a:ext cx="1112356" cy="369332"/>
+              </a:xfrm>
+              <a:prstGeom prst="rect">
+                <a:avLst/>
+              </a:prstGeom>
+              <a:noFill/>
+            </p:spPr>
+            <p:txBody>
+              <a:bodyPr wrap="none" rtlCol="0">
+                <a:spAutoFit/>
+              </a:bodyPr>
+              <a:lstStyle/>
+              <a:p>
+                <a:pPr/>
+                <a14:m>
+                  <m:oMathPara xmlns:m="http://schemas.openxmlformats.org/officeDocument/2006/math">
+                    <m:oMathParaPr>
+                      <m:jc m:val="centerGroup"/>
+                    </m:oMathParaPr>
+                    <m:oMath xmlns:m="http://schemas.openxmlformats.org/officeDocument/2006/math">
+                      <m:r>
+                        <a:rPr kumimoji="1" lang="en-US" altLang="ja-JP" b="0" i="1" smtClean="0">
+                          <a:latin typeface="Cambria Math" panose="02040503050406030204" pitchFamily="18" charset="0"/>
+                          <a:ea typeface="Cambria Math" panose="02040503050406030204" pitchFamily="18" charset="0"/>
+                        </a:rPr>
+                        <m:t>𝑋</m:t>
+                      </m:r>
+                      <m:r>
+                        <a:rPr kumimoji="1" lang="en-US" altLang="ja-JP" b="0" i="1" smtClean="0">
+                          <a:latin typeface="Cambria Math" panose="02040503050406030204" pitchFamily="18" charset="0"/>
+                          <a:ea typeface="Cambria Math" panose="02040503050406030204" pitchFamily="18" charset="0"/>
+                        </a:rPr>
+                        <m:t>⨂</m:t>
+                      </m:r>
+                      <m:r>
+                        <a:rPr kumimoji="1" lang="en-US" altLang="ja-JP" b="0" i="1" smtClean="0">
+                          <a:latin typeface="Cambria Math" panose="02040503050406030204" pitchFamily="18" charset="0"/>
+                          <a:ea typeface="Cambria Math" panose="02040503050406030204" pitchFamily="18" charset="0"/>
+                        </a:rPr>
+                        <m:t>𝐻</m:t>
+                      </m:r>
+                      <m:r>
+                        <a:rPr lang="en-US" altLang="ja-JP" i="1">
+                          <a:latin typeface="Cambria Math" panose="02040503050406030204" pitchFamily="18" charset="0"/>
+                          <a:ea typeface="Cambria Math" panose="02040503050406030204" pitchFamily="18" charset="0"/>
+                        </a:rPr>
+                        <m:t>⨂</m:t>
+                      </m:r>
+                      <m:r>
+                        <m:rPr>
+                          <m:sty m:val="p"/>
+                        </m:rPr>
+                        <a:rPr lang="en-US" altLang="ja-JP" b="0" i="0" smtClean="0">
+                          <a:latin typeface="Cambria Math" panose="02040503050406030204" pitchFamily="18" charset="0"/>
+                          <a:ea typeface="Cambria Math" panose="02040503050406030204" pitchFamily="18" charset="0"/>
+                        </a:rPr>
+                        <m:t>X</m:t>
+                      </m:r>
+                    </m:oMath>
+                  </m:oMathPara>
+                </a14:m>
+                <a:endParaRPr kumimoji="1" lang="ja-JP" altLang="en-US"/>
+              </a:p>
+            </p:txBody>
+          </p:sp>
+        </mc:Choice>
+        <mc:Fallback xmlns="">
+          <p:sp>
+            <p:nvSpPr>
+              <p:cNvPr id="22" name="テキスト ボックス 21">
+                <a:extLst>
+                  <a:ext uri="{FF2B5EF4-FFF2-40B4-BE49-F238E27FC236}">
+                    <a16:creationId xmlns:a16="http://schemas.microsoft.com/office/drawing/2014/main" id="{C2F0089C-64AD-8CDD-3FB5-F2051A91EF8E}"/>
+                  </a:ext>
+                </a:extLst>
+              </p:cNvPr>
+              <p:cNvSpPr txBox="1">
+                <a:spLocks noRot="1" noChangeAspect="1" noMove="1" noResize="1" noEditPoints="1" noAdjustHandles="1" noChangeArrowheads="1" noChangeShapeType="1" noTextEdit="1"/>
+              </p:cNvSpPr>
+              <p:nvPr/>
+            </p:nvSpPr>
+            <p:spPr>
+              <a:xfrm>
+                <a:off x="2852936" y="4685566"/>
+                <a:ext cx="1112356" cy="369332"/>
+              </a:xfrm>
+              <a:prstGeom prst="rect">
+                <a:avLst/>
+              </a:prstGeom>
+              <a:blipFill>
+                <a:blip r:embed="rId7"/>
+                <a:stretch>
+                  <a:fillRect b="-3448"/>
+                </a:stretch>
+              </a:blipFill>
+            </p:spPr>
+            <p:txBody>
+              <a:bodyPr/>
+              <a:lstStyle/>
+              <a:p>
+                <a:r>
+                  <a:rPr lang="ja-JP" altLang="en-US">
+                    <a:noFill/>
+                  </a:rPr>
+                  <a:t> </a:t>
+                </a:r>
+              </a:p>
+            </p:txBody>
+          </p:sp>
+        </mc:Fallback>
+      </mc:AlternateContent>
+      <p:cxnSp>
+        <p:nvCxnSpPr>
+          <p:cNvPr id="24" name="直線矢印コネクタ 23">
+            <a:extLst>
+              <a:ext uri="{FF2B5EF4-FFF2-40B4-BE49-F238E27FC236}">
+                <a16:creationId xmlns:a16="http://schemas.microsoft.com/office/drawing/2014/main" id="{85B2171E-117C-B56A-E125-8FE9BAB10D35}"/>
+              </a:ext>
+            </a:extLst>
+          </p:cNvPr>
+          <p:cNvCxnSpPr>
+            <a:cxnSpLocks/>
+            <a:stCxn id="10" idx="2"/>
+            <a:endCxn id="22" idx="3"/>
+          </p:cNvCxnSpPr>
+          <p:nvPr/>
+        </p:nvCxnSpPr>
+        <p:spPr>
+          <a:xfrm flipH="1">
+            <a:off x="3965292" y="4827577"/>
+            <a:ext cx="1299608" cy="42655"/>
+          </a:xfrm>
+          <a:prstGeom prst="straightConnector1">
+            <a:avLst/>
+          </a:prstGeom>
+          <a:ln>
+            <a:tailEnd type="triangle"/>
+          </a:ln>
+        </p:spPr>
+        <p:style>
+          <a:lnRef idx="2">
+            <a:schemeClr val="accent1"/>
+          </a:lnRef>
+          <a:fillRef idx="0">
+            <a:schemeClr val="accent1"/>
+          </a:fillRef>
+          <a:effectRef idx="1">
+            <a:schemeClr val="accent1"/>
+          </a:effectRef>
+          <a:fontRef idx="minor">
+            <a:schemeClr val="tx1"/>
+          </a:fontRef>
+        </p:style>
+      </p:cxnSp>
+      <mc:AlternateContent xmlns:mc="http://schemas.openxmlformats.org/markup-compatibility/2006" xmlns:a14="http://schemas.microsoft.com/office/drawing/2010/main">
+        <mc:Choice Requires="a14">
+          <p:sp>
+            <p:nvSpPr>
+              <p:cNvPr id="28" name="テキスト ボックス 27">
+                <a:extLst>
+                  <a:ext uri="{FF2B5EF4-FFF2-40B4-BE49-F238E27FC236}">
+                    <a16:creationId xmlns:a16="http://schemas.microsoft.com/office/drawing/2014/main" id="{EBD8CE27-F93B-9243-4B8F-23737FCA1FCE}"/>
+                  </a:ext>
+                </a:extLst>
+              </p:cNvPr>
+              <p:cNvSpPr txBox="1"/>
+              <p:nvPr/>
+            </p:nvSpPr>
+            <p:spPr>
+              <a:xfrm>
+                <a:off x="2643453" y="3194169"/>
+                <a:ext cx="886268" cy="369332"/>
+              </a:xfrm>
+              <a:prstGeom prst="rect">
+                <a:avLst/>
+              </a:prstGeom>
+              <a:noFill/>
+            </p:spPr>
+            <p:txBody>
+              <a:bodyPr wrap="none" rtlCol="0">
+                <a:spAutoFit/>
+              </a:bodyPr>
+              <a:lstStyle/>
+              <a:p>
+                <a:pPr/>
+                <a14:m>
+                  <m:oMathPara xmlns:m="http://schemas.openxmlformats.org/officeDocument/2006/math">
+                    <m:oMathParaPr>
+                      <m:jc m:val="centerGroup"/>
+                    </m:oMathParaPr>
+                    <m:oMath xmlns:m="http://schemas.openxmlformats.org/officeDocument/2006/math">
+                      <m:r>
+                        <a:rPr kumimoji="1" lang="en-US" altLang="ja-JP" b="0" i="1" smtClean="0">
+                          <a:latin typeface="Cambria Math" panose="02040503050406030204" pitchFamily="18" charset="0"/>
+                          <a:ea typeface="Cambria Math" panose="02040503050406030204" pitchFamily="18" charset="0"/>
+                        </a:rPr>
+                        <m:t>𝐶𝑋</m:t>
+                      </m:r>
+                      <m:r>
+                        <a:rPr lang="en-US" altLang="ja-JP" i="1">
+                          <a:latin typeface="Cambria Math" panose="02040503050406030204" pitchFamily="18" charset="0"/>
+                          <a:ea typeface="Cambria Math" panose="02040503050406030204" pitchFamily="18" charset="0"/>
+                        </a:rPr>
+                        <m:t>⨂</m:t>
+                      </m:r>
+                      <m:r>
+                        <a:rPr lang="en-US" altLang="ja-JP" b="0" i="1" smtClean="0">
+                          <a:latin typeface="Cambria Math" panose="02040503050406030204" pitchFamily="18" charset="0"/>
+                          <a:ea typeface="Cambria Math" panose="02040503050406030204" pitchFamily="18" charset="0"/>
+                        </a:rPr>
+                        <m:t>𝑇</m:t>
+                      </m:r>
+                    </m:oMath>
+                  </m:oMathPara>
+                </a14:m>
+                <a:endParaRPr kumimoji="1" lang="ja-JP" altLang="en-US"/>
+              </a:p>
+            </p:txBody>
+          </p:sp>
+        </mc:Choice>
+        <mc:Fallback xmlns="">
+          <p:sp>
+            <p:nvSpPr>
+              <p:cNvPr id="28" name="テキスト ボックス 27">
+                <a:extLst>
+                  <a:ext uri="{FF2B5EF4-FFF2-40B4-BE49-F238E27FC236}">
+                    <a16:creationId xmlns:a16="http://schemas.microsoft.com/office/drawing/2014/main" id="{EBD8CE27-F93B-9243-4B8F-23737FCA1FCE}"/>
+                  </a:ext>
+                </a:extLst>
+              </p:cNvPr>
+              <p:cNvSpPr txBox="1">
+                <a:spLocks noRot="1" noChangeAspect="1" noMove="1" noResize="1" noEditPoints="1" noAdjustHandles="1" noChangeArrowheads="1" noChangeShapeType="1" noTextEdit="1"/>
+              </p:cNvSpPr>
+              <p:nvPr/>
+            </p:nvSpPr>
+            <p:spPr>
+              <a:xfrm>
+                <a:off x="2643453" y="3194169"/>
+                <a:ext cx="886268" cy="369332"/>
+              </a:xfrm>
+              <a:prstGeom prst="rect">
+                <a:avLst/>
+              </a:prstGeom>
+              <a:blipFill>
+                <a:blip r:embed="rId8"/>
+                <a:stretch>
+                  <a:fillRect b="-3333"/>
+                </a:stretch>
+              </a:blipFill>
+            </p:spPr>
+            <p:txBody>
+              <a:bodyPr/>
+              <a:lstStyle/>
+              <a:p>
+                <a:r>
+                  <a:rPr lang="ja-JP" altLang="en-US">
+                    <a:noFill/>
+                  </a:rPr>
+                  <a:t> </a:t>
+                </a:r>
+              </a:p>
+            </p:txBody>
+          </p:sp>
+        </mc:Fallback>
+      </mc:AlternateContent>
+      <p:cxnSp>
+        <p:nvCxnSpPr>
+          <p:cNvPr id="29" name="直線矢印コネクタ 28">
+            <a:extLst>
+              <a:ext uri="{FF2B5EF4-FFF2-40B4-BE49-F238E27FC236}">
+                <a16:creationId xmlns:a16="http://schemas.microsoft.com/office/drawing/2014/main" id="{F19FD2CC-4F7C-FE36-9997-831B28740DCF}"/>
+              </a:ext>
+            </a:extLst>
+          </p:cNvPr>
+          <p:cNvCxnSpPr>
+            <a:cxnSpLocks/>
+            <a:stCxn id="11" idx="0"/>
+            <a:endCxn id="28" idx="3"/>
+          </p:cNvCxnSpPr>
+          <p:nvPr/>
+        </p:nvCxnSpPr>
+        <p:spPr>
+          <a:xfrm flipH="1" flipV="1">
+            <a:off x="3529721" y="3378835"/>
+            <a:ext cx="2344779" cy="102700"/>
+          </a:xfrm>
+          <a:prstGeom prst="straightConnector1">
+            <a:avLst/>
+          </a:prstGeom>
+          <a:ln>
+            <a:tailEnd type="triangle"/>
+          </a:ln>
+        </p:spPr>
+        <p:style>
+          <a:lnRef idx="2">
+            <a:schemeClr val="accent1"/>
+          </a:lnRef>
+          <a:fillRef idx="0">
+            <a:schemeClr val="accent1"/>
+          </a:fillRef>
+          <a:effectRef idx="1">
+            <a:schemeClr val="accent1"/>
+          </a:effectRef>
+          <a:fontRef idx="minor">
+            <a:schemeClr val="tx1"/>
+          </a:fontRef>
+        </p:style>
+      </p:cxnSp>
     </p:spTree>
     <p:extLst>
       <p:ext uri="{BB962C8B-B14F-4D97-AF65-F5344CB8AC3E}">
@@ -23134,7 +28243,798 @@
 </p:sld>
 </file>
 
-<file path=ppt/slides/slide4.xml><?xml version="1.0" encoding="utf-8"?>
+<file path=ppt/slides/slide5.xml><?xml version="1.0" encoding="utf-8"?>
+<p:sld xmlns:a="http://schemas.openxmlformats.org/drawingml/2006/main" xmlns:r="http://schemas.openxmlformats.org/officeDocument/2006/relationships" xmlns:p="http://schemas.openxmlformats.org/presentationml/2006/main">
+  <p:cSld>
+    <p:spTree>
+      <p:nvGrpSpPr>
+        <p:cNvPr id="1" name=""/>
+        <p:cNvGrpSpPr/>
+        <p:nvPr/>
+      </p:nvGrpSpPr>
+      <p:grpSpPr>
+        <a:xfrm>
+          <a:off x="0" y="0"/>
+          <a:ext cx="0" cy="0"/>
+          <a:chOff x="0" y="0"/>
+          <a:chExt cx="0" cy="0"/>
+        </a:xfrm>
+      </p:grpSpPr>
+      <p:sp>
+        <p:nvSpPr>
+          <p:cNvPr id="2" name="タイトル 1">
+            <a:extLst>
+              <a:ext uri="{FF2B5EF4-FFF2-40B4-BE49-F238E27FC236}">
+                <a16:creationId xmlns:a16="http://schemas.microsoft.com/office/drawing/2014/main" id="{1465B21F-8EEA-3C6B-1A82-CAB687022476}"/>
+              </a:ext>
+            </a:extLst>
+          </p:cNvPr>
+          <p:cNvSpPr>
+            <a:spLocks noGrp="1"/>
+          </p:cNvSpPr>
+          <p:nvPr>
+            <p:ph type="title"/>
+          </p:nvPr>
+        </p:nvSpPr>
+        <p:spPr/>
+        <p:txBody>
+          <a:bodyPr/>
+          <a:lstStyle/>
+          <a:p>
+            <a:r>
+              <a:rPr kumimoji="1" lang="ja-JP" altLang="en-US"/>
+              <a:t>ゲート連結</a:t>
+            </a:r>
+          </a:p>
+        </p:txBody>
+      </p:sp>
+      <p:sp>
+        <p:nvSpPr>
+          <p:cNvPr id="3" name="コンテンツ プレースホルダー 2">
+            <a:extLst>
+              <a:ext uri="{FF2B5EF4-FFF2-40B4-BE49-F238E27FC236}">
+                <a16:creationId xmlns:a16="http://schemas.microsoft.com/office/drawing/2014/main" id="{6B961404-F359-2CA4-5A27-E87052788F01}"/>
+              </a:ext>
+            </a:extLst>
+          </p:cNvPr>
+          <p:cNvSpPr>
+            <a:spLocks noGrp="1"/>
+          </p:cNvSpPr>
+          <p:nvPr>
+            <p:ph idx="1"/>
+          </p:nvPr>
+        </p:nvSpPr>
+        <p:spPr/>
+        <p:txBody>
+          <a:bodyPr/>
+          <a:lstStyle/>
+          <a:p>
+            <a:r>
+              <a:rPr lang="ja-JP" altLang="en-US">
+                <a:solidFill>
+                  <a:srgbClr val="FF0000"/>
+                </a:solidFill>
+              </a:rPr>
+              <a:t>テンソル積</a:t>
+            </a:r>
+            <a:r>
+              <a:rPr lang="ja-JP" altLang="en-US"/>
+              <a:t>で実装</a:t>
+            </a:r>
+            <a:endParaRPr lang="en-US" altLang="ja-JP" dirty="0"/>
+          </a:p>
+          <a:p>
+            <a:pPr marL="0" indent="0">
+              <a:buNone/>
+            </a:pPr>
+            <a:endParaRPr kumimoji="1" lang="en-US" altLang="ja-JP" dirty="0"/>
+          </a:p>
+          <a:p>
+            <a:r>
+              <a:rPr kumimoji="1" lang="en-US" altLang="ja-JP" dirty="0"/>
+              <a:t>QMDD</a:t>
+            </a:r>
+            <a:r>
+              <a:rPr kumimoji="1" lang="ja-JP" altLang="en-US"/>
+              <a:t>では終端ノード</a:t>
+            </a:r>
+            <a:r>
+              <a:rPr lang="ja-JP" altLang="en-US"/>
+              <a:t>を始点ノードに置換する処理</a:t>
+            </a:r>
+            <a:endParaRPr lang="en-US" altLang="ja-JP" dirty="0"/>
+          </a:p>
+        </p:txBody>
+      </p:sp>
+      <p:sp>
+        <p:nvSpPr>
+          <p:cNvPr id="5" name="スライド番号プレースホルダー 4">
+            <a:extLst>
+              <a:ext uri="{FF2B5EF4-FFF2-40B4-BE49-F238E27FC236}">
+                <a16:creationId xmlns:a16="http://schemas.microsoft.com/office/drawing/2014/main" id="{DB0102C2-99C2-AD78-9C7C-B0B444E682BB}"/>
+              </a:ext>
+            </a:extLst>
+          </p:cNvPr>
+          <p:cNvSpPr>
+            <a:spLocks noGrp="1"/>
+          </p:cNvSpPr>
+          <p:nvPr>
+            <p:ph type="sldNum" sz="quarter" idx="12"/>
+          </p:nvPr>
+        </p:nvSpPr>
+        <p:spPr/>
+        <p:txBody>
+          <a:bodyPr/>
+          <a:lstStyle/>
+          <a:p>
+            <a:fld id="{EA2F3317-65BA-D746-98B8-3038158C8C28}" type="slidenum">
+              <a:rPr kumimoji="1" lang="ja-JP" altLang="en-US" smtClean="0"/>
+              <a:t>5</a:t>
+            </a:fld>
+            <a:endParaRPr kumimoji="1" lang="ja-JP" altLang="en-US"/>
+          </a:p>
+        </p:txBody>
+      </p:sp>
+      <p:pic>
+        <p:nvPicPr>
+          <p:cNvPr id="7" name="図 6" descr="時計 が含まれている画像&#10;&#10;自動的に生成された説明">
+            <a:extLst>
+              <a:ext uri="{FF2B5EF4-FFF2-40B4-BE49-F238E27FC236}">
+                <a16:creationId xmlns:a16="http://schemas.microsoft.com/office/drawing/2014/main" id="{F1461C18-BC33-C21A-9BD8-DC4B8E8D276F}"/>
+              </a:ext>
+            </a:extLst>
+          </p:cNvPr>
+          <p:cNvPicPr>
+            <a:picLocks noChangeAspect="1"/>
+          </p:cNvPicPr>
+          <p:nvPr/>
+        </p:nvPicPr>
+        <p:blipFill>
+          <a:blip r:embed="rId3"/>
+          <a:stretch>
+            <a:fillRect/>
+          </a:stretch>
+        </p:blipFill>
+        <p:spPr>
+          <a:xfrm>
+            <a:off x="0" y="3958393"/>
+            <a:ext cx="2649117" cy="1592624"/>
+          </a:xfrm>
+          <a:prstGeom prst="rect">
+            <a:avLst/>
+          </a:prstGeom>
+        </p:spPr>
+      </p:pic>
+      <p:pic>
+        <p:nvPicPr>
+          <p:cNvPr id="9" name="図 8" descr="アイコン が含まれている画像&#10;&#10;自動的に生成された説明">
+            <a:extLst>
+              <a:ext uri="{FF2B5EF4-FFF2-40B4-BE49-F238E27FC236}">
+                <a16:creationId xmlns:a16="http://schemas.microsoft.com/office/drawing/2014/main" id="{CBE72A4D-C8AF-0E05-73C5-59B3A191764E}"/>
+              </a:ext>
+            </a:extLst>
+          </p:cNvPr>
+          <p:cNvPicPr>
+            <a:picLocks noChangeAspect="1"/>
+          </p:cNvPicPr>
+          <p:nvPr/>
+        </p:nvPicPr>
+        <p:blipFill>
+          <a:blip r:embed="rId4"/>
+          <a:stretch>
+            <a:fillRect/>
+          </a:stretch>
+        </p:blipFill>
+        <p:spPr>
+          <a:xfrm>
+            <a:off x="4036529" y="3611232"/>
+            <a:ext cx="1507010" cy="3075709"/>
+          </a:xfrm>
+          <a:prstGeom prst="rect">
+            <a:avLst/>
+          </a:prstGeom>
+        </p:spPr>
+      </p:pic>
+      <p:pic>
+        <p:nvPicPr>
+          <p:cNvPr id="13" name="図 12" descr="アプリケーション が含まれている画像&#10;&#10;自動的に生成された説明">
+            <a:extLst>
+              <a:ext uri="{FF2B5EF4-FFF2-40B4-BE49-F238E27FC236}">
+                <a16:creationId xmlns:a16="http://schemas.microsoft.com/office/drawing/2014/main" id="{5A35DE30-714F-078E-D28E-4C4D925C0E3A}"/>
+              </a:ext>
+            </a:extLst>
+          </p:cNvPr>
+          <p:cNvPicPr>
+            <a:picLocks noChangeAspect="1"/>
+          </p:cNvPicPr>
+          <p:nvPr/>
+        </p:nvPicPr>
+        <p:blipFill>
+          <a:blip r:embed="rId5"/>
+          <a:stretch>
+            <a:fillRect/>
+          </a:stretch>
+        </p:blipFill>
+        <p:spPr>
+          <a:xfrm>
+            <a:off x="6648460" y="3611232"/>
+            <a:ext cx="1507010" cy="3075709"/>
+          </a:xfrm>
+          <a:prstGeom prst="rect">
+            <a:avLst/>
+          </a:prstGeom>
+        </p:spPr>
+      </p:pic>
+      <p:pic>
+        <p:nvPicPr>
+          <p:cNvPr id="15" name="図 14" descr="ボール, 時計, テーブル, 挿絵 が含まれている画像&#10;&#10;自動的に生成された説明">
+            <a:extLst>
+              <a:ext uri="{FF2B5EF4-FFF2-40B4-BE49-F238E27FC236}">
+                <a16:creationId xmlns:a16="http://schemas.microsoft.com/office/drawing/2014/main" id="{82166B8A-629E-F048-FEE9-F223447D3B90}"/>
+              </a:ext>
+            </a:extLst>
+          </p:cNvPr>
+          <p:cNvPicPr>
+            <a:picLocks noChangeAspect="1"/>
+          </p:cNvPicPr>
+          <p:nvPr/>
+        </p:nvPicPr>
+        <p:blipFill>
+          <a:blip r:embed="rId6"/>
+          <a:stretch>
+            <a:fillRect/>
+          </a:stretch>
+        </p:blipFill>
+        <p:spPr>
+          <a:xfrm>
+            <a:off x="9866940" y="989008"/>
+            <a:ext cx="1645856" cy="5322562"/>
+          </a:xfrm>
+          <a:prstGeom prst="rect">
+            <a:avLst/>
+          </a:prstGeom>
+        </p:spPr>
+      </p:pic>
+      <p:sp>
+        <p:nvSpPr>
+          <p:cNvPr id="16" name="右矢印 15">
+            <a:extLst>
+              <a:ext uri="{FF2B5EF4-FFF2-40B4-BE49-F238E27FC236}">
+                <a16:creationId xmlns:a16="http://schemas.microsoft.com/office/drawing/2014/main" id="{DE840419-6999-C66A-2C49-85420E51163C}"/>
+              </a:ext>
+            </a:extLst>
+          </p:cNvPr>
+          <p:cNvSpPr/>
+          <p:nvPr/>
+        </p:nvSpPr>
+        <p:spPr>
+          <a:xfrm>
+            <a:off x="2564849" y="4566658"/>
+            <a:ext cx="1287093" cy="376094"/>
+          </a:xfrm>
+          <a:prstGeom prst="rightArrow">
+            <a:avLst/>
+          </a:prstGeom>
+          <a:solidFill>
+            <a:srgbClr val="0070C0"/>
+          </a:solidFill>
+          <a:ln>
+            <a:solidFill>
+              <a:srgbClr val="0070C0"/>
+            </a:solidFill>
+          </a:ln>
+        </p:spPr>
+        <p:style>
+          <a:lnRef idx="2">
+            <a:schemeClr val="accent1">
+              <a:shade val="15000"/>
+            </a:schemeClr>
+          </a:lnRef>
+          <a:fillRef idx="1">
+            <a:schemeClr val="accent1"/>
+          </a:fillRef>
+          <a:effectRef idx="0">
+            <a:schemeClr val="accent1"/>
+          </a:effectRef>
+          <a:fontRef idx="minor">
+            <a:schemeClr val="lt1"/>
+          </a:fontRef>
+        </p:style>
+        <p:txBody>
+          <a:bodyPr rtlCol="0" anchor="ctr"/>
+          <a:lstStyle/>
+          <a:p>
+            <a:pPr algn="ctr"/>
+            <a:endParaRPr kumimoji="1" lang="ja-JP" altLang="en-US"/>
+          </a:p>
+        </p:txBody>
+      </p:sp>
+      <p:sp>
+        <p:nvSpPr>
+          <p:cNvPr id="17" name="右矢印 16">
+            <a:extLst>
+              <a:ext uri="{FF2B5EF4-FFF2-40B4-BE49-F238E27FC236}">
+                <a16:creationId xmlns:a16="http://schemas.microsoft.com/office/drawing/2014/main" id="{1F87A06B-55FC-5052-3926-12835C30BE8A}"/>
+              </a:ext>
+            </a:extLst>
+          </p:cNvPr>
+          <p:cNvSpPr/>
+          <p:nvPr/>
+        </p:nvSpPr>
+        <p:spPr>
+          <a:xfrm rot="20718136">
+            <a:off x="8334875" y="4409531"/>
+            <a:ext cx="1287093" cy="376094"/>
+          </a:xfrm>
+          <a:prstGeom prst="rightArrow">
+            <a:avLst/>
+          </a:prstGeom>
+          <a:solidFill>
+            <a:srgbClr val="0070C0"/>
+          </a:solidFill>
+          <a:ln>
+            <a:solidFill>
+              <a:srgbClr val="0070C0"/>
+            </a:solidFill>
+          </a:ln>
+        </p:spPr>
+        <p:style>
+          <a:lnRef idx="2">
+            <a:schemeClr val="accent1">
+              <a:shade val="15000"/>
+            </a:schemeClr>
+          </a:lnRef>
+          <a:fillRef idx="1">
+            <a:schemeClr val="accent1"/>
+          </a:fillRef>
+          <a:effectRef idx="0">
+            <a:schemeClr val="accent1"/>
+          </a:effectRef>
+          <a:fontRef idx="minor">
+            <a:schemeClr val="lt1"/>
+          </a:fontRef>
+        </p:style>
+        <p:txBody>
+          <a:bodyPr rtlCol="0" anchor="ctr"/>
+          <a:lstStyle/>
+          <a:p>
+            <a:pPr algn="ctr"/>
+            <a:endParaRPr kumimoji="1" lang="ja-JP" altLang="en-US"/>
+          </a:p>
+        </p:txBody>
+      </p:sp>
+      <mc:AlternateContent xmlns:mc="http://schemas.openxmlformats.org/markup-compatibility/2006" xmlns:a14="http://schemas.microsoft.com/office/drawing/2010/main">
+        <mc:Choice Requires="a14">
+          <p:sp>
+            <p:nvSpPr>
+              <p:cNvPr id="18" name="テキスト ボックス 17">
+                <a:extLst>
+                  <a:ext uri="{FF2B5EF4-FFF2-40B4-BE49-F238E27FC236}">
+                    <a16:creationId xmlns:a16="http://schemas.microsoft.com/office/drawing/2014/main" id="{B3C664A9-6E34-0287-F442-6D45D5FCA68B}"/>
+                  </a:ext>
+                </a:extLst>
+              </p:cNvPr>
+              <p:cNvSpPr txBox="1"/>
+              <p:nvPr/>
+            </p:nvSpPr>
+            <p:spPr>
+              <a:xfrm>
+                <a:off x="5829100" y="4477706"/>
+                <a:ext cx="533799" cy="553998"/>
+              </a:xfrm>
+              <a:prstGeom prst="rect">
+                <a:avLst/>
+              </a:prstGeom>
+              <a:noFill/>
+            </p:spPr>
+            <p:txBody>
+              <a:bodyPr wrap="none" lIns="0" tIns="0" rIns="0" bIns="0" rtlCol="0">
+                <a:spAutoFit/>
+              </a:bodyPr>
+              <a:lstStyle/>
+              <a:p>
+                <a:pPr/>
+                <a14:m>
+                  <m:oMathPara xmlns:m="http://schemas.openxmlformats.org/officeDocument/2006/math">
+                    <m:oMathParaPr>
+                      <m:jc m:val="centerGroup"/>
+                    </m:oMathParaPr>
+                    <m:oMath xmlns:m="http://schemas.openxmlformats.org/officeDocument/2006/math">
+                      <m:r>
+                        <a:rPr kumimoji="1" lang="ja-JP" altLang="en-US" sz="3600" i="1" smtClean="0">
+                          <a:latin typeface="Cambria Math" panose="02040503050406030204" pitchFamily="18" charset="0"/>
+                        </a:rPr>
+                        <m:t>⨂</m:t>
+                      </m:r>
+                    </m:oMath>
+                  </m:oMathPara>
+                </a14:m>
+                <a:endParaRPr kumimoji="1" lang="ja-JP" altLang="en-US" sz="3600"/>
+              </a:p>
+            </p:txBody>
+          </p:sp>
+        </mc:Choice>
+        <mc:Fallback xmlns="">
+          <p:sp>
+            <p:nvSpPr>
+              <p:cNvPr id="18" name="テキスト ボックス 17">
+                <a:extLst>
+                  <a:ext uri="{FF2B5EF4-FFF2-40B4-BE49-F238E27FC236}">
+                    <a16:creationId xmlns:a16="http://schemas.microsoft.com/office/drawing/2014/main" id="{B3C664A9-6E34-0287-F442-6D45D5FCA68B}"/>
+                  </a:ext>
+                </a:extLst>
+              </p:cNvPr>
+              <p:cNvSpPr txBox="1">
+                <a:spLocks noRot="1" noChangeAspect="1" noMove="1" noResize="1" noEditPoints="1" noAdjustHandles="1" noChangeArrowheads="1" noChangeShapeType="1" noTextEdit="1"/>
+              </p:cNvSpPr>
+              <p:nvPr/>
+            </p:nvSpPr>
+            <p:spPr>
+              <a:xfrm>
+                <a:off x="5829100" y="4477706"/>
+                <a:ext cx="533799" cy="553998"/>
+              </a:xfrm>
+              <a:prstGeom prst="rect">
+                <a:avLst/>
+              </a:prstGeom>
+              <a:blipFill>
+                <a:blip r:embed="rId7"/>
+                <a:stretch>
+                  <a:fillRect l="-18182" r="-18182" b="-15909"/>
+                </a:stretch>
+              </a:blipFill>
+            </p:spPr>
+            <p:txBody>
+              <a:bodyPr/>
+              <a:lstStyle/>
+              <a:p>
+                <a:r>
+                  <a:rPr lang="ja-JP" altLang="en-US">
+                    <a:noFill/>
+                  </a:rPr>
+                  <a:t> </a:t>
+                </a:r>
+              </a:p>
+            </p:txBody>
+          </p:sp>
+        </mc:Fallback>
+      </mc:AlternateContent>
+      <mc:AlternateContent xmlns:mc="http://schemas.openxmlformats.org/markup-compatibility/2006" xmlns:a14="http://schemas.microsoft.com/office/drawing/2010/main">
+        <mc:Choice Requires="a14">
+          <p:sp>
+            <p:nvSpPr>
+              <p:cNvPr id="19" name="テキスト ボックス 18">
+                <a:extLst>
+                  <a:ext uri="{FF2B5EF4-FFF2-40B4-BE49-F238E27FC236}">
+                    <a16:creationId xmlns:a16="http://schemas.microsoft.com/office/drawing/2014/main" id="{C8088E09-072A-6C13-5E96-3FD8F0FE43D4}"/>
+                  </a:ext>
+                </a:extLst>
+              </p:cNvPr>
+              <p:cNvSpPr txBox="1"/>
+              <p:nvPr/>
+            </p:nvSpPr>
+            <p:spPr>
+              <a:xfrm>
+                <a:off x="2811321" y="4289659"/>
+                <a:ext cx="595869" cy="276999"/>
+              </a:xfrm>
+              <a:prstGeom prst="rect">
+                <a:avLst/>
+              </a:prstGeom>
+              <a:noFill/>
+            </p:spPr>
+            <p:txBody>
+              <a:bodyPr wrap="none" lIns="0" tIns="0" rIns="0" bIns="0" rtlCol="0">
+                <a:spAutoFit/>
+              </a:bodyPr>
+              <a:lstStyle/>
+              <a:p>
+                <a:pPr/>
+                <a14:m>
+                  <m:oMathPara xmlns:m="http://schemas.openxmlformats.org/officeDocument/2006/math">
+                    <m:oMathParaPr>
+                      <m:jc m:val="centerGroup"/>
+                    </m:oMathParaPr>
+                    <m:oMath xmlns:m="http://schemas.openxmlformats.org/officeDocument/2006/math">
+                      <m:r>
+                        <a:rPr kumimoji="1" lang="en-US" altLang="ja-JP" b="0" i="1" smtClean="0">
+                          <a:latin typeface="Cambria Math" panose="02040503050406030204" pitchFamily="18" charset="0"/>
+                        </a:rPr>
+                        <m:t>𝐻</m:t>
+                      </m:r>
+                      <m:r>
+                        <a:rPr kumimoji="1" lang="en-US" altLang="ja-JP" b="0" i="1" smtClean="0">
+                          <a:latin typeface="Cambria Math" panose="02040503050406030204" pitchFamily="18" charset="0"/>
+                          <a:ea typeface="Cambria Math" panose="02040503050406030204" pitchFamily="18" charset="0"/>
+                        </a:rPr>
+                        <m:t>⨂</m:t>
+                      </m:r>
+                      <m:r>
+                        <a:rPr kumimoji="1" lang="en-US" altLang="ja-JP" b="0" i="1" smtClean="0">
+                          <a:latin typeface="Cambria Math" panose="02040503050406030204" pitchFamily="18" charset="0"/>
+                          <a:ea typeface="Cambria Math" panose="02040503050406030204" pitchFamily="18" charset="0"/>
+                        </a:rPr>
+                        <m:t>𝑋</m:t>
+                      </m:r>
+                    </m:oMath>
+                  </m:oMathPara>
+                </a14:m>
+                <a:endParaRPr kumimoji="1" lang="ja-JP" altLang="en-US"/>
+              </a:p>
+            </p:txBody>
+          </p:sp>
+        </mc:Choice>
+        <mc:Fallback xmlns="">
+          <p:sp>
+            <p:nvSpPr>
+              <p:cNvPr id="19" name="テキスト ボックス 18">
+                <a:extLst>
+                  <a:ext uri="{FF2B5EF4-FFF2-40B4-BE49-F238E27FC236}">
+                    <a16:creationId xmlns:a16="http://schemas.microsoft.com/office/drawing/2014/main" id="{C8088E09-072A-6C13-5E96-3FD8F0FE43D4}"/>
+                  </a:ext>
+                </a:extLst>
+              </p:cNvPr>
+              <p:cNvSpPr txBox="1">
+                <a:spLocks noRot="1" noChangeAspect="1" noMove="1" noResize="1" noEditPoints="1" noAdjustHandles="1" noChangeArrowheads="1" noChangeShapeType="1" noTextEdit="1"/>
+              </p:cNvSpPr>
+              <p:nvPr/>
+            </p:nvSpPr>
+            <p:spPr>
+              <a:xfrm>
+                <a:off x="2811321" y="4289659"/>
+                <a:ext cx="595869" cy="276999"/>
+              </a:xfrm>
+              <a:prstGeom prst="rect">
+                <a:avLst/>
+              </a:prstGeom>
+              <a:blipFill>
+                <a:blip r:embed="rId8"/>
+                <a:stretch>
+                  <a:fillRect l="-8333" r="-6250" b="-17391"/>
+                </a:stretch>
+              </a:blipFill>
+            </p:spPr>
+            <p:txBody>
+              <a:bodyPr/>
+              <a:lstStyle/>
+              <a:p>
+                <a:r>
+                  <a:rPr lang="ja-JP" altLang="en-US">
+                    <a:noFill/>
+                  </a:rPr>
+                  <a:t> </a:t>
+                </a:r>
+              </a:p>
+            </p:txBody>
+          </p:sp>
+        </mc:Fallback>
+      </mc:AlternateContent>
+      <p:sp>
+        <p:nvSpPr>
+          <p:cNvPr id="8" name="正方形/長方形 7">
+            <a:extLst>
+              <a:ext uri="{FF2B5EF4-FFF2-40B4-BE49-F238E27FC236}">
+                <a16:creationId xmlns:a16="http://schemas.microsoft.com/office/drawing/2014/main" id="{276218D0-C056-9770-F5B5-34A4DAE02948}"/>
+              </a:ext>
+            </a:extLst>
+          </p:cNvPr>
+          <p:cNvSpPr/>
+          <p:nvPr/>
+        </p:nvSpPr>
+        <p:spPr>
+          <a:xfrm>
+            <a:off x="3801455" y="3451790"/>
+            <a:ext cx="1977158" cy="3292475"/>
+          </a:xfrm>
+          <a:prstGeom prst="rect">
+            <a:avLst/>
+          </a:prstGeom>
+          <a:noFill/>
+          <a:ln w="28575">
+            <a:solidFill>
+              <a:srgbClr val="FF0000"/>
+            </a:solidFill>
+            <a:prstDash val="sysDot"/>
+          </a:ln>
+        </p:spPr>
+        <p:style>
+          <a:lnRef idx="2">
+            <a:schemeClr val="accent1">
+              <a:shade val="15000"/>
+            </a:schemeClr>
+          </a:lnRef>
+          <a:fillRef idx="1">
+            <a:schemeClr val="accent1"/>
+          </a:fillRef>
+          <a:effectRef idx="0">
+            <a:schemeClr val="accent1"/>
+          </a:effectRef>
+          <a:fontRef idx="minor">
+            <a:schemeClr val="lt1"/>
+          </a:fontRef>
+        </p:style>
+        <p:txBody>
+          <a:bodyPr rtlCol="0" anchor="ctr"/>
+          <a:lstStyle/>
+          <a:p>
+            <a:pPr algn="ctr"/>
+            <a:endParaRPr kumimoji="1" lang="ja-JP" altLang="en-US"/>
+          </a:p>
+        </p:txBody>
+      </p:sp>
+      <p:sp>
+        <p:nvSpPr>
+          <p:cNvPr id="10" name="正方形/長方形 9">
+            <a:extLst>
+              <a:ext uri="{FF2B5EF4-FFF2-40B4-BE49-F238E27FC236}">
+                <a16:creationId xmlns:a16="http://schemas.microsoft.com/office/drawing/2014/main" id="{021B3FB4-78C5-864D-E7FF-0148E16497DF}"/>
+              </a:ext>
+            </a:extLst>
+          </p:cNvPr>
+          <p:cNvSpPr/>
+          <p:nvPr/>
+        </p:nvSpPr>
+        <p:spPr>
+          <a:xfrm>
+            <a:off x="9743153" y="2194705"/>
+            <a:ext cx="1977158" cy="1944132"/>
+          </a:xfrm>
+          <a:prstGeom prst="rect">
+            <a:avLst/>
+          </a:prstGeom>
+          <a:noFill/>
+          <a:ln w="28575">
+            <a:solidFill>
+              <a:srgbClr val="FF0000"/>
+            </a:solidFill>
+            <a:prstDash val="sysDot"/>
+          </a:ln>
+        </p:spPr>
+        <p:style>
+          <a:lnRef idx="2">
+            <a:schemeClr val="accent1">
+              <a:shade val="15000"/>
+            </a:schemeClr>
+          </a:lnRef>
+          <a:fillRef idx="1">
+            <a:schemeClr val="accent1"/>
+          </a:fillRef>
+          <a:effectRef idx="0">
+            <a:schemeClr val="accent1"/>
+          </a:effectRef>
+          <a:fontRef idx="minor">
+            <a:schemeClr val="lt1"/>
+          </a:fontRef>
+        </p:style>
+        <p:txBody>
+          <a:bodyPr rtlCol="0" anchor="ctr"/>
+          <a:lstStyle/>
+          <a:p>
+            <a:pPr algn="ctr"/>
+            <a:endParaRPr kumimoji="1" lang="ja-JP" altLang="en-US"/>
+          </a:p>
+        </p:txBody>
+      </p:sp>
+      <p:sp>
+        <p:nvSpPr>
+          <p:cNvPr id="11" name="正方形/長方形 10">
+            <a:extLst>
+              <a:ext uri="{FF2B5EF4-FFF2-40B4-BE49-F238E27FC236}">
+                <a16:creationId xmlns:a16="http://schemas.microsoft.com/office/drawing/2014/main" id="{C8304653-552F-C69A-E826-1E0C63A96906}"/>
+              </a:ext>
+            </a:extLst>
+          </p:cNvPr>
+          <p:cNvSpPr/>
+          <p:nvPr/>
+        </p:nvSpPr>
+        <p:spPr>
+          <a:xfrm>
+            <a:off x="6409432" y="3451789"/>
+            <a:ext cx="1977158" cy="3292475"/>
+          </a:xfrm>
+          <a:prstGeom prst="rect">
+            <a:avLst/>
+          </a:prstGeom>
+          <a:noFill/>
+          <a:ln w="28575">
+            <a:solidFill>
+              <a:srgbClr val="0070C0"/>
+            </a:solidFill>
+            <a:prstDash val="sysDot"/>
+          </a:ln>
+        </p:spPr>
+        <p:style>
+          <a:lnRef idx="2">
+            <a:schemeClr val="accent1">
+              <a:shade val="15000"/>
+            </a:schemeClr>
+          </a:lnRef>
+          <a:fillRef idx="1">
+            <a:schemeClr val="accent1"/>
+          </a:fillRef>
+          <a:effectRef idx="0">
+            <a:schemeClr val="accent1"/>
+          </a:effectRef>
+          <a:fontRef idx="minor">
+            <a:schemeClr val="lt1"/>
+          </a:fontRef>
+        </p:style>
+        <p:txBody>
+          <a:bodyPr rtlCol="0" anchor="ctr"/>
+          <a:lstStyle/>
+          <a:p>
+            <a:pPr algn="ctr"/>
+            <a:endParaRPr kumimoji="1" lang="ja-JP" altLang="en-US"/>
+          </a:p>
+        </p:txBody>
+      </p:sp>
+      <p:sp>
+        <p:nvSpPr>
+          <p:cNvPr id="12" name="正方形/長方形 11">
+            <a:extLst>
+              <a:ext uri="{FF2B5EF4-FFF2-40B4-BE49-F238E27FC236}">
+                <a16:creationId xmlns:a16="http://schemas.microsoft.com/office/drawing/2014/main" id="{E313E3ED-C070-C5CE-0D23-76B4CB14CD51}"/>
+              </a:ext>
+            </a:extLst>
+          </p:cNvPr>
+          <p:cNvSpPr/>
+          <p:nvPr/>
+        </p:nvSpPr>
+        <p:spPr>
+          <a:xfrm>
+            <a:off x="9743153" y="4138838"/>
+            <a:ext cx="1977158" cy="1944132"/>
+          </a:xfrm>
+          <a:prstGeom prst="rect">
+            <a:avLst/>
+          </a:prstGeom>
+          <a:noFill/>
+          <a:ln w="28575">
+            <a:solidFill>
+              <a:srgbClr val="0070C0"/>
+            </a:solidFill>
+            <a:prstDash val="sysDot"/>
+          </a:ln>
+        </p:spPr>
+        <p:style>
+          <a:lnRef idx="2">
+            <a:schemeClr val="accent1">
+              <a:shade val="15000"/>
+            </a:schemeClr>
+          </a:lnRef>
+          <a:fillRef idx="1">
+            <a:schemeClr val="accent1"/>
+          </a:fillRef>
+          <a:effectRef idx="0">
+            <a:schemeClr val="accent1"/>
+          </a:effectRef>
+          <a:fontRef idx="minor">
+            <a:schemeClr val="lt1"/>
+          </a:fontRef>
+        </p:style>
+        <p:txBody>
+          <a:bodyPr rtlCol="0" anchor="ctr"/>
+          <a:lstStyle/>
+          <a:p>
+            <a:pPr algn="ctr"/>
+            <a:endParaRPr kumimoji="1" lang="ja-JP" altLang="en-US"/>
+          </a:p>
+        </p:txBody>
+      </p:sp>
+    </p:spTree>
+    <p:extLst>
+      <p:ext uri="{BB962C8B-B14F-4D97-AF65-F5344CB8AC3E}">
+        <p14:creationId xmlns:p14="http://schemas.microsoft.com/office/powerpoint/2010/main" val="2295305475"/>
+      </p:ext>
+    </p:extLst>
+  </p:cSld>
+  <p:clrMapOvr>
+    <a:masterClrMapping/>
+  </p:clrMapOvr>
+</p:sld>
+</file>
+
+<file path=ppt/slides/slide6.xml><?xml version="1.0" encoding="utf-8"?>
 <p:sld xmlns:a="http://schemas.openxmlformats.org/drawingml/2006/main" xmlns:r="http://schemas.openxmlformats.org/officeDocument/2006/relationships" xmlns:p="http://schemas.openxmlformats.org/presentationml/2006/main">
   <p:cSld>
     <p:spTree>
@@ -23187,8 +29087,8 @@
           </a:p>
         </p:txBody>
       </p:sp>
-      <mc:AlternateContent xmlns:mc="http://schemas.openxmlformats.org/markup-compatibility/2006">
-        <mc:Choice xmlns:a14="http://schemas.microsoft.com/office/drawing/2010/main" Requires="a14">
+      <mc:AlternateContent xmlns:mc="http://schemas.openxmlformats.org/markup-compatibility/2006" xmlns:a14="http://schemas.microsoft.com/office/drawing/2010/main">
+        <mc:Choice Requires="a14">
           <p:sp>
             <p:nvSpPr>
               <p:cNvPr id="3" name="テキスト プレースホルダー 2">
@@ -23228,7 +29128,7 @@
             </p:txBody>
           </p:sp>
         </mc:Choice>
-        <mc:Fallback>
+        <mc:Fallback xmlns="">
           <p:sp>
             <p:nvSpPr>
               <p:cNvPr id="3" name="テキスト プレースホルダー 2">
@@ -23247,7 +29147,7 @@
             </p:nvSpPr>
             <p:spPr>
               <a:blipFill>
-                <a:blip r:embed="rId2"/>
+                <a:blip r:embed="rId3"/>
                 <a:stretch>
                   <a:fillRect l="-246" b="-16667"/>
                 </a:stretch>
@@ -23268,8 +29168,8 @@
           </p:sp>
         </mc:Fallback>
       </mc:AlternateContent>
-      <mc:AlternateContent xmlns:mc="http://schemas.openxmlformats.org/markup-compatibility/2006">
-        <mc:Choice xmlns:a14="http://schemas.microsoft.com/office/drawing/2010/main" Requires="a14">
+      <mc:AlternateContent xmlns:mc="http://schemas.openxmlformats.org/markup-compatibility/2006" xmlns:a14="http://schemas.microsoft.com/office/drawing/2010/main">
+        <mc:Choice Requires="a14">
           <p:sp>
             <p:nvSpPr>
               <p:cNvPr id="4" name="コンテンツ プレースホルダー 3">
@@ -23421,7 +29321,7 @@
             </p:txBody>
           </p:sp>
         </mc:Choice>
-        <mc:Fallback>
+        <mc:Fallback xmlns="">
           <p:sp>
             <p:nvSpPr>
               <p:cNvPr id="4" name="コンテンツ プレースホルダー 3">
@@ -23440,7 +29340,7 @@
             </p:nvSpPr>
             <p:spPr>
               <a:blipFill>
-                <a:blip r:embed="rId3"/>
+                <a:blip r:embed="rId4"/>
                 <a:stretch>
                   <a:fillRect l="-2211" t="-2749"/>
                 </a:stretch>
@@ -23489,8 +29389,8 @@
           </a:p>
         </p:txBody>
       </p:sp>
-      <mc:AlternateContent xmlns:mc="http://schemas.openxmlformats.org/markup-compatibility/2006">
-        <mc:Choice xmlns:a14="http://schemas.microsoft.com/office/drawing/2010/main" Requires="a14">
+      <mc:AlternateContent xmlns:mc="http://schemas.openxmlformats.org/markup-compatibility/2006" xmlns:a14="http://schemas.microsoft.com/office/drawing/2010/main">
+        <mc:Choice Requires="a14">
           <p:sp>
             <p:nvSpPr>
               <p:cNvPr id="6" name="コンテンツ プレースホルダー 5">
@@ -23674,7 +29574,7 @@
             </p:txBody>
           </p:sp>
         </mc:Choice>
-        <mc:Fallback>
+        <mc:Fallback xmlns="">
           <p:sp>
             <p:nvSpPr>
               <p:cNvPr id="6" name="コンテンツ プレースホルダー 5">
@@ -23693,7 +29593,7 @@
             </p:nvSpPr>
             <p:spPr>
               <a:blipFill>
-                <a:blip r:embed="rId4"/>
+                <a:blip r:embed="rId5"/>
                 <a:stretch>
                   <a:fillRect l="-2200" t="-2749"/>
                 </a:stretch>
@@ -23714,276 +29614,8 @@
           </p:sp>
         </mc:Fallback>
       </mc:AlternateContent>
-      <p:pic>
-        <p:nvPicPr>
-          <p:cNvPr id="10" name="図 9" descr="アプリケーション が含まれている画像&#10;&#10;自動的に生成された説明">
-            <a:extLst>
-              <a:ext uri="{FF2B5EF4-FFF2-40B4-BE49-F238E27FC236}">
-                <a16:creationId xmlns:a16="http://schemas.microsoft.com/office/drawing/2014/main" id="{FEA15D4E-CD64-1EE0-3BEE-A0463EEEBB12}"/>
-              </a:ext>
-            </a:extLst>
-          </p:cNvPr>
-          <p:cNvPicPr>
-            <a:picLocks noChangeAspect="1"/>
-          </p:cNvPicPr>
-          <p:nvPr/>
-        </p:nvPicPr>
-        <p:blipFill>
-          <a:blip r:embed="rId5"/>
-          <a:stretch>
-            <a:fillRect/>
-          </a:stretch>
-        </p:blipFill>
-        <p:spPr>
-          <a:xfrm>
-            <a:off x="665163" y="3259455"/>
-            <a:ext cx="1584283" cy="3233420"/>
-          </a:xfrm>
-          <a:prstGeom prst="rect">
-            <a:avLst/>
-          </a:prstGeom>
-        </p:spPr>
-      </p:pic>
-      <p:pic>
-        <p:nvPicPr>
-          <p:cNvPr id="12" name="図 11" descr="アイコン が含まれている画像&#10;&#10;自動的に生成された説明">
-            <a:extLst>
-              <a:ext uri="{FF2B5EF4-FFF2-40B4-BE49-F238E27FC236}">
-                <a16:creationId xmlns:a16="http://schemas.microsoft.com/office/drawing/2014/main" id="{FFC2EFF6-A0F8-E51C-D6ED-763FD8AAC0C8}"/>
-              </a:ext>
-            </a:extLst>
-          </p:cNvPr>
-          <p:cNvPicPr>
-            <a:picLocks noChangeAspect="1"/>
-          </p:cNvPicPr>
-          <p:nvPr/>
-        </p:nvPicPr>
-        <p:blipFill>
-          <a:blip r:embed="rId6"/>
-          <a:stretch>
-            <a:fillRect/>
-          </a:stretch>
-        </p:blipFill>
-        <p:spPr>
-          <a:xfrm>
-            <a:off x="5948839" y="3319462"/>
-            <a:ext cx="1584283" cy="3233420"/>
-          </a:xfrm>
-          <a:prstGeom prst="rect">
-            <a:avLst/>
-          </a:prstGeom>
-        </p:spPr>
-      </p:pic>
-      <p:sp>
-        <p:nvSpPr>
-          <p:cNvPr id="13" name="正方形/長方形 12">
-            <a:extLst>
-              <a:ext uri="{FF2B5EF4-FFF2-40B4-BE49-F238E27FC236}">
-                <a16:creationId xmlns:a16="http://schemas.microsoft.com/office/drawing/2014/main" id="{0FFEF342-4272-A0FA-3B79-9AD52C8C8CF5}"/>
-              </a:ext>
-            </a:extLst>
-          </p:cNvPr>
-          <p:cNvSpPr/>
-          <p:nvPr/>
-        </p:nvSpPr>
-        <p:spPr>
-          <a:xfrm>
-            <a:off x="896377" y="5256324"/>
-            <a:ext cx="332423" cy="332423"/>
-          </a:xfrm>
-          <a:prstGeom prst="rect">
-            <a:avLst/>
-          </a:prstGeom>
-          <a:noFill/>
-          <a:ln w="28575">
-            <a:solidFill>
-              <a:srgbClr val="0070C0"/>
-            </a:solidFill>
-          </a:ln>
-        </p:spPr>
-        <p:style>
-          <a:lnRef idx="2">
-            <a:schemeClr val="accent1">
-              <a:shade val="15000"/>
-            </a:schemeClr>
-          </a:lnRef>
-          <a:fillRef idx="1">
-            <a:schemeClr val="accent1"/>
-          </a:fillRef>
-          <a:effectRef idx="0">
-            <a:schemeClr val="accent1"/>
-          </a:effectRef>
-          <a:fontRef idx="minor">
-            <a:schemeClr val="lt1"/>
-          </a:fontRef>
-        </p:style>
-        <p:txBody>
-          <a:bodyPr rtlCol="0" anchor="ctr"/>
-          <a:lstStyle/>
-          <a:p>
-            <a:pPr algn="ctr"/>
-            <a:endParaRPr kumimoji="1" lang="ja-JP" altLang="en-US"/>
-          </a:p>
-        </p:txBody>
-      </p:sp>
-      <p:sp>
-        <p:nvSpPr>
-          <p:cNvPr id="14" name="正方形/長方形 13">
-            <a:extLst>
-              <a:ext uri="{FF2B5EF4-FFF2-40B4-BE49-F238E27FC236}">
-                <a16:creationId xmlns:a16="http://schemas.microsoft.com/office/drawing/2014/main" id="{AEBCD04C-F24A-EA5D-BAC6-C63AF95371AF}"/>
-              </a:ext>
-            </a:extLst>
-          </p:cNvPr>
-          <p:cNvSpPr/>
-          <p:nvPr/>
-        </p:nvSpPr>
-        <p:spPr>
-          <a:xfrm>
-            <a:off x="1682282" y="5256324"/>
-            <a:ext cx="332423" cy="332423"/>
-          </a:xfrm>
-          <a:prstGeom prst="rect">
-            <a:avLst/>
-          </a:prstGeom>
-          <a:noFill/>
-          <a:ln w="28575">
-            <a:solidFill>
-              <a:srgbClr val="0070C0"/>
-            </a:solidFill>
-          </a:ln>
-        </p:spPr>
-        <p:style>
-          <a:lnRef idx="2">
-            <a:schemeClr val="accent1">
-              <a:shade val="15000"/>
-            </a:schemeClr>
-          </a:lnRef>
-          <a:fillRef idx="1">
-            <a:schemeClr val="accent1"/>
-          </a:fillRef>
-          <a:effectRef idx="0">
-            <a:schemeClr val="accent1"/>
-          </a:effectRef>
-          <a:fontRef idx="minor">
-            <a:schemeClr val="lt1"/>
-          </a:fontRef>
-        </p:style>
-        <p:txBody>
-          <a:bodyPr rtlCol="0" anchor="ctr"/>
-          <a:lstStyle/>
-          <a:p>
-            <a:pPr algn="ctr"/>
-            <a:endParaRPr kumimoji="1" lang="ja-JP" altLang="en-US"/>
-          </a:p>
-        </p:txBody>
-      </p:sp>
-      <p:sp>
-        <p:nvSpPr>
-          <p:cNvPr id="15" name="正方形/長方形 14">
-            <a:extLst>
-              <a:ext uri="{FF2B5EF4-FFF2-40B4-BE49-F238E27FC236}">
-                <a16:creationId xmlns:a16="http://schemas.microsoft.com/office/drawing/2014/main" id="{E71716D5-2669-8C1C-BA01-F9F2515982AA}"/>
-              </a:ext>
-            </a:extLst>
-          </p:cNvPr>
-          <p:cNvSpPr/>
-          <p:nvPr/>
-        </p:nvSpPr>
-        <p:spPr>
-          <a:xfrm>
-            <a:off x="3869987" y="3307510"/>
-            <a:ext cx="332423" cy="332423"/>
-          </a:xfrm>
-          <a:prstGeom prst="rect">
-            <a:avLst/>
-          </a:prstGeom>
-          <a:noFill/>
-          <a:ln w="28575">
-            <a:solidFill>
-              <a:srgbClr val="0070C0"/>
-            </a:solidFill>
-          </a:ln>
-        </p:spPr>
-        <p:style>
-          <a:lnRef idx="2">
-            <a:schemeClr val="accent1">
-              <a:shade val="15000"/>
-            </a:schemeClr>
-          </a:lnRef>
-          <a:fillRef idx="1">
-            <a:schemeClr val="accent1"/>
-          </a:fillRef>
-          <a:effectRef idx="0">
-            <a:schemeClr val="accent1"/>
-          </a:effectRef>
-          <a:fontRef idx="minor">
-            <a:schemeClr val="lt1"/>
-          </a:fontRef>
-        </p:style>
-        <p:txBody>
-          <a:bodyPr rtlCol="0" anchor="ctr"/>
-          <a:lstStyle/>
-          <a:p>
-            <a:pPr algn="ctr"/>
-            <a:endParaRPr kumimoji="1" lang="ja-JP" altLang="en-US"/>
-          </a:p>
-        </p:txBody>
-      </p:sp>
-      <p:sp>
-        <p:nvSpPr>
-          <p:cNvPr id="16" name="正方形/長方形 15">
-            <a:extLst>
-              <a:ext uri="{FF2B5EF4-FFF2-40B4-BE49-F238E27FC236}">
-                <a16:creationId xmlns:a16="http://schemas.microsoft.com/office/drawing/2014/main" id="{77A08E46-3287-1589-992A-713DEDD5B08E}"/>
-              </a:ext>
-            </a:extLst>
-          </p:cNvPr>
-          <p:cNvSpPr/>
-          <p:nvPr/>
-        </p:nvSpPr>
-        <p:spPr>
-          <a:xfrm>
-            <a:off x="3329116" y="2897152"/>
-            <a:ext cx="332423" cy="332423"/>
-          </a:xfrm>
-          <a:prstGeom prst="rect">
-            <a:avLst/>
-          </a:prstGeom>
-          <a:noFill/>
-          <a:ln w="28575">
-            <a:solidFill>
-              <a:srgbClr val="0070C0"/>
-            </a:solidFill>
-          </a:ln>
-        </p:spPr>
-        <p:style>
-          <a:lnRef idx="2">
-            <a:schemeClr val="accent1">
-              <a:shade val="15000"/>
-            </a:schemeClr>
-          </a:lnRef>
-          <a:fillRef idx="1">
-            <a:schemeClr val="accent1"/>
-          </a:fillRef>
-          <a:effectRef idx="0">
-            <a:schemeClr val="accent1"/>
-          </a:effectRef>
-          <a:fontRef idx="minor">
-            <a:schemeClr val="lt1"/>
-          </a:fontRef>
-        </p:style>
-        <p:txBody>
-          <a:bodyPr rtlCol="0" anchor="ctr"/>
-          <a:lstStyle/>
-          <a:p>
-            <a:pPr algn="ctr"/>
-            <a:endParaRPr kumimoji="1" lang="ja-JP" altLang="en-US"/>
-          </a:p>
-        </p:txBody>
-      </p:sp>
-      <mc:AlternateContent xmlns:mc="http://schemas.openxmlformats.org/markup-compatibility/2006">
-        <mc:Choice xmlns:a14="http://schemas.microsoft.com/office/drawing/2010/main" Requires="a14">
+      <mc:AlternateContent xmlns:mc="http://schemas.openxmlformats.org/markup-compatibility/2006" xmlns:a14="http://schemas.microsoft.com/office/drawing/2010/main">
+        <mc:Choice Requires="a14">
           <p:sp>
             <p:nvSpPr>
               <p:cNvPr id="17" name="テキスト ボックス 16">
@@ -23998,7 +29630,7 @@
             </p:nvSpPr>
             <p:spPr>
               <a:xfrm>
-                <a:off x="2505616" y="3881339"/>
+                <a:off x="3096940" y="4347369"/>
                 <a:ext cx="2840444" cy="1754326"/>
               </a:xfrm>
               <a:prstGeom prst="rect">
@@ -24075,7 +29707,7 @@
             </p:txBody>
           </p:sp>
         </mc:Choice>
-        <mc:Fallback>
+        <mc:Fallback xmlns="">
           <p:sp>
             <p:nvSpPr>
               <p:cNvPr id="17" name="テキスト ボックス 16">
@@ -24092,16 +29724,16 @@
             </p:nvSpPr>
             <p:spPr>
               <a:xfrm>
-                <a:off x="2505616" y="3881339"/>
+                <a:off x="3096940" y="4347369"/>
                 <a:ext cx="2840444" cy="1754326"/>
               </a:xfrm>
               <a:prstGeom prst="rect">
                 <a:avLst/>
               </a:prstGeom>
               <a:blipFill>
-                <a:blip r:embed="rId7"/>
+                <a:blip r:embed="rId6"/>
                 <a:stretch>
-                  <a:fillRect l="-1339" t="-1439" b="-5036"/>
+                  <a:fillRect l="-1333" t="-1439" b="-5036"/>
                 </a:stretch>
               </a:blipFill>
             </p:spPr>
@@ -24122,6 +29754,135 @@
       </mc:AlternateContent>
       <p:sp>
         <p:nvSpPr>
+          <p:cNvPr id="21" name="テキスト ボックス 20">
+            <a:extLst>
+              <a:ext uri="{FF2B5EF4-FFF2-40B4-BE49-F238E27FC236}">
+                <a16:creationId xmlns:a16="http://schemas.microsoft.com/office/drawing/2014/main" id="{DFF3091F-9912-3A0C-DE07-90C6C80FB914}"/>
+              </a:ext>
+            </a:extLst>
+          </p:cNvPr>
+          <p:cNvSpPr txBox="1"/>
+          <p:nvPr/>
+        </p:nvSpPr>
+        <p:spPr>
+          <a:xfrm>
+            <a:off x="8802308" y="4844279"/>
+            <a:ext cx="2840444" cy="646331"/>
+          </a:xfrm>
+          <a:prstGeom prst="rect">
+            <a:avLst/>
+          </a:prstGeom>
+          <a:noFill/>
+        </p:spPr>
+        <p:txBody>
+          <a:bodyPr wrap="square" rtlCol="0">
+            <a:spAutoFit/>
+          </a:bodyPr>
+          <a:lstStyle/>
+          <a:p>
+            <a:pPr marL="285750" indent="-285750">
+              <a:buFont typeface="Arial" panose="020B0604020202020204" pitchFamily="34" charset="0"/>
+              <a:buChar char="•"/>
+            </a:pPr>
+            <a:r>
+              <a:rPr kumimoji="1" lang="ja-JP" altLang="en-US"/>
+              <a:t>演算時に全てのエッジの探索が必要</a:t>
+            </a:r>
+            <a:endParaRPr kumimoji="1" lang="en-US" altLang="ja-JP" dirty="0"/>
+          </a:p>
+        </p:txBody>
+      </p:sp>
+      <p:sp>
+        <p:nvSpPr>
+          <p:cNvPr id="7" name="スライド番号プレースホルダー 6">
+            <a:extLst>
+              <a:ext uri="{FF2B5EF4-FFF2-40B4-BE49-F238E27FC236}">
+                <a16:creationId xmlns:a16="http://schemas.microsoft.com/office/drawing/2014/main" id="{6931235C-87B3-19E4-E687-C07F975AAD55}"/>
+              </a:ext>
+            </a:extLst>
+          </p:cNvPr>
+          <p:cNvSpPr>
+            <a:spLocks noGrp="1"/>
+          </p:cNvSpPr>
+          <p:nvPr>
+            <p:ph type="sldNum" sz="quarter" idx="12"/>
+          </p:nvPr>
+        </p:nvSpPr>
+        <p:spPr/>
+        <p:txBody>
+          <a:bodyPr/>
+          <a:lstStyle/>
+          <a:p>
+            <a:fld id="{B7DD3F26-AD0F-FC47-9ED8-571159D68F9B}" type="slidenum">
+              <a:rPr kumimoji="1" lang="ja-JP" altLang="en-US" smtClean="0"/>
+              <a:t>6</a:t>
+            </a:fld>
+            <a:endParaRPr kumimoji="1" lang="ja-JP" altLang="en-US"/>
+          </a:p>
+        </p:txBody>
+      </p:sp>
+      <p:pic>
+        <p:nvPicPr>
+          <p:cNvPr id="9" name="図 8" descr="アプリケーション が含まれている画像&#10;&#10;自動的に生成された説明">
+            <a:extLst>
+              <a:ext uri="{FF2B5EF4-FFF2-40B4-BE49-F238E27FC236}">
+                <a16:creationId xmlns:a16="http://schemas.microsoft.com/office/drawing/2014/main" id="{BD57843E-19E8-FC96-3C42-D2867E9FD8FC}"/>
+              </a:ext>
+            </a:extLst>
+          </p:cNvPr>
+          <p:cNvPicPr>
+            <a:picLocks noChangeAspect="1"/>
+          </p:cNvPicPr>
+          <p:nvPr/>
+        </p:nvPicPr>
+        <p:blipFill>
+          <a:blip r:embed="rId7"/>
+          <a:stretch>
+            <a:fillRect/>
+          </a:stretch>
+        </p:blipFill>
+        <p:spPr>
+          <a:xfrm>
+            <a:off x="665164" y="3272857"/>
+            <a:ext cx="1689724" cy="3448617"/>
+          </a:xfrm>
+          <a:prstGeom prst="rect">
+            <a:avLst/>
+          </a:prstGeom>
+        </p:spPr>
+      </p:pic>
+      <p:pic>
+        <p:nvPicPr>
+          <p:cNvPr id="18" name="図 17" descr="アイコン が含まれている画像&#10;&#10;自動的に生成された説明">
+            <a:extLst>
+              <a:ext uri="{FF2B5EF4-FFF2-40B4-BE49-F238E27FC236}">
+                <a16:creationId xmlns:a16="http://schemas.microsoft.com/office/drawing/2014/main" id="{661DB48C-C9FE-5EE1-AAFC-E3E38BDEE8B7}"/>
+              </a:ext>
+            </a:extLst>
+          </p:cNvPr>
+          <p:cNvPicPr>
+            <a:picLocks noChangeAspect="1"/>
+          </p:cNvPicPr>
+          <p:nvPr/>
+        </p:nvPicPr>
+        <p:blipFill>
+          <a:blip r:embed="rId8"/>
+          <a:stretch>
+            <a:fillRect/>
+          </a:stretch>
+        </p:blipFill>
+        <p:spPr>
+          <a:xfrm>
+            <a:off x="6024562" y="3272856"/>
+            <a:ext cx="1689724" cy="3448617"/>
+          </a:xfrm>
+          <a:prstGeom prst="rect">
+            <a:avLst/>
+          </a:prstGeom>
+        </p:spPr>
+      </p:pic>
+      <p:sp>
+        <p:nvSpPr>
           <p:cNvPr id="19" name="正方形/長方形 18">
             <a:extLst>
               <a:ext uri="{FF2B5EF4-FFF2-40B4-BE49-F238E27FC236}">
@@ -24134,8 +29895,8 @@
         </p:nvSpPr>
         <p:spPr>
           <a:xfrm>
-            <a:off x="6159568" y="5303242"/>
-            <a:ext cx="1183681" cy="332423"/>
+            <a:off x="6278874" y="5372097"/>
+            <a:ext cx="1181100" cy="403861"/>
           </a:xfrm>
           <a:prstGeom prst="rect">
             <a:avLst/>
@@ -24174,315 +29935,10 @@
       </p:sp>
       <p:sp>
         <p:nvSpPr>
-          <p:cNvPr id="21" name="テキスト ボックス 20">
+          <p:cNvPr id="16" name="正方形/長方形 15">
             <a:extLst>
               <a:ext uri="{FF2B5EF4-FFF2-40B4-BE49-F238E27FC236}">
-                <a16:creationId xmlns:a16="http://schemas.microsoft.com/office/drawing/2014/main" id="{DFF3091F-9912-3A0C-DE07-90C6C80FB914}"/>
-              </a:ext>
-            </a:extLst>
-          </p:cNvPr>
-          <p:cNvSpPr txBox="1"/>
-          <p:nvPr/>
-        </p:nvSpPr>
-        <p:spPr>
-          <a:xfrm>
-            <a:off x="8135901" y="4613006"/>
-            <a:ext cx="2840444" cy="646331"/>
-          </a:xfrm>
-          <a:prstGeom prst="rect">
-            <a:avLst/>
-          </a:prstGeom>
-          <a:noFill/>
-        </p:spPr>
-        <p:txBody>
-          <a:bodyPr wrap="square" rtlCol="0">
-            <a:spAutoFit/>
-          </a:bodyPr>
-          <a:lstStyle/>
-          <a:p>
-            <a:pPr marL="285750" indent="-285750">
-              <a:buFont typeface="Arial" panose="020B0604020202020204" pitchFamily="34" charset="0"/>
-              <a:buChar char="•"/>
-            </a:pPr>
-            <a:r>
-              <a:rPr kumimoji="1" lang="ja-JP" altLang="en-US"/>
-              <a:t>演算時に全てのエッジの探索が必要</a:t>
-            </a:r>
-            <a:endParaRPr kumimoji="1" lang="en-US" altLang="ja-JP" dirty="0"/>
-          </a:p>
-        </p:txBody>
-      </p:sp>
-    </p:spTree>
-    <p:extLst>
-      <p:ext uri="{BB962C8B-B14F-4D97-AF65-F5344CB8AC3E}">
-        <p14:creationId xmlns:p14="http://schemas.microsoft.com/office/powerpoint/2010/main" val="3672827483"/>
-      </p:ext>
-    </p:extLst>
-  </p:cSld>
-  <p:clrMapOvr>
-    <a:masterClrMapping/>
-  </p:clrMapOvr>
-</p:sld>
-</file>
-
-<file path=ppt/slides/slide5.xml><?xml version="1.0" encoding="utf-8"?>
-<p:sld xmlns:a="http://schemas.openxmlformats.org/drawingml/2006/main" xmlns:r="http://schemas.openxmlformats.org/officeDocument/2006/relationships" xmlns:p="http://schemas.openxmlformats.org/presentationml/2006/main">
-  <p:cSld>
-    <p:spTree>
-      <p:nvGrpSpPr>
-        <p:cNvPr id="1" name=""/>
-        <p:cNvGrpSpPr/>
-        <p:nvPr/>
-      </p:nvGrpSpPr>
-      <p:grpSpPr>
-        <a:xfrm>
-          <a:off x="0" y="0"/>
-          <a:ext cx="0" cy="0"/>
-          <a:chOff x="0" y="0"/>
-          <a:chExt cx="0" cy="0"/>
-        </a:xfrm>
-      </p:grpSpPr>
-      <p:sp>
-        <p:nvSpPr>
-          <p:cNvPr id="2" name="タイトル 1">
-            <a:extLst>
-              <a:ext uri="{FF2B5EF4-FFF2-40B4-BE49-F238E27FC236}">
-                <a16:creationId xmlns:a16="http://schemas.microsoft.com/office/drawing/2014/main" id="{1465B21F-8EEA-3C6B-1A82-CAB687022476}"/>
-              </a:ext>
-            </a:extLst>
-          </p:cNvPr>
-          <p:cNvSpPr>
-            <a:spLocks noGrp="1"/>
-          </p:cNvSpPr>
-          <p:nvPr>
-            <p:ph type="title"/>
-          </p:nvPr>
-        </p:nvSpPr>
-        <p:spPr/>
-        <p:txBody>
-          <a:bodyPr/>
-          <a:lstStyle/>
-          <a:p>
-            <a:r>
-              <a:rPr kumimoji="1" lang="ja-JP" altLang="en-US"/>
-              <a:t>ゲート連結</a:t>
-            </a:r>
-          </a:p>
-        </p:txBody>
-      </p:sp>
-      <p:sp>
-        <p:nvSpPr>
-          <p:cNvPr id="3" name="コンテンツ プレースホルダー 2">
-            <a:extLst>
-              <a:ext uri="{FF2B5EF4-FFF2-40B4-BE49-F238E27FC236}">
-                <a16:creationId xmlns:a16="http://schemas.microsoft.com/office/drawing/2014/main" id="{6B961404-F359-2CA4-5A27-E87052788F01}"/>
-              </a:ext>
-            </a:extLst>
-          </p:cNvPr>
-          <p:cNvSpPr>
-            <a:spLocks noGrp="1"/>
-          </p:cNvSpPr>
-          <p:nvPr>
-            <p:ph idx="1"/>
-          </p:nvPr>
-        </p:nvSpPr>
-        <p:spPr/>
-        <p:txBody>
-          <a:bodyPr/>
-          <a:lstStyle/>
-          <a:p>
-            <a:r>
-              <a:rPr lang="ja-JP" altLang="en-US">
-                <a:solidFill>
-                  <a:srgbClr val="FF0000"/>
-                </a:solidFill>
-              </a:rPr>
-              <a:t>テンソル積</a:t>
-            </a:r>
-            <a:r>
-              <a:rPr lang="ja-JP" altLang="en-US"/>
-              <a:t>で実装</a:t>
-            </a:r>
-            <a:endParaRPr lang="en-US" altLang="ja-JP" dirty="0"/>
-          </a:p>
-          <a:p>
-            <a:pPr marL="0" indent="0">
-              <a:buNone/>
-            </a:pPr>
-            <a:endParaRPr kumimoji="1" lang="en-US" altLang="ja-JP" dirty="0"/>
-          </a:p>
-          <a:p>
-            <a:r>
-              <a:rPr kumimoji="1" lang="en-US" altLang="ja-JP" dirty="0"/>
-              <a:t>QMDD</a:t>
-            </a:r>
-            <a:r>
-              <a:rPr kumimoji="1" lang="ja-JP" altLang="en-US"/>
-              <a:t>では終端ノード</a:t>
-            </a:r>
-            <a:r>
-              <a:rPr lang="ja-JP" altLang="en-US"/>
-              <a:t>を始点ノードに置換する処理</a:t>
-            </a:r>
-            <a:endParaRPr lang="en-US" altLang="ja-JP" dirty="0"/>
-          </a:p>
-        </p:txBody>
-      </p:sp>
-      <p:sp>
-        <p:nvSpPr>
-          <p:cNvPr id="5" name="スライド番号プレースホルダー 4">
-            <a:extLst>
-              <a:ext uri="{FF2B5EF4-FFF2-40B4-BE49-F238E27FC236}">
-                <a16:creationId xmlns:a16="http://schemas.microsoft.com/office/drawing/2014/main" id="{DB0102C2-99C2-AD78-9C7C-B0B444E682BB}"/>
-              </a:ext>
-            </a:extLst>
-          </p:cNvPr>
-          <p:cNvSpPr>
-            <a:spLocks noGrp="1"/>
-          </p:cNvSpPr>
-          <p:nvPr>
-            <p:ph type="sldNum" sz="quarter" idx="12"/>
-          </p:nvPr>
-        </p:nvSpPr>
-        <p:spPr/>
-        <p:txBody>
-          <a:bodyPr/>
-          <a:lstStyle/>
-          <a:p>
-            <a:fld id="{EA2F3317-65BA-D746-98B8-3038158C8C28}" type="slidenum">
-              <a:rPr kumimoji="1" lang="ja-JP" altLang="en-US" smtClean="0"/>
-              <a:t>5</a:t>
-            </a:fld>
-            <a:endParaRPr kumimoji="1" lang="ja-JP" altLang="en-US"/>
-          </a:p>
-        </p:txBody>
-      </p:sp>
-      <p:pic>
-        <p:nvPicPr>
-          <p:cNvPr id="7" name="図 6" descr="時計 が含まれている画像&#10;&#10;自動的に生成された説明">
-            <a:extLst>
-              <a:ext uri="{FF2B5EF4-FFF2-40B4-BE49-F238E27FC236}">
-                <a16:creationId xmlns:a16="http://schemas.microsoft.com/office/drawing/2014/main" id="{F1461C18-BC33-C21A-9BD8-DC4B8E8D276F}"/>
-              </a:ext>
-            </a:extLst>
-          </p:cNvPr>
-          <p:cNvPicPr>
-            <a:picLocks noChangeAspect="1"/>
-          </p:cNvPicPr>
-          <p:nvPr/>
-        </p:nvPicPr>
-        <p:blipFill>
-          <a:blip r:embed="rId2"/>
-          <a:stretch>
-            <a:fillRect/>
-          </a:stretch>
-        </p:blipFill>
-        <p:spPr>
-          <a:xfrm>
-            <a:off x="0" y="3958393"/>
-            <a:ext cx="2649117" cy="1592624"/>
-          </a:xfrm>
-          <a:prstGeom prst="rect">
-            <a:avLst/>
-          </a:prstGeom>
-        </p:spPr>
-      </p:pic>
-      <p:pic>
-        <p:nvPicPr>
-          <p:cNvPr id="9" name="図 8" descr="アイコン が含まれている画像&#10;&#10;自動的に生成された説明">
-            <a:extLst>
-              <a:ext uri="{FF2B5EF4-FFF2-40B4-BE49-F238E27FC236}">
-                <a16:creationId xmlns:a16="http://schemas.microsoft.com/office/drawing/2014/main" id="{CBE72A4D-C8AF-0E05-73C5-59B3A191764E}"/>
-              </a:ext>
-            </a:extLst>
-          </p:cNvPr>
-          <p:cNvPicPr>
-            <a:picLocks noChangeAspect="1"/>
-          </p:cNvPicPr>
-          <p:nvPr/>
-        </p:nvPicPr>
-        <p:blipFill>
-          <a:blip r:embed="rId3"/>
-          <a:stretch>
-            <a:fillRect/>
-          </a:stretch>
-        </p:blipFill>
-        <p:spPr>
-          <a:xfrm>
-            <a:off x="4036529" y="3611232"/>
-            <a:ext cx="1507010" cy="3075709"/>
-          </a:xfrm>
-          <a:prstGeom prst="rect">
-            <a:avLst/>
-          </a:prstGeom>
-        </p:spPr>
-      </p:pic>
-      <p:pic>
-        <p:nvPicPr>
-          <p:cNvPr id="13" name="図 12" descr="アプリケーション が含まれている画像&#10;&#10;自動的に生成された説明">
-            <a:extLst>
-              <a:ext uri="{FF2B5EF4-FFF2-40B4-BE49-F238E27FC236}">
-                <a16:creationId xmlns:a16="http://schemas.microsoft.com/office/drawing/2014/main" id="{5A35DE30-714F-078E-D28E-4C4D925C0E3A}"/>
-              </a:ext>
-            </a:extLst>
-          </p:cNvPr>
-          <p:cNvPicPr>
-            <a:picLocks noChangeAspect="1"/>
-          </p:cNvPicPr>
-          <p:nvPr/>
-        </p:nvPicPr>
-        <p:blipFill>
-          <a:blip r:embed="rId4"/>
-          <a:stretch>
-            <a:fillRect/>
-          </a:stretch>
-        </p:blipFill>
-        <p:spPr>
-          <a:xfrm>
-            <a:off x="6648460" y="3611232"/>
-            <a:ext cx="1507010" cy="3075709"/>
-          </a:xfrm>
-          <a:prstGeom prst="rect">
-            <a:avLst/>
-          </a:prstGeom>
-        </p:spPr>
-      </p:pic>
-      <p:pic>
-        <p:nvPicPr>
-          <p:cNvPr id="15" name="図 14" descr="ボール, 時計, テーブル, 挿絵 が含まれている画像&#10;&#10;自動的に生成された説明">
-            <a:extLst>
-              <a:ext uri="{FF2B5EF4-FFF2-40B4-BE49-F238E27FC236}">
-                <a16:creationId xmlns:a16="http://schemas.microsoft.com/office/drawing/2014/main" id="{82166B8A-629E-F048-FEE9-F223447D3B90}"/>
-              </a:ext>
-            </a:extLst>
-          </p:cNvPr>
-          <p:cNvPicPr>
-            <a:picLocks noChangeAspect="1"/>
-          </p:cNvPicPr>
-          <p:nvPr/>
-        </p:nvPicPr>
-        <p:blipFill>
-          <a:blip r:embed="rId5"/>
-          <a:stretch>
-            <a:fillRect/>
-          </a:stretch>
-        </p:blipFill>
-        <p:spPr>
-          <a:xfrm>
-            <a:off x="9866940" y="1398914"/>
-            <a:ext cx="1645856" cy="5322562"/>
-          </a:xfrm>
-          <a:prstGeom prst="rect">
-            <a:avLst/>
-          </a:prstGeom>
-        </p:spPr>
-      </p:pic>
-      <p:sp>
-        <p:nvSpPr>
-          <p:cNvPr id="16" name="右矢印 15">
-            <a:extLst>
-              <a:ext uri="{FF2B5EF4-FFF2-40B4-BE49-F238E27FC236}">
-                <a16:creationId xmlns:a16="http://schemas.microsoft.com/office/drawing/2014/main" id="{DE840419-6999-C66A-2C49-85420E51163C}"/>
+                <a16:creationId xmlns:a16="http://schemas.microsoft.com/office/drawing/2014/main" id="{77A08E46-3287-1589-992A-713DEDD5B08E}"/>
               </a:ext>
             </a:extLst>
           </p:cNvPr>
@@ -24491,16 +29947,14 @@
         </p:nvSpPr>
         <p:spPr>
           <a:xfrm>
-            <a:off x="2564849" y="4566658"/>
-            <a:ext cx="1287093" cy="376094"/>
+            <a:off x="929680" y="5407817"/>
+            <a:ext cx="332423" cy="332423"/>
           </a:xfrm>
-          <a:prstGeom prst="rightArrow">
+          <a:prstGeom prst="rect">
             <a:avLst/>
           </a:prstGeom>
-          <a:solidFill>
-            <a:srgbClr val="0070C0"/>
-          </a:solidFill>
-          <a:ln>
+          <a:noFill/>
+          <a:ln w="28575">
             <a:solidFill>
               <a:srgbClr val="0070C0"/>
             </a:solidFill>
@@ -24533,10 +29987,10 @@
       </p:sp>
       <p:sp>
         <p:nvSpPr>
-          <p:cNvPr id="17" name="右矢印 16">
+          <p:cNvPr id="15" name="正方形/長方形 14">
             <a:extLst>
               <a:ext uri="{FF2B5EF4-FFF2-40B4-BE49-F238E27FC236}">
-                <a16:creationId xmlns:a16="http://schemas.microsoft.com/office/drawing/2014/main" id="{1F87A06B-55FC-5052-3926-12835C30BE8A}"/>
+                <a16:creationId xmlns:a16="http://schemas.microsoft.com/office/drawing/2014/main" id="{E71716D5-2669-8C1C-BA01-F9F2515982AA}"/>
               </a:ext>
             </a:extLst>
           </p:cNvPr>
@@ -24545,16 +29999,14 @@
         </p:nvSpPr>
         <p:spPr>
           <a:xfrm>
-            <a:off x="8322288" y="4572774"/>
-            <a:ext cx="1287093" cy="376094"/>
+            <a:off x="1760184" y="5407817"/>
+            <a:ext cx="332423" cy="332423"/>
           </a:xfrm>
-          <a:prstGeom prst="rightArrow">
+          <a:prstGeom prst="rect">
             <a:avLst/>
           </a:prstGeom>
-          <a:solidFill>
-            <a:srgbClr val="0070C0"/>
-          </a:solidFill>
-          <a:ln>
+          <a:noFill/>
+          <a:ln w="28575">
             <a:solidFill>
               <a:srgbClr val="0070C0"/>
             </a:solidFill>
@@ -24585,428 +30037,10 @@
           </a:p>
         </p:txBody>
       </p:sp>
-      <mc:AlternateContent xmlns:mc="http://schemas.openxmlformats.org/markup-compatibility/2006" xmlns:a14="http://schemas.microsoft.com/office/drawing/2010/main">
-        <mc:Choice Requires="a14">
-          <p:sp>
-            <p:nvSpPr>
-              <p:cNvPr id="18" name="テキスト ボックス 17">
-                <a:extLst>
-                  <a:ext uri="{FF2B5EF4-FFF2-40B4-BE49-F238E27FC236}">
-                    <a16:creationId xmlns:a16="http://schemas.microsoft.com/office/drawing/2014/main" id="{B3C664A9-6E34-0287-F442-6D45D5FCA68B}"/>
-                  </a:ext>
-                </a:extLst>
-              </p:cNvPr>
-              <p:cNvSpPr txBox="1"/>
-              <p:nvPr/>
-            </p:nvSpPr>
-            <p:spPr>
-              <a:xfrm>
-                <a:off x="5829100" y="4477706"/>
-                <a:ext cx="533799" cy="553998"/>
-              </a:xfrm>
-              <a:prstGeom prst="rect">
-                <a:avLst/>
-              </a:prstGeom>
-              <a:noFill/>
-            </p:spPr>
-            <p:txBody>
-              <a:bodyPr wrap="none" lIns="0" tIns="0" rIns="0" bIns="0" rtlCol="0">
-                <a:spAutoFit/>
-              </a:bodyPr>
-              <a:lstStyle/>
-              <a:p>
-                <a:pPr/>
-                <a14:m>
-                  <m:oMathPara xmlns:m="http://schemas.openxmlformats.org/officeDocument/2006/math">
-                    <m:oMathParaPr>
-                      <m:jc m:val="centerGroup"/>
-                    </m:oMathParaPr>
-                    <m:oMath xmlns:m="http://schemas.openxmlformats.org/officeDocument/2006/math">
-                      <m:r>
-                        <a:rPr kumimoji="1" lang="ja-JP" altLang="en-US" sz="3600" i="1" smtClean="0">
-                          <a:latin typeface="Cambria Math" panose="02040503050406030204" pitchFamily="18" charset="0"/>
-                        </a:rPr>
-                        <m:t>⨂</m:t>
-                      </m:r>
-                    </m:oMath>
-                  </m:oMathPara>
-                </a14:m>
-                <a:endParaRPr kumimoji="1" lang="ja-JP" altLang="en-US" sz="3600"/>
-              </a:p>
-            </p:txBody>
-          </p:sp>
-        </mc:Choice>
-        <mc:Fallback xmlns="">
-          <p:sp>
-            <p:nvSpPr>
-              <p:cNvPr id="18" name="テキスト ボックス 17">
-                <a:extLst>
-                  <a:ext uri="{FF2B5EF4-FFF2-40B4-BE49-F238E27FC236}">
-                    <a16:creationId xmlns:a16="http://schemas.microsoft.com/office/drawing/2014/main" id="{B3C664A9-6E34-0287-F442-6D45D5FCA68B}"/>
-                  </a:ext>
-                </a:extLst>
-              </p:cNvPr>
-              <p:cNvSpPr txBox="1">
-                <a:spLocks noRot="1" noChangeAspect="1" noMove="1" noResize="1" noEditPoints="1" noAdjustHandles="1" noChangeArrowheads="1" noChangeShapeType="1" noTextEdit="1"/>
-              </p:cNvSpPr>
-              <p:nvPr/>
-            </p:nvSpPr>
-            <p:spPr>
-              <a:xfrm>
-                <a:off x="5829100" y="4477706"/>
-                <a:ext cx="533799" cy="553998"/>
-              </a:xfrm>
-              <a:prstGeom prst="rect">
-                <a:avLst/>
-              </a:prstGeom>
-              <a:blipFill>
-                <a:blip r:embed="rId6"/>
-                <a:stretch>
-                  <a:fillRect l="-18182" r="-18182" b="-15909"/>
-                </a:stretch>
-              </a:blipFill>
-            </p:spPr>
-            <p:txBody>
-              <a:bodyPr/>
-              <a:lstStyle/>
-              <a:p>
-                <a:r>
-                  <a:rPr lang="ja-JP" altLang="en-US">
-                    <a:noFill/>
-                  </a:rPr>
-                  <a:t> </a:t>
-                </a:r>
-              </a:p>
-            </p:txBody>
-          </p:sp>
-        </mc:Fallback>
-      </mc:AlternateContent>
-      <mc:AlternateContent xmlns:mc="http://schemas.openxmlformats.org/markup-compatibility/2006" xmlns:a14="http://schemas.microsoft.com/office/drawing/2010/main">
-        <mc:Choice Requires="a14">
-          <p:sp>
-            <p:nvSpPr>
-              <p:cNvPr id="19" name="テキスト ボックス 18">
-                <a:extLst>
-                  <a:ext uri="{FF2B5EF4-FFF2-40B4-BE49-F238E27FC236}">
-                    <a16:creationId xmlns:a16="http://schemas.microsoft.com/office/drawing/2014/main" id="{C8088E09-072A-6C13-5E96-3FD8F0FE43D4}"/>
-                  </a:ext>
-                </a:extLst>
-              </p:cNvPr>
-              <p:cNvSpPr txBox="1"/>
-              <p:nvPr/>
-            </p:nvSpPr>
-            <p:spPr>
-              <a:xfrm>
-                <a:off x="2811321" y="4289659"/>
-                <a:ext cx="595869" cy="276999"/>
-              </a:xfrm>
-              <a:prstGeom prst="rect">
-                <a:avLst/>
-              </a:prstGeom>
-              <a:noFill/>
-            </p:spPr>
-            <p:txBody>
-              <a:bodyPr wrap="none" lIns="0" tIns="0" rIns="0" bIns="0" rtlCol="0">
-                <a:spAutoFit/>
-              </a:bodyPr>
-              <a:lstStyle/>
-              <a:p>
-                <a:pPr/>
-                <a14:m>
-                  <m:oMathPara xmlns:m="http://schemas.openxmlformats.org/officeDocument/2006/math">
-                    <m:oMathParaPr>
-                      <m:jc m:val="centerGroup"/>
-                    </m:oMathParaPr>
-                    <m:oMath xmlns:m="http://schemas.openxmlformats.org/officeDocument/2006/math">
-                      <m:r>
-                        <a:rPr kumimoji="1" lang="en-US" altLang="ja-JP" b="0" i="1" smtClean="0">
-                          <a:latin typeface="Cambria Math" panose="02040503050406030204" pitchFamily="18" charset="0"/>
-                        </a:rPr>
-                        <m:t>𝐻</m:t>
-                      </m:r>
-                      <m:r>
-                        <a:rPr kumimoji="1" lang="en-US" altLang="ja-JP" b="0" i="1" smtClean="0">
-                          <a:latin typeface="Cambria Math" panose="02040503050406030204" pitchFamily="18" charset="0"/>
-                          <a:ea typeface="Cambria Math" panose="02040503050406030204" pitchFamily="18" charset="0"/>
-                        </a:rPr>
-                        <m:t>⨂</m:t>
-                      </m:r>
-                      <m:r>
-                        <a:rPr kumimoji="1" lang="en-US" altLang="ja-JP" b="0" i="1" smtClean="0">
-                          <a:latin typeface="Cambria Math" panose="02040503050406030204" pitchFamily="18" charset="0"/>
-                          <a:ea typeface="Cambria Math" panose="02040503050406030204" pitchFamily="18" charset="0"/>
-                        </a:rPr>
-                        <m:t>𝑋</m:t>
-                      </m:r>
-                    </m:oMath>
-                  </m:oMathPara>
-                </a14:m>
-                <a:endParaRPr kumimoji="1" lang="ja-JP" altLang="en-US"/>
-              </a:p>
-            </p:txBody>
-          </p:sp>
-        </mc:Choice>
-        <mc:Fallback xmlns="">
-          <p:sp>
-            <p:nvSpPr>
-              <p:cNvPr id="19" name="テキスト ボックス 18">
-                <a:extLst>
-                  <a:ext uri="{FF2B5EF4-FFF2-40B4-BE49-F238E27FC236}">
-                    <a16:creationId xmlns:a16="http://schemas.microsoft.com/office/drawing/2014/main" id="{C8088E09-072A-6C13-5E96-3FD8F0FE43D4}"/>
-                  </a:ext>
-                </a:extLst>
-              </p:cNvPr>
-              <p:cNvSpPr txBox="1">
-                <a:spLocks noRot="1" noChangeAspect="1" noMove="1" noResize="1" noEditPoints="1" noAdjustHandles="1" noChangeArrowheads="1" noChangeShapeType="1" noTextEdit="1"/>
-              </p:cNvSpPr>
-              <p:nvPr/>
-            </p:nvSpPr>
-            <p:spPr>
-              <a:xfrm>
-                <a:off x="2811321" y="4289659"/>
-                <a:ext cx="595869" cy="276999"/>
-              </a:xfrm>
-              <a:prstGeom prst="rect">
-                <a:avLst/>
-              </a:prstGeom>
-              <a:blipFill>
-                <a:blip r:embed="rId7"/>
-                <a:stretch>
-                  <a:fillRect l="-8333" r="-6250" b="-17391"/>
-                </a:stretch>
-              </a:blipFill>
-            </p:spPr>
-            <p:txBody>
-              <a:bodyPr/>
-              <a:lstStyle/>
-              <a:p>
-                <a:r>
-                  <a:rPr lang="ja-JP" altLang="en-US">
-                    <a:noFill/>
-                  </a:rPr>
-                  <a:t> </a:t>
-                </a:r>
-              </a:p>
-            </p:txBody>
-          </p:sp>
-        </mc:Fallback>
-      </mc:AlternateContent>
-      <p:sp>
-        <p:nvSpPr>
-          <p:cNvPr id="8" name="正方形/長方形 7">
-            <a:extLst>
-              <a:ext uri="{FF2B5EF4-FFF2-40B4-BE49-F238E27FC236}">
-                <a16:creationId xmlns:a16="http://schemas.microsoft.com/office/drawing/2014/main" id="{276218D0-C056-9770-F5B5-34A4DAE02948}"/>
-              </a:ext>
-            </a:extLst>
-          </p:cNvPr>
-          <p:cNvSpPr/>
-          <p:nvPr/>
-        </p:nvSpPr>
-        <p:spPr>
-          <a:xfrm>
-            <a:off x="3801455" y="3451790"/>
-            <a:ext cx="1977158" cy="3292475"/>
-          </a:xfrm>
-          <a:prstGeom prst="rect">
-            <a:avLst/>
-          </a:prstGeom>
-          <a:noFill/>
-          <a:ln w="28575">
-            <a:solidFill>
-              <a:srgbClr val="FF0000"/>
-            </a:solidFill>
-            <a:prstDash val="sysDot"/>
-          </a:ln>
-        </p:spPr>
-        <p:style>
-          <a:lnRef idx="2">
-            <a:schemeClr val="accent1">
-              <a:shade val="15000"/>
-            </a:schemeClr>
-          </a:lnRef>
-          <a:fillRef idx="1">
-            <a:schemeClr val="accent1"/>
-          </a:fillRef>
-          <a:effectRef idx="0">
-            <a:schemeClr val="accent1"/>
-          </a:effectRef>
-          <a:fontRef idx="minor">
-            <a:schemeClr val="lt1"/>
-          </a:fontRef>
-        </p:style>
-        <p:txBody>
-          <a:bodyPr rtlCol="0" anchor="ctr"/>
-          <a:lstStyle/>
-          <a:p>
-            <a:pPr algn="ctr"/>
-            <a:endParaRPr kumimoji="1" lang="ja-JP" altLang="en-US"/>
-          </a:p>
-        </p:txBody>
-      </p:sp>
-      <p:sp>
-        <p:nvSpPr>
-          <p:cNvPr id="10" name="正方形/長方形 9">
-            <a:extLst>
-              <a:ext uri="{FF2B5EF4-FFF2-40B4-BE49-F238E27FC236}">
-                <a16:creationId xmlns:a16="http://schemas.microsoft.com/office/drawing/2014/main" id="{021B3FB4-78C5-864D-E7FF-0148E16497DF}"/>
-              </a:ext>
-            </a:extLst>
-          </p:cNvPr>
-          <p:cNvSpPr/>
-          <p:nvPr/>
-        </p:nvSpPr>
-        <p:spPr>
-          <a:xfrm>
-            <a:off x="9743153" y="2604611"/>
-            <a:ext cx="1977158" cy="1944132"/>
-          </a:xfrm>
-          <a:prstGeom prst="rect">
-            <a:avLst/>
-          </a:prstGeom>
-          <a:noFill/>
-          <a:ln w="28575">
-            <a:solidFill>
-              <a:srgbClr val="FF0000"/>
-            </a:solidFill>
-            <a:prstDash val="sysDot"/>
-          </a:ln>
-        </p:spPr>
-        <p:style>
-          <a:lnRef idx="2">
-            <a:schemeClr val="accent1">
-              <a:shade val="15000"/>
-            </a:schemeClr>
-          </a:lnRef>
-          <a:fillRef idx="1">
-            <a:schemeClr val="accent1"/>
-          </a:fillRef>
-          <a:effectRef idx="0">
-            <a:schemeClr val="accent1"/>
-          </a:effectRef>
-          <a:fontRef idx="minor">
-            <a:schemeClr val="lt1"/>
-          </a:fontRef>
-        </p:style>
-        <p:txBody>
-          <a:bodyPr rtlCol="0" anchor="ctr"/>
-          <a:lstStyle/>
-          <a:p>
-            <a:pPr algn="ctr"/>
-            <a:endParaRPr kumimoji="1" lang="ja-JP" altLang="en-US"/>
-          </a:p>
-        </p:txBody>
-      </p:sp>
-      <p:sp>
-        <p:nvSpPr>
-          <p:cNvPr id="11" name="正方形/長方形 10">
-            <a:extLst>
-              <a:ext uri="{FF2B5EF4-FFF2-40B4-BE49-F238E27FC236}">
-                <a16:creationId xmlns:a16="http://schemas.microsoft.com/office/drawing/2014/main" id="{C8304653-552F-C69A-E826-1E0C63A96906}"/>
-              </a:ext>
-            </a:extLst>
-          </p:cNvPr>
-          <p:cNvSpPr/>
-          <p:nvPr/>
-        </p:nvSpPr>
-        <p:spPr>
-          <a:xfrm>
-            <a:off x="6409432" y="3451789"/>
-            <a:ext cx="1977158" cy="3292475"/>
-          </a:xfrm>
-          <a:prstGeom prst="rect">
-            <a:avLst/>
-          </a:prstGeom>
-          <a:noFill/>
-          <a:ln w="28575">
-            <a:solidFill>
-              <a:srgbClr val="0070C0"/>
-            </a:solidFill>
-            <a:prstDash val="sysDot"/>
-          </a:ln>
-        </p:spPr>
-        <p:style>
-          <a:lnRef idx="2">
-            <a:schemeClr val="accent1">
-              <a:shade val="15000"/>
-            </a:schemeClr>
-          </a:lnRef>
-          <a:fillRef idx="1">
-            <a:schemeClr val="accent1"/>
-          </a:fillRef>
-          <a:effectRef idx="0">
-            <a:schemeClr val="accent1"/>
-          </a:effectRef>
-          <a:fontRef idx="minor">
-            <a:schemeClr val="lt1"/>
-          </a:fontRef>
-        </p:style>
-        <p:txBody>
-          <a:bodyPr rtlCol="0" anchor="ctr"/>
-          <a:lstStyle/>
-          <a:p>
-            <a:pPr algn="ctr"/>
-            <a:endParaRPr kumimoji="1" lang="ja-JP" altLang="en-US"/>
-          </a:p>
-        </p:txBody>
-      </p:sp>
-      <p:sp>
-        <p:nvSpPr>
-          <p:cNvPr id="12" name="正方形/長方形 11">
-            <a:extLst>
-              <a:ext uri="{FF2B5EF4-FFF2-40B4-BE49-F238E27FC236}">
-                <a16:creationId xmlns:a16="http://schemas.microsoft.com/office/drawing/2014/main" id="{E313E3ED-C070-C5CE-0D23-76B4CB14CD51}"/>
-              </a:ext>
-            </a:extLst>
-          </p:cNvPr>
-          <p:cNvSpPr/>
-          <p:nvPr/>
-        </p:nvSpPr>
-        <p:spPr>
-          <a:xfrm>
-            <a:off x="9743153" y="4548744"/>
-            <a:ext cx="1977158" cy="1944132"/>
-          </a:xfrm>
-          <a:prstGeom prst="rect">
-            <a:avLst/>
-          </a:prstGeom>
-          <a:noFill/>
-          <a:ln w="28575">
-            <a:solidFill>
-              <a:srgbClr val="0070C0"/>
-            </a:solidFill>
-            <a:prstDash val="sysDot"/>
-          </a:ln>
-        </p:spPr>
-        <p:style>
-          <a:lnRef idx="2">
-            <a:schemeClr val="accent1">
-              <a:shade val="15000"/>
-            </a:schemeClr>
-          </a:lnRef>
-          <a:fillRef idx="1">
-            <a:schemeClr val="accent1"/>
-          </a:fillRef>
-          <a:effectRef idx="0">
-            <a:schemeClr val="accent1"/>
-          </a:effectRef>
-          <a:fontRef idx="minor">
-            <a:schemeClr val="lt1"/>
-          </a:fontRef>
-        </p:style>
-        <p:txBody>
-          <a:bodyPr rtlCol="0" anchor="ctr"/>
-          <a:lstStyle/>
-          <a:p>
-            <a:pPr algn="ctr"/>
-            <a:endParaRPr kumimoji="1" lang="ja-JP" altLang="en-US"/>
-          </a:p>
-        </p:txBody>
-      </p:sp>
     </p:spTree>
     <p:extLst>
       <p:ext uri="{BB962C8B-B14F-4D97-AF65-F5344CB8AC3E}">
-        <p14:creationId xmlns:p14="http://schemas.microsoft.com/office/powerpoint/2010/main" val="2295305475"/>
+        <p14:creationId xmlns:p14="http://schemas.microsoft.com/office/powerpoint/2010/main" val="3672827483"/>
       </p:ext>
     </p:extLst>
   </p:cSld>
@@ -25016,7 +30050,7 @@
 </p:sld>
 </file>
 
-<file path=ppt/slides/slide6.xml><?xml version="1.0" encoding="utf-8"?>
+<file path=ppt/slides/slide7.xml><?xml version="1.0" encoding="utf-8"?>
 <p:sld xmlns:a="http://schemas.openxmlformats.org/drawingml/2006/main" xmlns:r="http://schemas.openxmlformats.org/officeDocument/2006/relationships" xmlns:p="http://schemas.openxmlformats.org/presentationml/2006/main">
   <p:cSld>
     <p:spTree>
@@ -25065,8 +30099,8 @@
           </a:p>
         </p:txBody>
       </p:sp>
-      <mc:AlternateContent xmlns:mc="http://schemas.openxmlformats.org/markup-compatibility/2006">
-        <mc:Choice xmlns:a14="http://schemas.microsoft.com/office/drawing/2010/main" Requires="a14">
+      <mc:AlternateContent xmlns:mc="http://schemas.openxmlformats.org/markup-compatibility/2006" xmlns:a14="http://schemas.microsoft.com/office/drawing/2010/main">
+        <mc:Choice Requires="a14">
           <p:sp>
             <p:nvSpPr>
               <p:cNvPr id="3" name="コンテンツ プレースホルダー 2">
@@ -25203,7 +30237,7 @@
             </p:txBody>
           </p:sp>
         </mc:Choice>
-        <mc:Fallback>
+        <mc:Fallback xmlns="">
           <p:sp>
             <p:nvSpPr>
               <p:cNvPr id="3" name="コンテンツ プレースホルダー 2">
@@ -25222,7 +30256,7 @@
             </p:nvSpPr>
             <p:spPr>
               <a:blipFill>
-                <a:blip r:embed="rId2"/>
+                <a:blip r:embed="rId3"/>
                 <a:stretch>
                   <a:fillRect l="-1086" t="-2326"/>
                 </a:stretch>
@@ -25266,7 +30300,7 @@
           <a:p>
             <a:fld id="{EA2F3317-65BA-D746-98B8-3038158C8C28}" type="slidenum">
               <a:rPr kumimoji="1" lang="ja-JP" altLang="en-US" smtClean="0"/>
-              <a:t>6</a:t>
+              <a:t>7</a:t>
             </a:fld>
             <a:endParaRPr kumimoji="1" lang="ja-JP" altLang="en-US"/>
           </a:p>
@@ -25287,7 +30321,7 @@
           <p:nvPr/>
         </p:nvPicPr>
         <p:blipFill>
-          <a:blip r:embed="rId3"/>
+          <a:blip r:embed="rId4"/>
           <a:stretch>
             <a:fillRect/>
           </a:stretch>
@@ -25317,7 +30351,7 @@
           <p:nvPr/>
         </p:nvPicPr>
         <p:blipFill>
-          <a:blip r:embed="rId4"/>
+          <a:blip r:embed="rId5"/>
           <a:stretch>
             <a:fillRect/>
           </a:stretch>
@@ -25347,7 +30381,7 @@
           <p:nvPr/>
         </p:nvPicPr>
         <p:blipFill>
-          <a:blip r:embed="rId4"/>
+          <a:blip r:embed="rId5"/>
           <a:stretch>
             <a:fillRect/>
           </a:stretch>
@@ -25666,7 +30700,7 @@
                 <a:avLst/>
               </a:prstGeom>
               <a:blipFill>
-                <a:blip r:embed="rId5"/>
+                <a:blip r:embed="rId6"/>
                 <a:stretch>
                   <a:fillRect t="-2273" b="-9091"/>
                 </a:stretch>
@@ -25687,8 +30721,8 @@
           </p:sp>
         </mc:Fallback>
       </mc:AlternateContent>
-      <mc:AlternateContent xmlns:mc="http://schemas.openxmlformats.org/markup-compatibility/2006">
-        <mc:Choice xmlns:a14="http://schemas.microsoft.com/office/drawing/2010/main" Requires="a14">
+      <mc:AlternateContent xmlns:mc="http://schemas.openxmlformats.org/markup-compatibility/2006" xmlns:a14="http://schemas.microsoft.com/office/drawing/2010/main">
+        <mc:Choice Requires="a14">
           <p:sp>
             <p:nvSpPr>
               <p:cNvPr id="18" name="テキスト ボックス 17">
@@ -25926,7 +30960,7 @@
             </p:txBody>
           </p:sp>
         </mc:Choice>
-        <mc:Fallback>
+        <mc:Fallback xmlns="">
           <p:sp>
             <p:nvSpPr>
               <p:cNvPr id="18" name="テキスト ボックス 17">
@@ -25950,7 +30984,7 @@
                 <a:avLst/>
               </a:prstGeom>
               <a:blipFill>
-                <a:blip r:embed="rId6"/>
+                <a:blip r:embed="rId7"/>
                 <a:stretch>
                   <a:fillRect l="-917" t="-2353" b="-11765"/>
                 </a:stretch>
@@ -25986,7 +31020,7 @@
           <p:nvPr/>
         </p:nvPicPr>
         <p:blipFill>
-          <a:blip r:embed="rId7"/>
+          <a:blip r:embed="rId8"/>
           <a:stretch>
             <a:fillRect/>
           </a:stretch>
@@ -26077,7 +31111,7 @@
                 <a:avLst/>
               </a:prstGeom>
               <a:blipFill>
-                <a:blip r:embed="rId8"/>
+                <a:blip r:embed="rId9"/>
                 <a:stretch>
                   <a:fillRect l="-12000" r="-12000"/>
                 </a:stretch>
@@ -26174,7 +31208,7 @@
                 <a:avLst/>
               </a:prstGeom>
               <a:blipFill>
-                <a:blip r:embed="rId9"/>
+                <a:blip r:embed="rId10"/>
                 <a:stretch>
                   <a:fillRect l="-12000" r="-16000"/>
                 </a:stretch>
@@ -26210,7 +31244,7 @@
           <p:nvPr/>
         </p:nvPicPr>
         <p:blipFill>
-          <a:blip r:embed="rId10"/>
+          <a:blip r:embed="rId11"/>
           <a:stretch>
             <a:fillRect/>
           </a:stretch>
@@ -26240,7 +31274,7 @@
           <p:nvPr/>
         </p:nvPicPr>
         <p:blipFill>
-          <a:blip r:embed="rId11"/>
+          <a:blip r:embed="rId12"/>
           <a:stretch>
             <a:fillRect/>
           </a:stretch>
@@ -26301,8 +31335,8 @@
           </a:fontRef>
         </p:style>
       </p:cxnSp>
-      <mc:AlternateContent xmlns:mc="http://schemas.openxmlformats.org/markup-compatibility/2006">
-        <mc:Choice xmlns:a14="http://schemas.microsoft.com/office/drawing/2010/main" Requires="a14">
+      <mc:AlternateContent xmlns:mc="http://schemas.openxmlformats.org/markup-compatibility/2006" xmlns:a14="http://schemas.microsoft.com/office/drawing/2010/main">
+        <mc:Choice Requires="a14">
           <p:sp>
             <p:nvSpPr>
               <p:cNvPr id="38" name="テキスト ボックス 37">
@@ -26395,7 +31429,7 @@
             </p:txBody>
           </p:sp>
         </mc:Choice>
-        <mc:Fallback>
+        <mc:Fallback xmlns="">
           <p:sp>
             <p:nvSpPr>
               <p:cNvPr id="38" name="テキスト ボックス 37">
@@ -26419,7 +31453,7 @@
                 <a:avLst/>
               </a:prstGeom>
               <a:blipFill>
-                <a:blip r:embed="rId12"/>
+                <a:blip r:embed="rId13"/>
                 <a:stretch>
                   <a:fillRect l="-2139" t="-2105" b="-3158"/>
                 </a:stretch>
@@ -26765,7 +31799,7 @@
                 <a:avLst/>
               </a:prstGeom>
               <a:blipFill>
-                <a:blip r:embed="rId13"/>
+                <a:blip r:embed="rId14"/>
                 <a:stretch>
                   <a:fillRect l="-2247" t="-1695" r="-1685" b="-2542"/>
                 </a:stretch>
@@ -27202,7 +32236,7 @@
 </p:sld>
 </file>
 
-<file path=ppt/slides/slide7.xml><?xml version="1.0" encoding="utf-8"?>
+<file path=ppt/slides/slide8.xml><?xml version="1.0" encoding="utf-8"?>
 <p:sld xmlns:a="http://schemas.openxmlformats.org/drawingml/2006/main" xmlns:r="http://schemas.openxmlformats.org/officeDocument/2006/relationships" xmlns:p="http://schemas.openxmlformats.org/presentationml/2006/main">
   <p:cSld>
     <p:spTree>
@@ -27247,8 +32281,8 @@
           </a:p>
         </p:txBody>
       </p:sp>
-      <mc:AlternateContent xmlns:mc="http://schemas.openxmlformats.org/markup-compatibility/2006">
-        <mc:Choice xmlns:a14="http://schemas.microsoft.com/office/drawing/2010/main" Requires="a14">
+      <mc:AlternateContent xmlns:mc="http://schemas.openxmlformats.org/markup-compatibility/2006" xmlns:a14="http://schemas.microsoft.com/office/drawing/2010/main">
+        <mc:Choice Requires="a14">
           <p:sp>
             <p:nvSpPr>
               <p:cNvPr id="3" name="コンテンツ プレースホルダー 2">
@@ -27482,7 +32516,7 @@
             </p:txBody>
           </p:sp>
         </mc:Choice>
-        <mc:Fallback>
+        <mc:Fallback xmlns="">
           <p:sp>
             <p:nvSpPr>
               <p:cNvPr id="3" name="コンテンツ プレースホルダー 2">
@@ -27501,7 +32535,7 @@
             </p:nvSpPr>
             <p:spPr>
               <a:blipFill>
-                <a:blip r:embed="rId2"/>
+                <a:blip r:embed="rId3"/>
                 <a:stretch>
                   <a:fillRect l="-1086" t="-2326"/>
                 </a:stretch>
@@ -27545,7 +32579,7 @@
           <a:p>
             <a:fld id="{EA2F3317-65BA-D746-98B8-3038158C8C28}" type="slidenum">
               <a:rPr kumimoji="1" lang="ja-JP" altLang="en-US" smtClean="0"/>
-              <a:t>7</a:t>
+              <a:t>8</a:t>
             </a:fld>
             <a:endParaRPr kumimoji="1" lang="ja-JP" altLang="en-US"/>
           </a:p>
@@ -27566,7 +32600,7 @@
           <p:nvPr/>
         </p:nvPicPr>
         <p:blipFill>
-          <a:blip r:embed="rId3"/>
+          <a:blip r:embed="rId4"/>
           <a:stretch>
             <a:fillRect/>
           </a:stretch>
@@ -27739,7 +32773,7 @@
           <p:nvPr/>
         </p:nvPicPr>
         <p:blipFill>
-          <a:blip r:embed="rId4"/>
+          <a:blip r:embed="rId5"/>
           <a:stretch>
             <a:fillRect/>
           </a:stretch>
@@ -27767,7 +32801,7 @@
 </p:sld>
 </file>
 
-<file path=ppt/slides/slide8.xml><?xml version="1.0" encoding="utf-8"?>
+<file path=ppt/slides/slide9.xml><?xml version="1.0" encoding="utf-8"?>
 <p:sld xmlns:a="http://schemas.openxmlformats.org/drawingml/2006/main" xmlns:r="http://schemas.openxmlformats.org/officeDocument/2006/relationships" xmlns:p="http://schemas.openxmlformats.org/presentationml/2006/main">
   <p:cSld>
     <p:spTree>
@@ -27822,8 +32856,8 @@
           </a:p>
         </p:txBody>
       </p:sp>
-      <mc:AlternateContent xmlns:mc="http://schemas.openxmlformats.org/markup-compatibility/2006">
-        <mc:Choice xmlns:a14="http://schemas.microsoft.com/office/drawing/2010/main" Requires="a14">
+      <mc:AlternateContent xmlns:mc="http://schemas.openxmlformats.org/markup-compatibility/2006" xmlns:a14="http://schemas.microsoft.com/office/drawing/2010/main">
+        <mc:Choice Requires="a14">
           <p:sp>
             <p:nvSpPr>
               <p:cNvPr id="3" name="コンテンツ プレースホルダー 2">
@@ -27944,7 +32978,7 @@
                       <a:srgbClr val="FF0000"/>
                     </a:solidFill>
                   </a:rPr>
-                  <a:t>大小関係</a:t>
+                  <a:t>順序関係</a:t>
                 </a:r>
                 <a:r>
                   <a:rPr lang="ja-JP" altLang="en-US"/>
@@ -27966,7 +33000,7 @@
             </p:txBody>
           </p:sp>
         </mc:Choice>
-        <mc:Fallback>
+        <mc:Fallback xmlns="">
           <p:sp>
             <p:nvSpPr>
               <p:cNvPr id="3" name="コンテンツ プレースホルダー 2">
@@ -27985,7 +33019,7 @@
             </p:nvSpPr>
             <p:spPr>
               <a:blipFill>
-                <a:blip r:embed="rId2"/>
+                <a:blip r:embed="rId3"/>
                 <a:stretch>
                   <a:fillRect l="-1086" t="-2326"/>
                 </a:stretch>
@@ -28363,7 +33397,7 @@
                 <a:avLst/>
               </a:prstGeom>
               <a:blipFill>
-                <a:blip r:embed="rId3"/>
+                <a:blip r:embed="rId4"/>
                 <a:stretch>
                   <a:fillRect l="-1852" b="-6796"/>
                 </a:stretch>
@@ -28741,7 +33775,7 @@
                 <a:avLst/>
               </a:prstGeom>
               <a:blipFill>
-                <a:blip r:embed="rId4"/>
+                <a:blip r:embed="rId5"/>
                 <a:stretch>
                   <a:fillRect l="-1587" b="-6796"/>
                 </a:stretch>
@@ -28785,7 +33819,7 @@
           <a:p>
             <a:fld id="{A05843C0-813E-B949-A4C0-2511A34E55B1}" type="slidenum">
               <a:rPr kumimoji="1" lang="ja-JP" altLang="en-US" smtClean="0"/>
-              <a:t>8</a:t>
+              <a:t>9</a:t>
             </a:fld>
             <a:endParaRPr kumimoji="1" lang="ja-JP" altLang="en-US"/>
           </a:p>
@@ -28795,541 +33829,6 @@
     <p:extLst>
       <p:ext uri="{BB962C8B-B14F-4D97-AF65-F5344CB8AC3E}">
         <p14:creationId xmlns:p14="http://schemas.microsoft.com/office/powerpoint/2010/main" val="2091940305"/>
-      </p:ext>
-    </p:extLst>
-  </p:cSld>
-  <p:clrMapOvr>
-    <a:masterClrMapping/>
-  </p:clrMapOvr>
-</p:sld>
-</file>
-
-<file path=ppt/slides/slide9.xml><?xml version="1.0" encoding="utf-8"?>
-<p:sld xmlns:a="http://schemas.openxmlformats.org/drawingml/2006/main" xmlns:r="http://schemas.openxmlformats.org/officeDocument/2006/relationships" xmlns:p="http://schemas.openxmlformats.org/presentationml/2006/main">
-  <p:cSld>
-    <p:spTree>
-      <p:nvGrpSpPr>
-        <p:cNvPr id="1" name="">
-          <a:extLst>
-            <a:ext uri="{FF2B5EF4-FFF2-40B4-BE49-F238E27FC236}">
-              <a16:creationId xmlns:a16="http://schemas.microsoft.com/office/drawing/2014/main" id="{F9830DB4-2795-50ED-BD15-2C8A3873763D}"/>
-            </a:ext>
-          </a:extLst>
-        </p:cNvPr>
-        <p:cNvGrpSpPr/>
-        <p:nvPr/>
-      </p:nvGrpSpPr>
-      <p:grpSpPr>
-        <a:xfrm>
-          <a:off x="0" y="0"/>
-          <a:ext cx="0" cy="0"/>
-          <a:chOff x="0" y="0"/>
-          <a:chExt cx="0" cy="0"/>
-        </a:xfrm>
-      </p:grpSpPr>
-      <p:sp>
-        <p:nvSpPr>
-          <p:cNvPr id="2" name="タイトル 1">
-            <a:extLst>
-              <a:ext uri="{FF2B5EF4-FFF2-40B4-BE49-F238E27FC236}">
-                <a16:creationId xmlns:a16="http://schemas.microsoft.com/office/drawing/2014/main" id="{5BA2D152-2511-CD69-C92D-664D2F09D713}"/>
-              </a:ext>
-            </a:extLst>
-          </p:cNvPr>
-          <p:cNvSpPr>
-            <a:spLocks noGrp="1"/>
-          </p:cNvSpPr>
-          <p:nvPr>
-            <p:ph type="title"/>
-          </p:nvPr>
-        </p:nvSpPr>
-        <p:spPr/>
-        <p:txBody>
-          <a:bodyPr/>
-          <a:lstStyle/>
-          <a:p>
-            <a:r>
-              <a:rPr kumimoji="1" lang="ja-JP" altLang="en-US"/>
-              <a:t>手法の比較</a:t>
-            </a:r>
-          </a:p>
-        </p:txBody>
-      </p:sp>
-      <p:sp>
-        <p:nvSpPr>
-          <p:cNvPr id="4" name="スライド番号プレースホルダー 3">
-            <a:extLst>
-              <a:ext uri="{FF2B5EF4-FFF2-40B4-BE49-F238E27FC236}">
-                <a16:creationId xmlns:a16="http://schemas.microsoft.com/office/drawing/2014/main" id="{865737B3-D9D7-6F2B-8571-00204C4BA8A1}"/>
-              </a:ext>
-            </a:extLst>
-          </p:cNvPr>
-          <p:cNvSpPr>
-            <a:spLocks noGrp="1"/>
-          </p:cNvSpPr>
-          <p:nvPr>
-            <p:ph type="sldNum" sz="quarter" idx="12"/>
-          </p:nvPr>
-        </p:nvSpPr>
-        <p:spPr/>
-        <p:txBody>
-          <a:bodyPr/>
-          <a:lstStyle/>
-          <a:p>
-            <a:fld id="{A05843C0-813E-B949-A4C0-2511A34E55B1}" type="slidenum">
-              <a:rPr kumimoji="1" lang="ja-JP" altLang="en-US" smtClean="0"/>
-              <a:t>9</a:t>
-            </a:fld>
-            <a:endParaRPr kumimoji="1" lang="ja-JP" altLang="en-US"/>
-          </a:p>
-        </p:txBody>
-      </p:sp>
-      <p:pic>
-        <p:nvPicPr>
-          <p:cNvPr id="8" name="図 7" descr="グラフ, 散布図&#10;&#10;自動的に生成された説明">
-            <a:extLst>
-              <a:ext uri="{FF2B5EF4-FFF2-40B4-BE49-F238E27FC236}">
-                <a16:creationId xmlns:a16="http://schemas.microsoft.com/office/drawing/2014/main" id="{665603E3-B8D6-A127-CA24-C3789F315D24}"/>
-              </a:ext>
-            </a:extLst>
-          </p:cNvPr>
-          <p:cNvPicPr>
-            <a:picLocks noChangeAspect="1"/>
-          </p:cNvPicPr>
-          <p:nvPr/>
-        </p:nvPicPr>
-        <p:blipFill>
-          <a:blip r:embed="rId2"/>
-          <a:stretch>
-            <a:fillRect/>
-          </a:stretch>
-        </p:blipFill>
-        <p:spPr>
-          <a:xfrm>
-            <a:off x="171370" y="1693997"/>
-            <a:ext cx="11849259" cy="2211421"/>
-          </a:xfrm>
-          <a:prstGeom prst="rect">
-            <a:avLst/>
-          </a:prstGeom>
-        </p:spPr>
-      </p:pic>
-      <p:sp>
-        <p:nvSpPr>
-          <p:cNvPr id="5" name="テキスト ボックス 4">
-            <a:extLst>
-              <a:ext uri="{FF2B5EF4-FFF2-40B4-BE49-F238E27FC236}">
-                <a16:creationId xmlns:a16="http://schemas.microsoft.com/office/drawing/2014/main" id="{212BD358-E3A1-989D-B981-E0581C575082}"/>
-              </a:ext>
-            </a:extLst>
-          </p:cNvPr>
-          <p:cNvSpPr txBox="1"/>
-          <p:nvPr/>
-        </p:nvSpPr>
-        <p:spPr>
-          <a:xfrm>
-            <a:off x="171370" y="1399660"/>
-            <a:ext cx="4051139" cy="369332"/>
-          </a:xfrm>
-          <a:prstGeom prst="rect">
-            <a:avLst/>
-          </a:prstGeom>
-          <a:noFill/>
-        </p:spPr>
-        <p:txBody>
-          <a:bodyPr wrap="square" rtlCol="0">
-            <a:spAutoFit/>
-          </a:bodyPr>
-          <a:lstStyle/>
-          <a:p>
-            <a:r>
-              <a:rPr kumimoji="1" lang="ja-JP" altLang="en-US" b="1"/>
-              <a:t>既存のシミュレーション手法</a:t>
-            </a:r>
-          </a:p>
-        </p:txBody>
-      </p:sp>
-      <p:pic>
-        <p:nvPicPr>
-          <p:cNvPr id="7" name="図 6" descr="グラフ, 散布図&#10;&#10;自動的に生成された説明">
-            <a:extLst>
-              <a:ext uri="{FF2B5EF4-FFF2-40B4-BE49-F238E27FC236}">
-                <a16:creationId xmlns:a16="http://schemas.microsoft.com/office/drawing/2014/main" id="{B20E89B4-9A0B-3D8C-1B90-501C33CFED53}"/>
-              </a:ext>
-            </a:extLst>
-          </p:cNvPr>
-          <p:cNvPicPr>
-            <a:picLocks noChangeAspect="1"/>
-          </p:cNvPicPr>
-          <p:nvPr/>
-        </p:nvPicPr>
-        <p:blipFill>
-          <a:blip r:embed="rId3"/>
-          <a:stretch>
-            <a:fillRect/>
-          </a:stretch>
-        </p:blipFill>
-        <p:spPr>
-          <a:xfrm>
-            <a:off x="85684" y="4488830"/>
-            <a:ext cx="12020629" cy="2211863"/>
-          </a:xfrm>
-          <a:prstGeom prst="rect">
-            <a:avLst/>
-          </a:prstGeom>
-        </p:spPr>
-      </p:pic>
-      <p:sp>
-        <p:nvSpPr>
-          <p:cNvPr id="9" name="テキスト ボックス 8">
-            <a:extLst>
-              <a:ext uri="{FF2B5EF4-FFF2-40B4-BE49-F238E27FC236}">
-                <a16:creationId xmlns:a16="http://schemas.microsoft.com/office/drawing/2014/main" id="{91D6917A-7AD6-C7BF-504F-29E764E55528}"/>
-              </a:ext>
-            </a:extLst>
-          </p:cNvPr>
-          <p:cNvSpPr txBox="1"/>
-          <p:nvPr/>
-        </p:nvSpPr>
-        <p:spPr>
-          <a:xfrm>
-            <a:off x="171370" y="4119498"/>
-            <a:ext cx="4051139" cy="369332"/>
-          </a:xfrm>
-          <a:prstGeom prst="rect">
-            <a:avLst/>
-          </a:prstGeom>
-          <a:noFill/>
-        </p:spPr>
-        <p:txBody>
-          <a:bodyPr wrap="square" rtlCol="0">
-            <a:spAutoFit/>
-          </a:bodyPr>
-          <a:lstStyle/>
-          <a:p>
-            <a:r>
-              <a:rPr kumimoji="1" lang="ja-JP" altLang="en-US" b="1"/>
-              <a:t>提案するシミュレーション手法</a:t>
-            </a:r>
-          </a:p>
-        </p:txBody>
-      </p:sp>
-      <p:sp>
-        <p:nvSpPr>
-          <p:cNvPr id="10" name="正方形/長方形 9">
-            <a:extLst>
-              <a:ext uri="{FF2B5EF4-FFF2-40B4-BE49-F238E27FC236}">
-                <a16:creationId xmlns:a16="http://schemas.microsoft.com/office/drawing/2014/main" id="{5914A285-B21F-2659-F5AD-4ECE330F1296}"/>
-              </a:ext>
-            </a:extLst>
-          </p:cNvPr>
-          <p:cNvSpPr/>
-          <p:nvPr/>
-        </p:nvSpPr>
-        <p:spPr>
-          <a:xfrm>
-            <a:off x="1886673" y="1690688"/>
-            <a:ext cx="1238492" cy="2128958"/>
-          </a:xfrm>
-          <a:prstGeom prst="rect">
-            <a:avLst/>
-          </a:prstGeom>
-          <a:noFill/>
-          <a:ln w="28575">
-            <a:solidFill>
-              <a:srgbClr val="7030A0"/>
-            </a:solidFill>
-          </a:ln>
-        </p:spPr>
-        <p:style>
-          <a:lnRef idx="2">
-            <a:schemeClr val="accent1">
-              <a:shade val="15000"/>
-            </a:schemeClr>
-          </a:lnRef>
-          <a:fillRef idx="1">
-            <a:schemeClr val="accent1"/>
-          </a:fillRef>
-          <a:effectRef idx="0">
-            <a:schemeClr val="accent1"/>
-          </a:effectRef>
-          <a:fontRef idx="minor">
-            <a:schemeClr val="lt1"/>
-          </a:fontRef>
-        </p:style>
-        <p:txBody>
-          <a:bodyPr rtlCol="0" anchor="ctr"/>
-          <a:lstStyle/>
-          <a:p>
-            <a:pPr algn="ctr"/>
-            <a:endParaRPr kumimoji="1" lang="ja-JP" altLang="en-US"/>
-          </a:p>
-        </p:txBody>
-      </p:sp>
-      <p:sp>
-        <p:nvSpPr>
-          <p:cNvPr id="12" name="正方形/長方形 11">
-            <a:extLst>
-              <a:ext uri="{FF2B5EF4-FFF2-40B4-BE49-F238E27FC236}">
-                <a16:creationId xmlns:a16="http://schemas.microsoft.com/office/drawing/2014/main" id="{DD73AA14-1A65-AEA2-D957-D7586A20F09A}"/>
-              </a:ext>
-            </a:extLst>
-          </p:cNvPr>
-          <p:cNvSpPr/>
-          <p:nvPr/>
-        </p:nvSpPr>
-        <p:spPr>
-          <a:xfrm>
-            <a:off x="1772855" y="4502773"/>
-            <a:ext cx="1352310" cy="2157208"/>
-          </a:xfrm>
-          <a:prstGeom prst="rect">
-            <a:avLst/>
-          </a:prstGeom>
-          <a:noFill/>
-          <a:ln w="28575">
-            <a:solidFill>
-              <a:srgbClr val="7030A0"/>
-            </a:solidFill>
-          </a:ln>
-        </p:spPr>
-        <p:style>
-          <a:lnRef idx="2">
-            <a:schemeClr val="accent1">
-              <a:shade val="15000"/>
-            </a:schemeClr>
-          </a:lnRef>
-          <a:fillRef idx="1">
-            <a:schemeClr val="accent1"/>
-          </a:fillRef>
-          <a:effectRef idx="0">
-            <a:schemeClr val="accent1"/>
-          </a:effectRef>
-          <a:fontRef idx="minor">
-            <a:schemeClr val="lt1"/>
-          </a:fontRef>
-        </p:style>
-        <p:txBody>
-          <a:bodyPr rtlCol="0" anchor="ctr"/>
-          <a:lstStyle/>
-          <a:p>
-            <a:pPr algn="ctr"/>
-            <a:endParaRPr kumimoji="1" lang="ja-JP" altLang="en-US"/>
-          </a:p>
-        </p:txBody>
-      </p:sp>
-      <p:sp>
-        <p:nvSpPr>
-          <p:cNvPr id="13" name="正方形/長方形 12">
-            <a:extLst>
-              <a:ext uri="{FF2B5EF4-FFF2-40B4-BE49-F238E27FC236}">
-                <a16:creationId xmlns:a16="http://schemas.microsoft.com/office/drawing/2014/main" id="{1899AE52-567A-784A-A47A-23ADACB81F3B}"/>
-              </a:ext>
-            </a:extLst>
-          </p:cNvPr>
-          <p:cNvSpPr/>
-          <p:nvPr/>
-        </p:nvSpPr>
-        <p:spPr>
-          <a:xfrm>
-            <a:off x="8079128" y="4502773"/>
-            <a:ext cx="1045583" cy="2157208"/>
-          </a:xfrm>
-          <a:prstGeom prst="rect">
-            <a:avLst/>
-          </a:prstGeom>
-          <a:noFill/>
-          <a:ln w="28575">
-            <a:solidFill>
-              <a:srgbClr val="7030A0"/>
-            </a:solidFill>
-          </a:ln>
-        </p:spPr>
-        <p:style>
-          <a:lnRef idx="2">
-            <a:schemeClr val="accent1">
-              <a:shade val="15000"/>
-            </a:schemeClr>
-          </a:lnRef>
-          <a:fillRef idx="1">
-            <a:schemeClr val="accent1"/>
-          </a:fillRef>
-          <a:effectRef idx="0">
-            <a:schemeClr val="accent1"/>
-          </a:effectRef>
-          <a:fontRef idx="minor">
-            <a:schemeClr val="lt1"/>
-          </a:fontRef>
-        </p:style>
-        <p:txBody>
-          <a:bodyPr rtlCol="0" anchor="ctr"/>
-          <a:lstStyle/>
-          <a:p>
-            <a:pPr algn="ctr"/>
-            <a:endParaRPr kumimoji="1" lang="ja-JP" altLang="en-US"/>
-          </a:p>
-        </p:txBody>
-      </p:sp>
-      <p:sp>
-        <p:nvSpPr>
-          <p:cNvPr id="14" name="正方形/長方形 13">
-            <a:extLst>
-              <a:ext uri="{FF2B5EF4-FFF2-40B4-BE49-F238E27FC236}">
-                <a16:creationId xmlns:a16="http://schemas.microsoft.com/office/drawing/2014/main" id="{93214009-FCFA-8B9E-E010-71A4E471DFA3}"/>
-              </a:ext>
-            </a:extLst>
-          </p:cNvPr>
-          <p:cNvSpPr/>
-          <p:nvPr/>
-        </p:nvSpPr>
-        <p:spPr>
-          <a:xfrm>
-            <a:off x="9193672" y="4488830"/>
-            <a:ext cx="783705" cy="2157208"/>
-          </a:xfrm>
-          <a:prstGeom prst="rect">
-            <a:avLst/>
-          </a:prstGeom>
-          <a:noFill/>
-          <a:ln w="28575">
-            <a:solidFill>
-              <a:srgbClr val="7030A0"/>
-            </a:solidFill>
-          </a:ln>
-        </p:spPr>
-        <p:style>
-          <a:lnRef idx="2">
-            <a:schemeClr val="accent1">
-              <a:shade val="15000"/>
-            </a:schemeClr>
-          </a:lnRef>
-          <a:fillRef idx="1">
-            <a:schemeClr val="accent1"/>
-          </a:fillRef>
-          <a:effectRef idx="0">
-            <a:schemeClr val="accent1"/>
-          </a:effectRef>
-          <a:fontRef idx="minor">
-            <a:schemeClr val="lt1"/>
-          </a:fontRef>
-        </p:style>
-        <p:txBody>
-          <a:bodyPr rtlCol="0" anchor="ctr"/>
-          <a:lstStyle/>
-          <a:p>
-            <a:pPr algn="ctr"/>
-            <a:endParaRPr kumimoji="1" lang="ja-JP" altLang="en-US"/>
-          </a:p>
-        </p:txBody>
-      </p:sp>
-      <p:sp>
-        <p:nvSpPr>
-          <p:cNvPr id="15" name="正方形/長方形 14">
-            <a:extLst>
-              <a:ext uri="{FF2B5EF4-FFF2-40B4-BE49-F238E27FC236}">
-                <a16:creationId xmlns:a16="http://schemas.microsoft.com/office/drawing/2014/main" id="{59597383-E449-5AF4-A2D6-21CA83FCD28C}"/>
-              </a:ext>
-            </a:extLst>
-          </p:cNvPr>
-          <p:cNvSpPr/>
-          <p:nvPr/>
-        </p:nvSpPr>
-        <p:spPr>
-          <a:xfrm>
-            <a:off x="7859210" y="1690688"/>
-            <a:ext cx="636608" cy="2128958"/>
-          </a:xfrm>
-          <a:prstGeom prst="rect">
-            <a:avLst/>
-          </a:prstGeom>
-          <a:noFill/>
-          <a:ln w="28575">
-            <a:solidFill>
-              <a:srgbClr val="7030A0"/>
-            </a:solidFill>
-          </a:ln>
-        </p:spPr>
-        <p:style>
-          <a:lnRef idx="2">
-            <a:schemeClr val="accent1">
-              <a:shade val="15000"/>
-            </a:schemeClr>
-          </a:lnRef>
-          <a:fillRef idx="1">
-            <a:schemeClr val="accent1"/>
-          </a:fillRef>
-          <a:effectRef idx="0">
-            <a:schemeClr val="accent1"/>
-          </a:effectRef>
-          <a:fontRef idx="minor">
-            <a:schemeClr val="lt1"/>
-          </a:fontRef>
-        </p:style>
-        <p:txBody>
-          <a:bodyPr rtlCol="0" anchor="ctr"/>
-          <a:lstStyle/>
-          <a:p>
-            <a:pPr algn="ctr"/>
-            <a:endParaRPr kumimoji="1" lang="ja-JP" altLang="en-US"/>
-          </a:p>
-        </p:txBody>
-      </p:sp>
-      <p:sp>
-        <p:nvSpPr>
-          <p:cNvPr id="16" name="正方形/長方形 15">
-            <a:extLst>
-              <a:ext uri="{FF2B5EF4-FFF2-40B4-BE49-F238E27FC236}">
-                <a16:creationId xmlns:a16="http://schemas.microsoft.com/office/drawing/2014/main" id="{4A836A72-23DF-7095-DB53-8E5A6435F6C9}"/>
-              </a:ext>
-            </a:extLst>
-          </p:cNvPr>
-          <p:cNvSpPr/>
-          <p:nvPr/>
-        </p:nvSpPr>
-        <p:spPr>
-          <a:xfrm>
-            <a:off x="8692587" y="1690688"/>
-            <a:ext cx="432123" cy="2128958"/>
-          </a:xfrm>
-          <a:prstGeom prst="rect">
-            <a:avLst/>
-          </a:prstGeom>
-          <a:noFill/>
-          <a:ln w="28575">
-            <a:solidFill>
-              <a:srgbClr val="7030A0"/>
-            </a:solidFill>
-          </a:ln>
-        </p:spPr>
-        <p:style>
-          <a:lnRef idx="2">
-            <a:schemeClr val="accent1">
-              <a:shade val="15000"/>
-            </a:schemeClr>
-          </a:lnRef>
-          <a:fillRef idx="1">
-            <a:schemeClr val="accent1"/>
-          </a:fillRef>
-          <a:effectRef idx="0">
-            <a:schemeClr val="accent1"/>
-          </a:effectRef>
-          <a:fontRef idx="minor">
-            <a:schemeClr val="lt1"/>
-          </a:fontRef>
-        </p:style>
-        <p:txBody>
-          <a:bodyPr rtlCol="0" anchor="ctr"/>
-          <a:lstStyle/>
-          <a:p>
-            <a:pPr algn="ctr"/>
-            <a:endParaRPr kumimoji="1" lang="ja-JP" altLang="en-US"/>
-          </a:p>
-        </p:txBody>
-      </p:sp>
-    </p:spTree>
-    <p:extLst>
-      <p:ext uri="{BB962C8B-B14F-4D97-AF65-F5344CB8AC3E}">
-        <p14:creationId xmlns:p14="http://schemas.microsoft.com/office/powerpoint/2010/main" val="2911148074"/>
       </p:ext>
     </p:extLst>
   </p:cSld>
